--- a/slides/LAB11_RAG_pgvector_Bukti_Live.pptx
+++ b/slides/LAB11_RAG_pgvector_Bukti_Live.pptx
@@ -21,6 +21,8 @@
     <p:sldId id="298" r:id="rId12"/>
     <p:sldId id="299" r:id="rId13"/>
     <p:sldId id="300" r:id="rId14"/>
+    <p:sldId id="308" r:id="rId27"/>
+    <p:sldId id="309" r:id="rId28"/>
     <p:sldId id="301" r:id="rId15"/>
     <p:sldId id="302" r:id="rId16"/>
     <p:sldId id="303" r:id="rId17"/>
@@ -2464,6 +2466,10 @@
             <a:prstDash val="solid"/>
           </a:ln>
         </p:spPr>
+        <p:txBody>
+          <a:bodyPr/>
+          <a:p/>
+        </p:txBody>
       </p:sp>
       <p:sp>
         <p:nvSpPr>
@@ -2765,6 +2771,10 @@
             <a:prstDash val="solid"/>
           </a:ln>
         </p:spPr>
+        <p:txBody>
+          <a:bodyPr/>
+          <a:p/>
+        </p:txBody>
       </p:sp>
       <p:pic>
         <p:nvPicPr>
@@ -2844,6 +2854,10 @@
             <a:prstDash val="solid"/>
           </a:ln>
         </p:spPr>
+        <p:txBody>
+          <a:bodyPr/>
+          <a:p/>
+        </p:txBody>
       </p:sp>
       <p:sp>
         <p:nvSpPr>
@@ -2969,6 +2983,10 @@
             <a:prstDash val="solid"/>
           </a:ln>
         </p:spPr>
+        <p:txBody>
+          <a:bodyPr/>
+          <a:p/>
+        </p:txBody>
       </p:sp>
       <p:sp>
         <p:nvSpPr>
@@ -3002,6 +3020,10 @@
             <a:prstDash val="solid"/>
           </a:ln>
         </p:spPr>
+        <p:txBody>
+          <a:bodyPr/>
+          <a:p/>
+        </p:txBody>
       </p:sp>
       <p:sp>
         <p:nvSpPr>
@@ -3035,6 +3057,10 @@
             <a:prstDash val="solid"/>
           </a:ln>
         </p:spPr>
+        <p:txBody>
+          <a:bodyPr/>
+          <a:p/>
+        </p:txBody>
       </p:sp>
       <p:sp>
         <p:nvSpPr>
@@ -3068,6 +3094,10 @@
             <a:prstDash val="solid"/>
           </a:ln>
         </p:spPr>
+        <p:txBody>
+          <a:bodyPr/>
+          <a:p/>
+        </p:txBody>
       </p:sp>
       <p:sp>
         <p:nvSpPr>
@@ -3101,6 +3131,10 @@
             <a:prstDash val="solid"/>
           </a:ln>
         </p:spPr>
+        <p:txBody>
+          <a:bodyPr/>
+          <a:p/>
+        </p:txBody>
       </p:sp>
       <p:sp>
         <p:nvSpPr>
@@ -3247,6 +3281,10 @@
             <a:prstDash val="solid"/>
           </a:ln>
         </p:spPr>
+        <p:txBody>
+          <a:bodyPr/>
+          <a:p/>
+        </p:txBody>
       </p:sp>
       <p:sp>
         <p:nvSpPr>
@@ -3280,6 +3318,10 @@
             <a:prstDash val="solid"/>
           </a:ln>
         </p:spPr>
+        <p:txBody>
+          <a:bodyPr/>
+          <a:p/>
+        </p:txBody>
       </p:sp>
       <p:sp>
         <p:nvSpPr>
@@ -3313,6 +3355,10 @@
             <a:prstDash val="solid"/>
           </a:ln>
         </p:spPr>
+        <p:txBody>
+          <a:bodyPr/>
+          <a:p/>
+        </p:txBody>
       </p:sp>
       <p:sp>
         <p:nvSpPr>
@@ -3346,6 +3392,10 @@
             <a:prstDash val="solid"/>
           </a:ln>
         </p:spPr>
+        <p:txBody>
+          <a:bodyPr/>
+          <a:p/>
+        </p:txBody>
       </p:sp>
       <p:sp>
         <p:nvSpPr>
@@ -3379,6 +3429,10 @@
             <a:prstDash val="solid"/>
           </a:ln>
         </p:spPr>
+        <p:txBody>
+          <a:bodyPr/>
+          <a:p/>
+        </p:txBody>
       </p:sp>
       <p:sp>
         <p:nvSpPr>
@@ -3657,6 +3711,10 @@
             <a:prstDash val="solid"/>
           </a:ln>
         </p:spPr>
+        <p:txBody>
+          <a:bodyPr/>
+          <a:p/>
+        </p:txBody>
       </p:sp>
       <p:pic>
         <p:nvPicPr>
@@ -3736,6 +3794,10 @@
             <a:prstDash val="solid"/>
           </a:ln>
         </p:spPr>
+        <p:txBody>
+          <a:bodyPr/>
+          <a:p/>
+        </p:txBody>
       </p:sp>
       <p:sp>
         <p:nvSpPr>
@@ -3861,6 +3923,10 @@
             <a:prstDash val="solid"/>
           </a:ln>
         </p:spPr>
+        <p:txBody>
+          <a:bodyPr/>
+          <a:p/>
+        </p:txBody>
       </p:sp>
       <p:sp>
         <p:nvSpPr>
@@ -4465,6 +4531,10 @@
             <a:prstDash val="solid"/>
           </a:ln>
         </p:spPr>
+        <p:txBody>
+          <a:bodyPr/>
+          <a:p/>
+        </p:txBody>
       </p:sp>
       <p:sp>
         <p:nvSpPr>
@@ -4582,6 +4652,10 @@
             <a:prstDash val="solid"/>
           </a:ln>
         </p:spPr>
+        <p:txBody>
+          <a:bodyPr/>
+          <a:p/>
+        </p:txBody>
       </p:sp>
       <p:sp>
         <p:nvSpPr>
@@ -4832,6 +4906,10 @@
             <a:prstDash val="solid"/>
           </a:ln>
         </p:spPr>
+        <p:txBody>
+          <a:bodyPr/>
+          <a:p/>
+        </p:txBody>
       </p:sp>
       <p:pic>
         <p:nvPicPr>
@@ -4911,6 +4989,10 @@
             <a:prstDash val="solid"/>
           </a:ln>
         </p:spPr>
+        <p:txBody>
+          <a:bodyPr/>
+          <a:p/>
+        </p:txBody>
       </p:sp>
       <p:sp>
         <p:nvSpPr>
@@ -5036,6 +5118,10 @@
             <a:prstDash val="solid"/>
           </a:ln>
         </p:spPr>
+        <p:txBody>
+          <a:bodyPr/>
+          <a:p/>
+        </p:txBody>
       </p:sp>
       <p:sp>
         <p:nvSpPr>
@@ -5069,6 +5155,10 @@
             <a:prstDash val="solid"/>
           </a:ln>
         </p:spPr>
+        <p:txBody>
+          <a:bodyPr/>
+          <a:p/>
+        </p:txBody>
       </p:sp>
       <p:sp>
         <p:nvSpPr>
@@ -5102,6 +5192,10 @@
             <a:prstDash val="solid"/>
           </a:ln>
         </p:spPr>
+        <p:txBody>
+          <a:bodyPr/>
+          <a:p/>
+        </p:txBody>
       </p:sp>
       <p:sp>
         <p:nvSpPr>
@@ -5135,6 +5229,10 @@
             <a:prstDash val="solid"/>
           </a:ln>
         </p:spPr>
+        <p:txBody>
+          <a:bodyPr/>
+          <a:p/>
+        </p:txBody>
       </p:sp>
       <p:sp>
         <p:nvSpPr>
@@ -5168,6 +5266,10 @@
             <a:prstDash val="solid"/>
           </a:ln>
         </p:spPr>
+        <p:txBody>
+          <a:bodyPr/>
+          <a:p/>
+        </p:txBody>
       </p:sp>
       <p:sp>
         <p:nvSpPr>
@@ -5315,6 +5417,10 @@
             <a:prstDash val="solid"/>
           </a:ln>
         </p:spPr>
+        <p:txBody>
+          <a:bodyPr/>
+          <a:p/>
+        </p:txBody>
       </p:sp>
       <p:sp>
         <p:nvSpPr>
@@ -5348,6 +5454,10 @@
             <a:prstDash val="solid"/>
           </a:ln>
         </p:spPr>
+        <p:txBody>
+          <a:bodyPr/>
+          <a:p/>
+        </p:txBody>
       </p:sp>
       <p:sp>
         <p:nvSpPr>
@@ -5381,6 +5491,10 @@
             <a:prstDash val="solid"/>
           </a:ln>
         </p:spPr>
+        <p:txBody>
+          <a:bodyPr/>
+          <a:p/>
+        </p:txBody>
       </p:sp>
       <p:sp>
         <p:nvSpPr>
@@ -5414,6 +5528,10 @@
             <a:prstDash val="solid"/>
           </a:ln>
         </p:spPr>
+        <p:txBody>
+          <a:bodyPr/>
+          <a:p/>
+        </p:txBody>
       </p:sp>
       <p:sp>
         <p:nvSpPr>
@@ -5447,6 +5565,10 @@
             <a:prstDash val="solid"/>
           </a:ln>
         </p:spPr>
+        <p:txBody>
+          <a:bodyPr/>
+          <a:p/>
+        </p:txBody>
       </p:sp>
       <p:sp>
         <p:nvSpPr>
@@ -5725,6 +5847,10 @@
             <a:prstDash val="solid"/>
           </a:ln>
         </p:spPr>
+        <p:txBody>
+          <a:bodyPr/>
+          <a:p/>
+        </p:txBody>
       </p:sp>
       <p:pic>
         <p:nvPicPr>
@@ -5804,6 +5930,10 @@
             <a:prstDash val="solid"/>
           </a:ln>
         </p:spPr>
+        <p:txBody>
+          <a:bodyPr/>
+          <a:p/>
+        </p:txBody>
       </p:sp>
       <p:sp>
         <p:nvSpPr>
@@ -5929,6 +6059,10 @@
             <a:prstDash val="solid"/>
           </a:ln>
         </p:spPr>
+        <p:txBody>
+          <a:bodyPr/>
+          <a:p/>
+        </p:txBody>
       </p:sp>
       <p:sp>
         <p:nvSpPr>
@@ -6533,6 +6667,10 @@
             <a:prstDash val="solid"/>
           </a:ln>
         </p:spPr>
+        <p:txBody>
+          <a:bodyPr/>
+          <a:p/>
+        </p:txBody>
       </p:sp>
       <p:sp>
         <p:nvSpPr>
@@ -6650,6 +6788,10 @@
             <a:prstDash val="solid"/>
           </a:ln>
         </p:spPr>
+        <p:txBody>
+          <a:bodyPr/>
+          <a:p/>
+        </p:txBody>
       </p:sp>
       <p:sp>
         <p:nvSpPr>
@@ -6752,36 +6894,21 @@
 </file>
 
 <file path=ppt/slides/slide14.xml><?xml version="1.0" encoding="utf-8"?>
-<p:sld xmlns:a="http://schemas.openxmlformats.org/drawingml/2006/main" xmlns:r="http://schemas.openxmlformats.org/officeDocument/2006/relationships" xmlns:p="http://schemas.openxmlformats.org/presentationml/2006/main">
+<p:sld xmlns:a="http://schemas.openxmlformats.org/drawingml/2006/main" xmlns:p="http://schemas.openxmlformats.org/presentationml/2006/main" xmlns:r="http://schemas.openxmlformats.org/officeDocument/2006/relationships">
   <p:cSld>
-    <p:bg>
-      <p:bgPr>
-        <a:solidFill>
-          <a:srgbClr val="FFFFFF"/>
-        </a:solidFill>
-        <a:effectLst/>
-      </p:bgPr>
-    </p:bg>
     <p:spTree>
       <p:nvGrpSpPr>
         <p:cNvPr id="1" name=""/>
         <p:cNvGrpSpPr/>
         <p:nvPr/>
       </p:nvGrpSpPr>
-      <p:grpSpPr>
-        <a:xfrm>
-          <a:off x="0" y="0"/>
-          <a:ext cx="0" cy="0"/>
-          <a:chOff x="0" y="0"/>
-          <a:chExt cx="0" cy="0"/>
-        </a:xfrm>
-      </p:grpSpPr>
+      <p:grpSpPr/>
       <p:sp>
         <p:nvSpPr>
           <p:cNvPr id="2" name="Text 0">
             <a:extLst>
               <a:ext uri="{FF2B5EF4-FFF2-40B4-BE49-F238E27FC236}">
-                <a16:creationId xmlns:a16="http://schemas.microsoft.com/office/drawing/2014/main" id="{DD4054BC-ADC2-4986-AAF9-895DC6D31A3F}"/>
+                <a16:creationId xmlns:a16="http://schemas.microsoft.com/office/drawing/2014/main" id="{F779FF6B-910B-4E58-955B-7B6FE29829C1}"/>
               </a:ext>
             </a:extLst>
           </p:cNvPr>
@@ -6827,7 +6954,7 @@
           <p:cNvPr id="3" name="Text 1">
             <a:extLst>
               <a:ext uri="{FF2B5EF4-FFF2-40B4-BE49-F238E27FC236}">
-                <a16:creationId xmlns:a16="http://schemas.microsoft.com/office/drawing/2014/main" id="{3369F6F8-B7F5-4586-8C44-90E726E5751F}"/>
+                <a16:creationId xmlns:a16="http://schemas.microsoft.com/office/drawing/2014/main" id="{3352C906-5F0A-42A0-94F0-9170DC749E53}"/>
               </a:ext>
             </a:extLst>
           </p:cNvPr>
@@ -6873,7 +7000,7 @@
           <p:cNvPr id="4" name="Shape 2">
             <a:extLst>
               <a:ext uri="{FF2B5EF4-FFF2-40B4-BE49-F238E27FC236}">
-                <a16:creationId xmlns:a16="http://schemas.microsoft.com/office/drawing/2014/main" id="{8A6EEF9E-A69E-4941-A56B-328F8CFBBE86}"/>
+                <a16:creationId xmlns:a16="http://schemas.microsoft.com/office/drawing/2014/main" id="{BAEEB222-C692-4EAC-956E-AC234E3B4E07}"/>
               </a:ext>
             </a:extLst>
           </p:cNvPr>
@@ -6900,10 +7027,14 @@
             <a:prstDash val="solid"/>
           </a:ln>
         </p:spPr>
+        <p:txBody>
+          <a:bodyPr/>
+          <a:p/>
+        </p:txBody>
       </p:sp>
       <p:pic>
         <p:nvPicPr>
-          <p:cNvPr id="29" name="Image 0"/>
+          <p:cNvPr id="43" name="Image 0"/>
           <p:cNvPicPr>
             <a:picLocks noChangeAspect="1"/>
           </p:cNvPicPr>
@@ -6927,7 +7058,391 @@
       </p:pic>
       <p:pic>
         <p:nvPicPr>
-          <p:cNvPr id="30" name="Image 1"/>
+          <p:cNvPr id="44" name="Image 1"/>
+          <p:cNvPicPr>
+            <a:picLocks noChangeAspect="1"/>
+          </p:cNvPicPr>
+          <p:nvPr/>
+        </p:nvPicPr>
+        <p:blipFill>
+          <a:blip r:embed="rId10"/>
+          <a:stretch>
+            <a:fillRect/>
+          </a:stretch>
+        </p:blipFill>
+        <p:spPr>
+          <a:xfrm>
+            <a:off x="10881360" y="182880"/>
+            <a:ext cx="1005840" cy="512064"/>
+          </a:xfrm>
+          <a:prstGeom prst="rect">
+            <a:avLst/>
+          </a:prstGeom>
+        </p:spPr>
+      </p:pic>
+      <p:sp>
+        <p:nvSpPr>
+          <p:cNvPr id="7" name="Shape 3">
+            <a:extLst>
+              <a:ext uri="{FF2B5EF4-FFF2-40B4-BE49-F238E27FC236}">
+                <a16:creationId xmlns:a16="http://schemas.microsoft.com/office/drawing/2014/main" id="{0BB8DDD6-8220-4D71-BBC2-85CF025DF430}"/>
+              </a:ext>
+            </a:extLst>
+          </p:cNvPr>
+          <p:cNvSpPr>
+            <a:spLocks noGrp="1"/>
+          </p:cNvSpPr>
+          <p:nvPr/>
+        </p:nvSpPr>
+        <p:spPr>
+          <a:xfrm>
+            <a:off x="457200" y="868680"/>
+            <a:ext cx="11247120" cy="0"/>
+          </a:xfrm>
+          <a:prstGeom prst="line">
+            <a:avLst/>
+          </a:prstGeom>
+          <a:noFill/>
+          <a:ln w="12700">
+            <a:solidFill>
+              <a:srgbClr val="E2E8F0"/>
+            </a:solidFill>
+            <a:prstDash val="solid"/>
+          </a:ln>
+        </p:spPr>
+        <p:txBody>
+          <a:bodyPr/>
+          <a:p/>
+        </p:txBody>
+      </p:sp>
+      <p:sp>
+        <p:nvSpPr>
+          <p:cNvPr id="8" name="Text 4">
+            <a:extLst>
+              <a:ext uri="{FF2B5EF4-FFF2-40B4-BE49-F238E27FC236}">
+                <a16:creationId xmlns:a16="http://schemas.microsoft.com/office/drawing/2014/main" id="{2465D56B-C6C4-41CD-9002-401D1A37B4F9}"/>
+              </a:ext>
+            </a:extLst>
+          </p:cNvPr>
+          <p:cNvSpPr>
+            <a:spLocks noGrp="1"/>
+          </p:cNvSpPr>
+          <p:nvPr/>
+        </p:nvSpPr>
+        <p:spPr>
+          <a:xfrm>
+            <a:off x="2011680" y="182880"/>
+            <a:ext cx="8138160" cy="502920"/>
+          </a:xfrm>
+          <a:prstGeom prst="rect">
+            <a:avLst/>
+          </a:prstGeom>
+          <a:noFill/>
+        </p:spPr>
+        <p:txBody>
+          <a:bodyPr wrap="square" lIns="0" tIns="0" rIns="0" bIns="0" anchor="ctr"/>
+          <a:lstStyle/>
+          <a:p>
+            <a:pPr marL="0" indent="0" algn="ctr">
+              <a:buNone/>
+            </a:pPr>
+            <a:r>
+              <a:rPr lang="en-US" sz="2200" b="1">
+                <a:solidFill>
+                  <a:srgbClr val="1976D2"/>
+                </a:solidFill>
+                <a:latin typeface="Calibri"/>
+                <a:ea typeface="Calibri"/>
+                <a:cs typeface="Calibri"/>
+              </a:rPr>
+              <a:t>Bukti API | POST menjawab 200</a:t>
+            </a:r>
+            <a:endParaRPr sz="2200"/>
+          </a:p>
+        </p:txBody>
+      </p:sp>
+      <p:sp>
+        <p:nvSpPr>
+          <p:cNvPr id="9" name="Text 5">
+            <a:extLst>
+              <a:ext uri="{FF2B5EF4-FFF2-40B4-BE49-F238E27FC236}">
+                <a16:creationId xmlns:a16="http://schemas.microsoft.com/office/drawing/2014/main" id="{6267422E-13CF-4C4B-B92C-BD5193C399A1}"/>
+              </a:ext>
+            </a:extLst>
+          </p:cNvPr>
+          <p:cNvSpPr>
+            <a:spLocks noGrp="1"/>
+          </p:cNvSpPr>
+          <p:nvPr/>
+        </p:nvSpPr>
+        <p:spPr>
+          <a:xfrm>
+            <a:off x="457200" y="960120"/>
+            <a:ext cx="11247120" cy="320040"/>
+          </a:xfrm>
+          <a:prstGeom prst="rect">
+            <a:avLst/>
+          </a:prstGeom>
+          <a:noFill/>
+        </p:spPr>
+        <p:txBody>
+          <a:bodyPr wrap="square" lIns="0" tIns="0" rIns="0" bIns="0" anchor="ctr"/>
+          <a:lstStyle/>
+          <a:p>
+            <a:pPr marL="0" indent="0" algn="ctr">
+              <a:buNone/>
+            </a:pPr>
+            <a:r>
+              <a:rPr lang="en-US" sz="1200" i="1">
+                <a:solidFill>
+                  <a:srgbClr val="64748B"/>
+                </a:solidFill>
+                <a:latin typeface="Calibri"/>
+                <a:ea typeface="Calibri"/>
+                <a:cs typeface="Calibri"/>
+              </a:rPr>
+              <a:t>Respons nyata pada /api/ask memuat sitasi dan tiga sumber</a:t>
+            </a:r>
+            <a:endParaRPr sz="1200"/>
+          </a:p>
+        </p:txBody>
+      </p:sp>
+      <p:sp>
+        <p:nvSpPr>
+          <p:cNvPr id="10" name="Shape 6">
+            <a:extLst>
+              <a:ext uri="{FF2B5EF4-FFF2-40B4-BE49-F238E27FC236}">
+                <a16:creationId xmlns:a16="http://schemas.microsoft.com/office/drawing/2014/main" id="{F83768A1-8663-4DA0-8F88-261CD281B343}"/>
+              </a:ext>
+            </a:extLst>
+          </p:cNvPr>
+          <p:cNvSpPr>
+            <a:spLocks noGrp="1"/>
+          </p:cNvSpPr>
+          <p:nvPr/>
+        </p:nvSpPr>
+        <p:spPr>
+          <a:xfrm>
+            <a:off x="457200" y="1417320"/>
+            <a:ext cx="5577840" cy="4754880"/>
+          </a:xfrm>
+          <a:prstGeom prst="rect">
+            <a:avLst/>
+          </a:prstGeom>
+          <a:solidFill>
+            <a:srgbClr val="F8FAFC"/>
+          </a:solidFill>
+          <a:ln w="12700">
+            <a:solidFill>
+              <a:srgbClr val="E2E8F0"/>
+            </a:solidFill>
+            <a:prstDash val="solid"/>
+          </a:ln>
+        </p:spPr>
+        <p:txBody>
+          <a:bodyPr/>
+          <a:p/>
+        </p:txBody>
+      </p:sp>
+      <p:sp>
+        <p:nvSpPr>
+          <p:cNvPr id="11" name="Text 7">
+            <a:extLst>
+              <a:ext uri="{FF2B5EF4-FFF2-40B4-BE49-F238E27FC236}">
+                <a16:creationId xmlns:a16="http://schemas.microsoft.com/office/drawing/2014/main" id="{FEA5EA30-C448-4C70-9EC6-2481712E62F8}"/>
+              </a:ext>
+            </a:extLst>
+          </p:cNvPr>
+          <p:cNvSpPr>
+            <a:spLocks noGrp="1"/>
+          </p:cNvSpPr>
+          <p:nvPr/>
+        </p:nvSpPr>
+        <p:spPr>
+          <a:xfrm>
+            <a:off x="685800" y="1600200"/>
+            <a:ext cx="5120640" cy="822960"/>
+          </a:xfrm>
+          <a:prstGeom prst="rect">
+            <a:avLst/>
+          </a:prstGeom>
+          <a:noFill/>
+        </p:spPr>
+        <p:txBody>
+          <a:bodyPr wrap="square" lIns="0" tIns="0" rIns="0" bIns="0" anchor="ctr"/>
+          <a:lstStyle/>
+          <a:p>
+            <a:pPr marL="0" indent="0">
+              <a:buNone/>
+            </a:pPr>
+            <a:r>
+              <a:rPr lang="en-US" sz="1100" b="1" spc="300">
+                <a:solidFill>
+                  <a:srgbClr val="F37021"/>
+                </a:solidFill>
+                <a:latin typeface="Calibri"/>
+                <a:ea typeface="Calibri"/>
+                <a:cs typeface="Calibri"/>
+              </a:rPr>
+              <a:t>PERINTAH, FUNGSI, DAN HASIL</a:t>
+            </a:r>
+            <a:endParaRPr sz="1100"/>
+          </a:p>
+        </p:txBody>
+      </p:sp>
+      <p:pic>
+        <p:nvPicPr>
+          <p:cNvPr id="50" name="Image 2"/>
+          <p:cNvPicPr>
+            <a:picLocks noChangeAspect="1"/>
+          </p:cNvPicPr>
+          <p:nvPr/>
+        </p:nvPicPr>
+        <p:blipFill>
+          <a:blip r:embed="rId8"/>
+          <a:stretch>
+            <a:fillRect/>
+          </a:stretch>
+        </p:blipFill>
+        <p:spPr>
+          <a:xfrm>
+            <a:off x="777240" y="2697480"/>
+            <a:ext cx="292608" cy="292608"/>
+          </a:xfrm>
+          <a:prstGeom prst="rect">
+            <a:avLst/>
+          </a:prstGeom>
+        </p:spPr>
+      </p:pic>
+      <p:sp>
+        <p:nvSpPr>
+          <p:cNvPr id="13" name="Text 8">
+            <a:extLst>
+              <a:ext uri="{FF2B5EF4-FFF2-40B4-BE49-F238E27FC236}">
+                <a16:creationId xmlns:a16="http://schemas.microsoft.com/office/drawing/2014/main" id="{D3B25D18-01EE-4A7E-BCC4-163B8F4E205C}"/>
+              </a:ext>
+            </a:extLst>
+          </p:cNvPr>
+          <p:cNvSpPr>
+            <a:spLocks noGrp="1"/>
+          </p:cNvSpPr>
+          <p:nvPr/>
+        </p:nvSpPr>
+        <p:spPr>
+          <a:xfrm>
+            <a:off x="1207008" y="2606040"/>
+            <a:ext cx="4709160" cy="457200"/>
+          </a:xfrm>
+          <a:prstGeom prst="rect">
+            <a:avLst/>
+          </a:prstGeom>
+          <a:noFill/>
+        </p:spPr>
+        <p:txBody>
+          <a:bodyPr wrap="square" lIns="0" tIns="0" rIns="0" bIns="0" anchor="ctr"/>
+          <a:lstStyle/>
+          <a:p>
+            <a:pPr marL="0" indent="0">
+              <a:buNone/>
+            </a:pPr>
+            <a:r>
+              <a:rPr lang="en-US" sz="1400">
+                <a:solidFill>
+                  <a:srgbClr val="312124"/>
+                </a:solidFill>
+                <a:latin typeface="Aptos" panose="020B0004020202020204" pitchFamily="34" charset="0"/>
+                <a:ea typeface="Calibri"/>
+                <a:cs typeface="Calibri"/>
+              </a:rPr>
+              <a:t>POST /api/ask dengan top_k=3.</a:t>
+            </a:r>
+            <a:endParaRPr sz="1400">
+              <a:solidFill>
+                <a:srgbClr val="312124"/>
+              </a:solidFill>
+              <a:latin typeface="Aptos" panose="020B0004020202020204" pitchFamily="34" charset="0"/>
+            </a:endParaRPr>
+          </a:p>
+        </p:txBody>
+      </p:sp>
+      <p:pic>
+        <p:nvPicPr>
+          <p:cNvPr id="52" name="Image 3"/>
+          <p:cNvPicPr>
+            <a:picLocks noChangeAspect="1"/>
+          </p:cNvPicPr>
+          <p:nvPr/>
+        </p:nvPicPr>
+        <p:blipFill>
+          <a:blip r:embed="rId6"/>
+          <a:stretch>
+            <a:fillRect/>
+          </a:stretch>
+        </p:blipFill>
+        <p:spPr>
+          <a:xfrm>
+            <a:off x="777240" y="3200400"/>
+            <a:ext cx="292608" cy="292608"/>
+          </a:xfrm>
+          <a:prstGeom prst="rect">
+            <a:avLst/>
+          </a:prstGeom>
+        </p:spPr>
+      </p:pic>
+      <p:sp>
+        <p:nvSpPr>
+          <p:cNvPr id="15" name="Text 9">
+            <a:extLst>
+              <a:ext uri="{FF2B5EF4-FFF2-40B4-BE49-F238E27FC236}">
+                <a16:creationId xmlns:a16="http://schemas.microsoft.com/office/drawing/2014/main" id="{EA13C62C-A937-4AB2-A4E7-CAA3ED764E30}"/>
+              </a:ext>
+            </a:extLst>
+          </p:cNvPr>
+          <p:cNvSpPr>
+            <a:spLocks noGrp="1"/>
+          </p:cNvSpPr>
+          <p:nvPr/>
+        </p:nvSpPr>
+        <p:spPr>
+          <a:xfrm>
+            <a:off x="1207008" y="3108960"/>
+            <a:ext cx="4709160" cy="457200"/>
+          </a:xfrm>
+          <a:prstGeom prst="rect">
+            <a:avLst/>
+          </a:prstGeom>
+          <a:noFill/>
+        </p:spPr>
+        <p:txBody>
+          <a:bodyPr wrap="square" lIns="0" tIns="0" rIns="0" bIns="0" anchor="ctr"/>
+          <a:lstStyle/>
+          <a:p>
+            <a:pPr marL="0" indent="0">
+              <a:buNone/>
+            </a:pPr>
+            <a:r>
+              <a:rPr lang="en-US" sz="1400">
+                <a:solidFill>
+                  <a:srgbClr val="312124"/>
+                </a:solidFill>
+                <a:latin typeface="Aptos" panose="020B0004020202020204" pitchFamily="34" charset="0"/>
+                <a:ea typeface="Calibri"/>
+                <a:cs typeface="Calibri"/>
+              </a:rPr>
+              <a:t>Pydantic menerima question dan top_k.</a:t>
+            </a:r>
+            <a:endParaRPr sz="1400">
+              <a:solidFill>
+                <a:srgbClr val="312124"/>
+              </a:solidFill>
+              <a:latin typeface="Aptos" panose="020B0004020202020204" pitchFamily="34" charset="0"/>
+            </a:endParaRPr>
+          </a:p>
+        </p:txBody>
+      </p:sp>
+      <p:pic>
+        <p:nvPicPr>
+          <p:cNvPr id="54" name="Image 4"/>
           <p:cNvPicPr>
             <a:picLocks noChangeAspect="1"/>
           </p:cNvPicPr>
@@ -6941,8 +7456,8 @@
         </p:blipFill>
         <p:spPr>
           <a:xfrm>
-            <a:off x="10881360" y="182880"/>
-            <a:ext cx="1005840" cy="512064"/>
+            <a:off x="777240" y="3703320"/>
+            <a:ext cx="292608" cy="292608"/>
           </a:xfrm>
           <a:prstGeom prst="rect">
             <a:avLst/>
@@ -6951,53 +7466,410 @@
       </p:pic>
       <p:sp>
         <p:nvSpPr>
-          <p:cNvPr id="7" name="Shape 3">
-            <a:extLst>
-              <a:ext uri="{FF2B5EF4-FFF2-40B4-BE49-F238E27FC236}">
-                <a16:creationId xmlns:a16="http://schemas.microsoft.com/office/drawing/2014/main" id="{FAEFB080-BD21-41C3-8266-81DA2E010299}"/>
-              </a:ext>
-            </a:extLst>
-          </p:cNvPr>
-          <p:cNvSpPr>
-            <a:spLocks noGrp="1"/>
-          </p:cNvSpPr>
-          <p:nvPr/>
-        </p:nvSpPr>
-        <p:spPr>
-          <a:xfrm>
-            <a:off x="457200" y="868680"/>
-            <a:ext cx="11247120" cy="0"/>
-          </a:xfrm>
-          <a:prstGeom prst="line">
-            <a:avLst/>
-          </a:prstGeom>
-          <a:noFill/>
+          <p:cNvPr id="17" name="Text 10">
+            <a:extLst>
+              <a:ext uri="{FF2B5EF4-FFF2-40B4-BE49-F238E27FC236}">
+                <a16:creationId xmlns:a16="http://schemas.microsoft.com/office/drawing/2014/main" id="{D7B16F52-3399-4FCE-9D9A-B5CF3C65E519}"/>
+              </a:ext>
+            </a:extLst>
+          </p:cNvPr>
+          <p:cNvSpPr>
+            <a:spLocks noGrp="1"/>
+          </p:cNvSpPr>
+          <p:nvPr/>
+        </p:nvSpPr>
+        <p:spPr>
+          <a:xfrm>
+            <a:off x="1207008" y="3611880"/>
+            <a:ext cx="4709160" cy="457200"/>
+          </a:xfrm>
+          <a:prstGeom prst="rect">
+            <a:avLst/>
+          </a:prstGeom>
+          <a:noFill/>
+        </p:spPr>
+        <p:txBody>
+          <a:bodyPr wrap="square" lIns="0" tIns="0" rIns="0" bIns="0" anchor="ctr"/>
+          <a:lstStyle/>
+          <a:p>
+            <a:pPr marL="0" indent="0">
+              <a:buNone/>
+            </a:pPr>
+            <a:r>
+              <a:rPr lang="en-US" sz="1400">
+                <a:solidFill>
+                  <a:srgbClr val="312124"/>
+                </a:solidFill>
+                <a:latin typeface="Aptos" panose="020B0004020202020204" pitchFamily="34" charset="0"/>
+                <a:ea typeface="Calibri"/>
+                <a:cs typeface="Calibri"/>
+              </a:rPr>
+              <a:t>pgvector mengambil tiga chunk terdekat.</a:t>
+            </a:r>
+            <a:endParaRPr sz="1400">
+              <a:solidFill>
+                <a:srgbClr val="312124"/>
+              </a:solidFill>
+              <a:latin typeface="Aptos" panose="020B0004020202020204" pitchFamily="34" charset="0"/>
+            </a:endParaRPr>
+          </a:p>
+        </p:txBody>
+      </p:sp>
+      <p:pic>
+        <p:nvPicPr>
+          <p:cNvPr id="56" name="Image 5"/>
+          <p:cNvPicPr>
+            <a:picLocks noChangeAspect="1"/>
+          </p:cNvPicPr>
+          <p:nvPr/>
+        </p:nvPicPr>
+        <p:blipFill>
+          <a:blip r:embed="rId2"/>
+          <a:stretch>
+            <a:fillRect/>
+          </a:stretch>
+        </p:blipFill>
+        <p:spPr>
+          <a:xfrm>
+            <a:off x="777240" y="4206240"/>
+            <a:ext cx="292608" cy="292608"/>
+          </a:xfrm>
+          <a:prstGeom prst="rect">
+            <a:avLst/>
+          </a:prstGeom>
+        </p:spPr>
+      </p:pic>
+      <p:sp>
+        <p:nvSpPr>
+          <p:cNvPr id="19" name="Text 11">
+            <a:extLst>
+              <a:ext uri="{FF2B5EF4-FFF2-40B4-BE49-F238E27FC236}">
+                <a16:creationId xmlns:a16="http://schemas.microsoft.com/office/drawing/2014/main" id="{BBE1F27C-32AF-4CD9-A303-059FE396650A}"/>
+              </a:ext>
+            </a:extLst>
+          </p:cNvPr>
+          <p:cNvSpPr>
+            <a:spLocks noGrp="1"/>
+          </p:cNvSpPr>
+          <p:nvPr/>
+        </p:nvSpPr>
+        <p:spPr>
+          <a:xfrm>
+            <a:off x="1207008" y="4114800"/>
+            <a:ext cx="4709160" cy="457200"/>
+          </a:xfrm>
+          <a:prstGeom prst="rect">
+            <a:avLst/>
+          </a:prstGeom>
+          <a:noFill/>
+        </p:spPr>
+        <p:txBody>
+          <a:bodyPr wrap="square" lIns="0" tIns="0" rIns="0" bIns="0" anchor="ctr"/>
+          <a:lstStyle/>
+          <a:p>
+            <a:pPr marL="0" indent="0">
+              <a:buNone/>
+            </a:pPr>
+            <a:r>
+              <a:rPr lang="sv-SE" sz="1400">
+                <a:solidFill>
+                  <a:srgbClr val="312124"/>
+                </a:solidFill>
+                <a:latin typeface="Aptos" panose="020B0004020202020204" pitchFamily="34" charset="0"/>
+                <a:ea typeface="Calibri"/>
+                <a:cs typeface="Calibri"/>
+              </a:rPr>
+              <a:t>Jawaban ekstraktif menandai [S1].</a:t>
+            </a:r>
+            <a:endParaRPr sz="1400">
+              <a:solidFill>
+                <a:srgbClr val="312124"/>
+              </a:solidFill>
+              <a:latin typeface="Aptos" panose="020B0004020202020204" pitchFamily="34" charset="0"/>
+            </a:endParaRPr>
+          </a:p>
+        </p:txBody>
+      </p:sp>
+      <p:pic>
+        <p:nvPicPr>
+          <p:cNvPr id="58" name="Image 6"/>
+          <p:cNvPicPr>
+            <a:picLocks noChangeAspect="1"/>
+          </p:cNvPicPr>
+          <p:nvPr/>
+        </p:nvPicPr>
+        <p:blipFill>
+          <a:blip r:embed="rId11"/>
+          <a:stretch>
+            <a:fillRect/>
+          </a:stretch>
+        </p:blipFill>
+        <p:spPr>
+          <a:xfrm>
+            <a:off x="777240" y="4709160"/>
+            <a:ext cx="292608" cy="292608"/>
+          </a:xfrm>
+          <a:prstGeom prst="rect">
+            <a:avLst/>
+          </a:prstGeom>
+        </p:spPr>
+      </p:pic>
+      <p:sp>
+        <p:nvSpPr>
+          <p:cNvPr id="21" name="Text 12">
+            <a:extLst>
+              <a:ext uri="{FF2B5EF4-FFF2-40B4-BE49-F238E27FC236}">
+                <a16:creationId xmlns:a16="http://schemas.microsoft.com/office/drawing/2014/main" id="{B2F0D419-6A60-4F73-AA96-AB2F2DE7D27D}"/>
+              </a:ext>
+            </a:extLst>
+          </p:cNvPr>
+          <p:cNvSpPr>
+            <a:spLocks noGrp="1"/>
+          </p:cNvSpPr>
+          <p:nvPr/>
+        </p:nvSpPr>
+        <p:spPr>
+          <a:xfrm>
+            <a:off x="1207008" y="4617720"/>
+            <a:ext cx="4709160" cy="457200"/>
+          </a:xfrm>
+          <a:prstGeom prst="rect">
+            <a:avLst/>
+          </a:prstGeom>
+          <a:noFill/>
+        </p:spPr>
+        <p:txBody>
+          <a:bodyPr wrap="square" lIns="0" tIns="0" rIns="0" bIns="0" anchor="ctr"/>
+          <a:lstStyle/>
+          <a:p>
+            <a:pPr marL="0" indent="0">
+              <a:buNone/>
+            </a:pPr>
+            <a:r>
+              <a:rPr lang="en-US" sz="1400">
+                <a:solidFill>
+                  <a:srgbClr val="312124"/>
+                </a:solidFill>
+                <a:latin typeface="Aptos" panose="020B0004020202020204" pitchFamily="34" charset="0"/>
+                <a:ea typeface="Calibri"/>
+                <a:cs typeface="Calibri"/>
+              </a:rPr>
+              <a:t>sources memuat file, bagian, jarak.</a:t>
+            </a:r>
+            <a:endParaRPr sz="1400">
+              <a:solidFill>
+                <a:srgbClr val="312124"/>
+              </a:solidFill>
+              <a:latin typeface="Aptos" panose="020B0004020202020204" pitchFamily="34" charset="0"/>
+            </a:endParaRPr>
+          </a:p>
+        </p:txBody>
+      </p:sp>
+      <p:pic>
+        <p:nvPicPr>
+          <p:cNvPr id="60" name="Image 7"/>
+          <p:cNvPicPr>
+            <a:picLocks noChangeAspect="1"/>
+          </p:cNvPicPr>
+          <p:nvPr/>
+        </p:nvPicPr>
+        <p:blipFill>
+          <a:blip r:embed="rId9"/>
+          <a:stretch>
+            <a:fillRect/>
+          </a:stretch>
+        </p:blipFill>
+        <p:spPr>
+          <a:xfrm>
+            <a:off x="777240" y="5212080"/>
+            <a:ext cx="292608" cy="292608"/>
+          </a:xfrm>
+          <a:prstGeom prst="rect">
+            <a:avLst/>
+          </a:prstGeom>
+        </p:spPr>
+      </p:pic>
+      <p:sp>
+        <p:nvSpPr>
+          <p:cNvPr id="23" name="Text 13">
+            <a:extLst>
+              <a:ext uri="{FF2B5EF4-FFF2-40B4-BE49-F238E27FC236}">
+                <a16:creationId xmlns:a16="http://schemas.microsoft.com/office/drawing/2014/main" id="{7348AFF7-ECF9-4F80-B0E4-ECA2A459930F}"/>
+              </a:ext>
+            </a:extLst>
+          </p:cNvPr>
+          <p:cNvSpPr>
+            <a:spLocks noGrp="1"/>
+          </p:cNvSpPr>
+          <p:nvPr/>
+        </p:nvSpPr>
+        <p:spPr>
+          <a:xfrm>
+            <a:off x="1207008" y="5120640"/>
+            <a:ext cx="4709160" cy="457200"/>
+          </a:xfrm>
+          <a:prstGeom prst="rect">
+            <a:avLst/>
+          </a:prstGeom>
+          <a:noFill/>
+        </p:spPr>
+        <p:txBody>
+          <a:bodyPr wrap="square" lIns="0" tIns="0" rIns="0" bIns="0" anchor="ctr"/>
+          <a:lstStyle/>
+          <a:p>
+            <a:pPr marL="0" indent="0">
+              <a:buNone/>
+            </a:pPr>
+            <a:r>
+              <a:rPr lang="en-US" sz="1400">
+                <a:solidFill>
+                  <a:srgbClr val="312124"/>
+                </a:solidFill>
+                <a:latin typeface="Aptos" panose="020B0004020202020204" pitchFamily="34" charset="0"/>
+                <a:ea typeface="Calibri"/>
+                <a:cs typeface="Calibri"/>
+              </a:rPr>
+              <a:t>HTTP 200 membuktikan endpoint bekerja.</a:t>
+            </a:r>
+            <a:endParaRPr sz="1400">
+              <a:solidFill>
+                <a:srgbClr val="312124"/>
+              </a:solidFill>
+              <a:latin typeface="Aptos" panose="020B0004020202020204" pitchFamily="34" charset="0"/>
+            </a:endParaRPr>
+          </a:p>
+        </p:txBody>
+      </p:sp>
+      <p:pic>
+        <p:nvPicPr>
+          <p:cNvPr id="62" name="Image 8"/>
+          <p:cNvPicPr>
+            <a:picLocks noChangeAspect="1"/>
+          </p:cNvPicPr>
+          <p:nvPr/>
+        </p:nvPicPr>
+        <p:blipFill>
+          <a:blip r:embed="rId7"/>
+          <a:stretch>
+            <a:fillRect/>
+          </a:stretch>
+        </p:blipFill>
+        <p:spPr>
+          <a:xfrm>
+            <a:off x="777240" y="5715000"/>
+            <a:ext cx="292608" cy="292608"/>
+          </a:xfrm>
+          <a:prstGeom prst="rect">
+            <a:avLst/>
+          </a:prstGeom>
+        </p:spPr>
+      </p:pic>
+      <p:sp>
+        <p:nvSpPr>
+          <p:cNvPr id="25" name="Text 14">
+            <a:extLst>
+              <a:ext uri="{FF2B5EF4-FFF2-40B4-BE49-F238E27FC236}">
+                <a16:creationId xmlns:a16="http://schemas.microsoft.com/office/drawing/2014/main" id="{B8FE3C74-8320-40DA-82D3-27789ED07C54}"/>
+              </a:ext>
+            </a:extLst>
+          </p:cNvPr>
+          <p:cNvSpPr>
+            <a:spLocks noGrp="1"/>
+          </p:cNvSpPr>
+          <p:nvPr/>
+        </p:nvSpPr>
+        <p:spPr>
+          <a:xfrm>
+            <a:off x="1207008" y="5623560"/>
+            <a:ext cx="4709160" cy="457200"/>
+          </a:xfrm>
+          <a:prstGeom prst="rect">
+            <a:avLst/>
+          </a:prstGeom>
+          <a:noFill/>
+        </p:spPr>
+        <p:txBody>
+          <a:bodyPr wrap="square" lIns="0" tIns="0" rIns="0" bIns="0" anchor="ctr"/>
+          <a:lstStyle/>
+          <a:p>
+            <a:pPr marL="0" indent="0">
+              <a:buNone/>
+            </a:pPr>
+            <a:r>
+              <a:rPr lang="en-US" sz="1400">
+                <a:solidFill>
+                  <a:srgbClr val="312124"/>
+                </a:solidFill>
+                <a:latin typeface="Aptos" panose="020B0004020202020204" pitchFamily="34" charset="0"/>
+                <a:ea typeface="Calibri"/>
+                <a:cs typeface="Calibri"/>
+              </a:rPr>
+              <a:t>Periksa isi sumber sebelum memakai jawaban.</a:t>
+            </a:r>
+            <a:endParaRPr sz="1400">
+              <a:solidFill>
+                <a:srgbClr val="312124"/>
+              </a:solidFill>
+              <a:latin typeface="Aptos" panose="020B0004020202020204" pitchFamily="34" charset="0"/>
+            </a:endParaRPr>
+          </a:p>
+        </p:txBody>
+      </p:sp>
+      <p:sp>
+        <p:nvSpPr>
+          <p:cNvPr id="26" name="Shape 15">
+            <a:extLst>
+              <a:ext uri="{FF2B5EF4-FFF2-40B4-BE49-F238E27FC236}">
+                <a16:creationId xmlns:a16="http://schemas.microsoft.com/office/drawing/2014/main" id="{3341A3AF-3A5B-49CA-B13D-2C307F1C248E}"/>
+              </a:ext>
+            </a:extLst>
+          </p:cNvPr>
+          <p:cNvSpPr>
+            <a:spLocks noGrp="1"/>
+          </p:cNvSpPr>
+          <p:nvPr/>
+        </p:nvSpPr>
+        <p:spPr>
+          <a:xfrm>
+            <a:off x="6217920" y="1417320"/>
+            <a:ext cx="5486400" cy="4754880"/>
+          </a:xfrm>
+          <a:prstGeom prst="rect">
+            <a:avLst/>
+          </a:prstGeom>
+          <a:solidFill>
+            <a:srgbClr val="002677"/>
+          </a:solidFill>
           <a:ln w="12700">
             <a:solidFill>
-              <a:srgbClr val="E2E8F0"/>
+              <a:srgbClr val="002677"/>
             </a:solidFill>
             <a:prstDash val="solid"/>
           </a:ln>
         </p:spPr>
-      </p:sp>
-      <p:sp>
-        <p:nvSpPr>
-          <p:cNvPr id="8" name="Text 4">
-            <a:extLst>
-              <a:ext uri="{FF2B5EF4-FFF2-40B4-BE49-F238E27FC236}">
-                <a16:creationId xmlns:a16="http://schemas.microsoft.com/office/drawing/2014/main" id="{5A8475FE-12CA-406C-B684-7A9421E1CABB}"/>
-              </a:ext>
-            </a:extLst>
-          </p:cNvPr>
-          <p:cNvSpPr>
-            <a:spLocks noGrp="1"/>
-          </p:cNvSpPr>
-          <p:nvPr/>
-        </p:nvSpPr>
-        <p:spPr>
-          <a:xfrm>
-            <a:off x="2011680" y="182880"/>
-            <a:ext cx="8138160" cy="502920"/>
+        <p:txBody>
+          <a:bodyPr/>
+          <a:p/>
+        </p:txBody>
+      </p:sp>
+      <p:sp>
+        <p:nvSpPr>
+          <p:cNvPr id="27" name="Text 16">
+            <a:extLst>
+              <a:ext uri="{FF2B5EF4-FFF2-40B4-BE49-F238E27FC236}">
+                <a16:creationId xmlns:a16="http://schemas.microsoft.com/office/drawing/2014/main" id="{1B597074-D41C-477E-B011-37C4588A174E}"/>
+              </a:ext>
+            </a:extLst>
+          </p:cNvPr>
+          <p:cNvSpPr>
+            <a:spLocks noGrp="1"/>
+          </p:cNvSpPr>
+          <p:nvPr/>
+        </p:nvSpPr>
+        <p:spPr>
+          <a:xfrm>
+            <a:off x="6446520" y="1508760"/>
+            <a:ext cx="5120640" cy="457200"/>
           </a:xfrm>
           <a:prstGeom prst="rect">
             <a:avLst/>
@@ -7008,777 +7880,80 @@
           <a:bodyPr wrap="square" lIns="0" tIns="0" rIns="0" bIns="0" anchor="ctr"/>
           <a:lstStyle/>
           <a:p>
-            <a:pPr marL="0" indent="0" algn="ctr">
+            <a:pPr marL="0" indent="0">
               <a:buNone/>
             </a:pPr>
             <a:r>
-              <a:rPr lang="en-US" sz="2200" b="1">
-                <a:solidFill>
-                  <a:srgbClr val="1976D2"/>
+              <a:rPr lang="en-US" sz="1100" b="1" spc="300">
+                <a:solidFill>
+                  <a:srgbClr val="F37021"/>
                 </a:solidFill>
                 <a:latin typeface="Calibri"/>
                 <a:ea typeface="Calibri"/>
                 <a:cs typeface="Calibri"/>
               </a:rPr>
-              <a:t>6 | Kunci challenge dokumen baru</a:t>
+              <a:t>BUKTI PADA MESIN UJI</a:t>
             </a:r>
-            <a:endParaRPr sz="2200"/>
-          </a:p>
-        </p:txBody>
-      </p:sp>
-      <p:sp>
-        <p:nvSpPr>
-          <p:cNvPr id="9" name="Text 5">
-            <a:extLst>
-              <a:ext uri="{FF2B5EF4-FFF2-40B4-BE49-F238E27FC236}">
-                <a16:creationId xmlns:a16="http://schemas.microsoft.com/office/drawing/2014/main" id="{974BA88A-E417-4322-BFC2-99722614447A}"/>
-              </a:ext>
-            </a:extLst>
-          </p:cNvPr>
-          <p:cNvSpPr>
-            <a:spLocks noGrp="1"/>
-          </p:cNvSpPr>
-          <p:nvPr/>
-        </p:nvSpPr>
-        <p:spPr>
-          <a:xfrm>
-            <a:off x="457200" y="960120"/>
-            <a:ext cx="11247120" cy="320040"/>
-          </a:xfrm>
-          <a:prstGeom prst="rect">
-            <a:avLst/>
-          </a:prstGeom>
-          <a:noFill/>
-        </p:spPr>
-        <p:txBody>
-          <a:bodyPr wrap="square" lIns="0" tIns="0" rIns="0" bIns="0" anchor="ctr"/>
-          <a:lstStyle/>
-          <a:p>
-            <a:pPr marL="0" indent="0" algn="ctr">
-              <a:buNone/>
-            </a:pPr>
-            <a:r>
-              <a:rPr lang="en-US" sz="1200" i="1">
-                <a:solidFill>
-                  <a:srgbClr val="64748B"/>
-                </a:solidFill>
-                <a:latin typeface="Calibri"/>
-                <a:ea typeface="Calibri"/>
-                <a:cs typeface="Calibri"/>
-              </a:rPr>
-              <a:t>Tambah pengetahuan kelas, indeks ulang, lalu buktikan di UI</a:t>
-            </a:r>
+            <a:endParaRPr sz="1100"/>
+          </a:p>
+        </p:txBody>
+      </p:sp>
+      <p:sp>
+        <p:nvSpPr>
+          <p:cNvPr id="28" name="Text 17">
+            <a:extLst>
+              <a:ext uri="{FF2B5EF4-FFF2-40B4-BE49-F238E27FC236}">
+                <a16:creationId xmlns:a16="http://schemas.microsoft.com/office/drawing/2014/main" id="{1F6CB16E-FFA7-4EB8-9831-521CE3804336}"/>
+              </a:ext>
+            </a:extLst>
+          </p:cNvPr>
+          <p:cNvSpPr>
+            <a:spLocks noGrp="1"/>
+          </p:cNvSpPr>
+          <p:nvPr/>
+        </p:nvSpPr>
+        <p:spPr>
+          <a:xfrm>
+            <a:off x="6446520" y="2606040"/>
+            <a:ext cx="5029200" cy="2743200"/>
+          </a:xfrm>
+          <a:prstGeom prst="rect">
+            <a:avLst/>
+          </a:prstGeom>
+          <a:noFill/>
+        </p:spPr>
+        <p:txBody>
+          <a:bodyPr wrap="square" anchor="ctr"/>
+          <a:lstStyle/>
+          <a:p>
+            <a:pPr marL="0" indent="0">
+              <a:spcAft>
+                <a:spcPts val="600"/>
+              </a:spcAft>
+              <a:buNone/>
+            </a:pPr>
             <a:endParaRPr sz="1200"/>
           </a:p>
         </p:txBody>
       </p:sp>
       <p:sp>
         <p:nvSpPr>
-          <p:cNvPr id="10" name="Shape 6">
-            <a:extLst>
-              <a:ext uri="{FF2B5EF4-FFF2-40B4-BE49-F238E27FC236}">
-                <a16:creationId xmlns:a16="http://schemas.microsoft.com/office/drawing/2014/main" id="{1998E377-C26D-41C5-A62D-C594E0E7AB74}"/>
-              </a:ext>
-            </a:extLst>
-          </p:cNvPr>
-          <p:cNvSpPr>
-            <a:spLocks noGrp="1"/>
-          </p:cNvSpPr>
-          <p:nvPr/>
-        </p:nvSpPr>
-        <p:spPr>
-          <a:xfrm>
-            <a:off x="457200" y="1417320"/>
-            <a:ext cx="5577840" cy="4754880"/>
-          </a:xfrm>
-          <a:prstGeom prst="rect">
-            <a:avLst/>
-          </a:prstGeom>
-          <a:solidFill>
-            <a:srgbClr val="1E293B"/>
-          </a:solidFill>
-          <a:ln w="12700">
-            <a:solidFill>
-              <a:srgbClr val="0F172A"/>
-            </a:solidFill>
-            <a:prstDash val="solid"/>
-          </a:ln>
-        </p:spPr>
-      </p:sp>
-      <p:sp>
-        <p:nvSpPr>
-          <p:cNvPr id="11" name="Shape 7">
-            <a:extLst>
-              <a:ext uri="{FF2B5EF4-FFF2-40B4-BE49-F238E27FC236}">
-                <a16:creationId xmlns:a16="http://schemas.microsoft.com/office/drawing/2014/main" id="{9615A271-5B91-428F-82D6-D2F273DC3156}"/>
-              </a:ext>
-            </a:extLst>
-          </p:cNvPr>
-          <p:cNvSpPr>
-            <a:spLocks noGrp="1"/>
-          </p:cNvSpPr>
-          <p:nvPr/>
-        </p:nvSpPr>
-        <p:spPr>
-          <a:xfrm>
-            <a:off x="457200" y="1417320"/>
-            <a:ext cx="5577840" cy="274320"/>
-          </a:xfrm>
-          <a:prstGeom prst="rect">
-            <a:avLst/>
-          </a:prstGeom>
-          <a:solidFill>
-            <a:srgbClr val="0F172A"/>
-          </a:solidFill>
-          <a:ln w="12700">
-            <a:solidFill>
-              <a:srgbClr val="0F172A"/>
-            </a:solidFill>
-            <a:prstDash val="solid"/>
-          </a:ln>
-        </p:spPr>
-      </p:sp>
-      <p:sp>
-        <p:nvSpPr>
-          <p:cNvPr id="12" name="Shape 8">
-            <a:extLst>
-              <a:ext uri="{FF2B5EF4-FFF2-40B4-BE49-F238E27FC236}">
-                <a16:creationId xmlns:a16="http://schemas.microsoft.com/office/drawing/2014/main" id="{4DC7F0B0-1BB7-4B86-B7A8-78D1387F315D}"/>
-              </a:ext>
-            </a:extLst>
-          </p:cNvPr>
-          <p:cNvSpPr>
-            <a:spLocks noGrp="1"/>
-          </p:cNvSpPr>
-          <p:nvPr/>
-        </p:nvSpPr>
-        <p:spPr>
-          <a:xfrm>
-            <a:off x="548640" y="1499616"/>
-            <a:ext cx="109728" cy="109728"/>
-          </a:xfrm>
-          <a:prstGeom prst="ellipse">
-            <a:avLst/>
-          </a:prstGeom>
-          <a:solidFill>
-            <a:srgbClr val="EF4444"/>
-          </a:solidFill>
-          <a:ln w="12700">
-            <a:solidFill>
-              <a:srgbClr val="EF4444"/>
-            </a:solidFill>
-            <a:prstDash val="solid"/>
-          </a:ln>
-        </p:spPr>
-      </p:sp>
-      <p:sp>
-        <p:nvSpPr>
-          <p:cNvPr id="13" name="Shape 9">
-            <a:extLst>
-              <a:ext uri="{FF2B5EF4-FFF2-40B4-BE49-F238E27FC236}">
-                <a16:creationId xmlns:a16="http://schemas.microsoft.com/office/drawing/2014/main" id="{ED9BC19C-3C17-44CF-BE11-E1047B10275D}"/>
-              </a:ext>
-            </a:extLst>
-          </p:cNvPr>
-          <p:cNvSpPr>
-            <a:spLocks noGrp="1"/>
-          </p:cNvSpPr>
-          <p:nvPr/>
-        </p:nvSpPr>
-        <p:spPr>
-          <a:xfrm>
-            <a:off x="685800" y="1499616"/>
-            <a:ext cx="109728" cy="109728"/>
-          </a:xfrm>
-          <a:prstGeom prst="ellipse">
-            <a:avLst/>
-          </a:prstGeom>
-          <a:solidFill>
-            <a:srgbClr val="F59E0B"/>
-          </a:solidFill>
-          <a:ln w="12700">
-            <a:solidFill>
-              <a:srgbClr val="F59E0B"/>
-            </a:solidFill>
-            <a:prstDash val="solid"/>
-          </a:ln>
-        </p:spPr>
-      </p:sp>
-      <p:sp>
-        <p:nvSpPr>
-          <p:cNvPr id="14" name="Shape 10">
-            <a:extLst>
-              <a:ext uri="{FF2B5EF4-FFF2-40B4-BE49-F238E27FC236}">
-                <a16:creationId xmlns:a16="http://schemas.microsoft.com/office/drawing/2014/main" id="{7BA2CA47-0A5C-4334-A1B7-262D9E9FD124}"/>
-              </a:ext>
-            </a:extLst>
-          </p:cNvPr>
-          <p:cNvSpPr>
-            <a:spLocks noGrp="1"/>
-          </p:cNvSpPr>
-          <p:nvPr/>
-        </p:nvSpPr>
-        <p:spPr>
-          <a:xfrm>
-            <a:off x="822960" y="1499616"/>
-            <a:ext cx="109728" cy="109728"/>
-          </a:xfrm>
-          <a:prstGeom prst="ellipse">
-            <a:avLst/>
-          </a:prstGeom>
-          <a:solidFill>
-            <a:srgbClr val="10B981"/>
-          </a:solidFill>
-          <a:ln w="12700">
-            <a:solidFill>
-              <a:srgbClr val="10B981"/>
-            </a:solidFill>
-            <a:prstDash val="solid"/>
-          </a:ln>
-        </p:spPr>
-      </p:sp>
-      <p:sp>
-        <p:nvSpPr>
-          <p:cNvPr id="15" name="Text 11">
-            <a:extLst>
-              <a:ext uri="{FF2B5EF4-FFF2-40B4-BE49-F238E27FC236}">
-                <a16:creationId xmlns:a16="http://schemas.microsoft.com/office/drawing/2014/main" id="{5F8F799B-4840-4D3C-92EE-5F455663B5BB}"/>
-              </a:ext>
-            </a:extLst>
-          </p:cNvPr>
-          <p:cNvSpPr>
-            <a:spLocks noGrp="1"/>
-          </p:cNvSpPr>
-          <p:nvPr/>
-        </p:nvSpPr>
-        <p:spPr>
-          <a:xfrm>
-            <a:off x="1005840" y="1417320"/>
-            <a:ext cx="4846320" cy="274320"/>
-          </a:xfrm>
-          <a:prstGeom prst="rect">
-            <a:avLst/>
-          </a:prstGeom>
-          <a:noFill/>
-        </p:spPr>
-        <p:txBody>
-          <a:bodyPr wrap="square" lIns="0" tIns="0" rIns="0" bIns="0" anchor="ctr"/>
-          <a:lstStyle/>
-          <a:p>
-            <a:pPr marL="0" indent="0" algn="ctr">
-              <a:buNone/>
-            </a:pPr>
-            <a:r>
-              <a:rPr lang="en-US" sz="900">
-                <a:solidFill>
-                  <a:srgbClr val="94A3B8"/>
-                </a:solidFill>
-                <a:latin typeface="Consolas"/>
-                <a:ea typeface="Consolas"/>
-                <a:cs typeface="Consolas"/>
-              </a:rPr>
-              <a:t>PowerShell</a:t>
-            </a:r>
-            <a:endParaRPr sz="900"/>
-          </a:p>
-        </p:txBody>
-      </p:sp>
-      <p:sp>
-        <p:nvSpPr>
-          <p:cNvPr id="16" name="Text 12">
-            <a:extLst>
-              <a:ext uri="{FF2B5EF4-FFF2-40B4-BE49-F238E27FC236}">
-                <a16:creationId xmlns:a16="http://schemas.microsoft.com/office/drawing/2014/main" id="{513750E3-5216-4832-B866-430374D15F24}"/>
-              </a:ext>
-            </a:extLst>
-          </p:cNvPr>
-          <p:cNvSpPr>
-            <a:spLocks noGrp="1"/>
-          </p:cNvSpPr>
-          <p:nvPr/>
-        </p:nvSpPr>
-        <p:spPr>
-          <a:xfrm>
-            <a:off x="594360" y="1783080"/>
-            <a:ext cx="5303520" cy="4297680"/>
-          </a:xfrm>
-          <a:prstGeom prst="rect">
-            <a:avLst/>
-          </a:prstGeom>
-          <a:noFill/>
-        </p:spPr>
-        <p:txBody>
-          <a:bodyPr wrap="none" lIns="0" tIns="0" rIns="0" bIns="0" anchor="t">
-            <a:noAutofit/>
-          </a:bodyPr>
-          <a:lstStyle/>
-          <a:p>
-            <a:pPr marL="0" indent="0" algn="l">
-              <a:spcAft>
-                <a:spcPts val="200"/>
-              </a:spcAft>
-              <a:buNone/>
-              <a:defRPr sz="1050">
-                <a:solidFill>
-                  <a:srgbClr val="DDEAF7"/>
-                </a:solidFill>
-                <a:latin typeface="Consolas"/>
-                <a:ea typeface="Consolas"/>
-                <a:cs typeface="Consolas"/>
-              </a:defRPr>
-            </a:pPr>
-            <a:r>
-              <a:rPr lang="en-US" sz="1500">
-                <a:solidFill>
-                  <a:srgbClr val="FFFFFF"/>
-                </a:solidFill>
-                <a:latin typeface="Consolas" panose="020B0609020204030204" pitchFamily="49" charset="0"/>
-                <a:ea typeface="Consolas"/>
-                <a:cs typeface="Consolas"/>
-              </a:rPr>
-              <a:t>Set-Content docs/kelas_visual.md -Value `
-  'Status visual membantu on-call memeriksa health.'
-.\.venv\Scripts\python rag.py ingest
-.\.venv\Scripts\python rag.py ask `
-  "Apa manfaat status visual untuk on-call?"</a:t>
-            </a:r>
-            <a:endParaRPr sz="1500">
-              <a:solidFill>
-                <a:srgbClr val="FFFFFF"/>
-              </a:solidFill>
-              <a:latin typeface="Consolas" panose="020B0609020204030204" pitchFamily="49" charset="0"/>
-            </a:endParaRPr>
-          </a:p>
-        </p:txBody>
-      </p:sp>
-      <p:sp>
-        <p:nvSpPr>
-          <p:cNvPr id="17" name="Shape 13">
-            <a:extLst>
-              <a:ext uri="{FF2B5EF4-FFF2-40B4-BE49-F238E27FC236}">
-                <a16:creationId xmlns:a16="http://schemas.microsoft.com/office/drawing/2014/main" id="{141079E7-6267-430B-91AC-297B6D68EED3}"/>
-              </a:ext>
-            </a:extLst>
-          </p:cNvPr>
-          <p:cNvSpPr>
-            <a:spLocks noGrp="1"/>
-          </p:cNvSpPr>
-          <p:nvPr/>
-        </p:nvSpPr>
-        <p:spPr>
-          <a:xfrm>
-            <a:off x="6217920" y="1417320"/>
-            <a:ext cx="5486400" cy="4754880"/>
-          </a:xfrm>
-          <a:prstGeom prst="rect">
-            <a:avLst/>
-          </a:prstGeom>
-          <a:solidFill>
-            <a:srgbClr val="1E293B"/>
-          </a:solidFill>
-          <a:ln w="12700">
-            <a:solidFill>
-              <a:srgbClr val="0F172A"/>
-            </a:solidFill>
-            <a:prstDash val="solid"/>
-          </a:ln>
-        </p:spPr>
-      </p:sp>
-      <p:sp>
-        <p:nvSpPr>
-          <p:cNvPr id="18" name="Shape 14">
-            <a:extLst>
-              <a:ext uri="{FF2B5EF4-FFF2-40B4-BE49-F238E27FC236}">
-                <a16:creationId xmlns:a16="http://schemas.microsoft.com/office/drawing/2014/main" id="{53EC92CF-DEE8-49D4-97A3-416C041F2A76}"/>
-              </a:ext>
-            </a:extLst>
-          </p:cNvPr>
-          <p:cNvSpPr>
-            <a:spLocks noGrp="1"/>
-          </p:cNvSpPr>
-          <p:nvPr/>
-        </p:nvSpPr>
-        <p:spPr>
-          <a:xfrm>
-            <a:off x="6217920" y="1417320"/>
-            <a:ext cx="5486400" cy="274320"/>
-          </a:xfrm>
-          <a:prstGeom prst="rect">
-            <a:avLst/>
-          </a:prstGeom>
-          <a:solidFill>
-            <a:srgbClr val="0F172A"/>
-          </a:solidFill>
-          <a:ln w="12700">
-            <a:solidFill>
-              <a:srgbClr val="0F172A"/>
-            </a:solidFill>
-            <a:prstDash val="solid"/>
-          </a:ln>
-        </p:spPr>
-      </p:sp>
-      <p:sp>
-        <p:nvSpPr>
-          <p:cNvPr id="19" name="Shape 15">
-            <a:extLst>
-              <a:ext uri="{FF2B5EF4-FFF2-40B4-BE49-F238E27FC236}">
-                <a16:creationId xmlns:a16="http://schemas.microsoft.com/office/drawing/2014/main" id="{F12772E3-51C4-4C3E-892A-C77B19318F97}"/>
-              </a:ext>
-            </a:extLst>
-          </p:cNvPr>
-          <p:cNvSpPr>
-            <a:spLocks noGrp="1"/>
-          </p:cNvSpPr>
-          <p:nvPr/>
-        </p:nvSpPr>
-        <p:spPr>
-          <a:xfrm>
-            <a:off x="6309360" y="1499616"/>
-            <a:ext cx="109728" cy="109728"/>
-          </a:xfrm>
-          <a:prstGeom prst="ellipse">
-            <a:avLst/>
-          </a:prstGeom>
-          <a:solidFill>
-            <a:srgbClr val="EF4444"/>
-          </a:solidFill>
-          <a:ln w="12700">
-            <a:solidFill>
-              <a:srgbClr val="EF4444"/>
-            </a:solidFill>
-            <a:prstDash val="solid"/>
-          </a:ln>
-        </p:spPr>
-      </p:sp>
-      <p:sp>
-        <p:nvSpPr>
-          <p:cNvPr id="20" name="Shape 16">
-            <a:extLst>
-              <a:ext uri="{FF2B5EF4-FFF2-40B4-BE49-F238E27FC236}">
-                <a16:creationId xmlns:a16="http://schemas.microsoft.com/office/drawing/2014/main" id="{401E9D7D-9E1E-4A69-A3D3-F597DA3AFFA5}"/>
-              </a:ext>
-            </a:extLst>
-          </p:cNvPr>
-          <p:cNvSpPr>
-            <a:spLocks noGrp="1"/>
-          </p:cNvSpPr>
-          <p:nvPr/>
-        </p:nvSpPr>
-        <p:spPr>
-          <a:xfrm>
-            <a:off x="6446520" y="1499616"/>
-            <a:ext cx="109728" cy="109728"/>
-          </a:xfrm>
-          <a:prstGeom prst="ellipse">
-            <a:avLst/>
-          </a:prstGeom>
-          <a:solidFill>
-            <a:srgbClr val="F59E0B"/>
-          </a:solidFill>
-          <a:ln w="12700">
-            <a:solidFill>
-              <a:srgbClr val="F59E0B"/>
-            </a:solidFill>
-            <a:prstDash val="solid"/>
-          </a:ln>
-        </p:spPr>
-      </p:sp>
-      <p:sp>
-        <p:nvSpPr>
-          <p:cNvPr id="21" name="Shape 17">
-            <a:extLst>
-              <a:ext uri="{FF2B5EF4-FFF2-40B4-BE49-F238E27FC236}">
-                <a16:creationId xmlns:a16="http://schemas.microsoft.com/office/drawing/2014/main" id="{7A22D841-0221-436E-B321-0918C7B414B3}"/>
-              </a:ext>
-            </a:extLst>
-          </p:cNvPr>
-          <p:cNvSpPr>
-            <a:spLocks noGrp="1"/>
-          </p:cNvSpPr>
-          <p:nvPr/>
-        </p:nvSpPr>
-        <p:spPr>
-          <a:xfrm>
-            <a:off x="6583680" y="1499616"/>
-            <a:ext cx="109728" cy="109728"/>
-          </a:xfrm>
-          <a:prstGeom prst="ellipse">
-            <a:avLst/>
-          </a:prstGeom>
-          <a:solidFill>
-            <a:srgbClr val="10B981"/>
-          </a:solidFill>
-          <a:ln w="12700">
-            <a:solidFill>
-              <a:srgbClr val="10B981"/>
-            </a:solidFill>
-            <a:prstDash val="solid"/>
-          </a:ln>
-        </p:spPr>
-      </p:sp>
-      <p:sp>
-        <p:nvSpPr>
-          <p:cNvPr id="22" name="Text 18">
-            <a:extLst>
-              <a:ext uri="{FF2B5EF4-FFF2-40B4-BE49-F238E27FC236}">
-                <a16:creationId xmlns:a16="http://schemas.microsoft.com/office/drawing/2014/main" id="{F400FF3A-1B61-42A2-A9F9-3D8F8900FEC1}"/>
-              </a:ext>
-            </a:extLst>
-          </p:cNvPr>
-          <p:cNvSpPr>
-            <a:spLocks noGrp="1"/>
-          </p:cNvSpPr>
-          <p:nvPr/>
-        </p:nvSpPr>
-        <p:spPr>
-          <a:xfrm>
-            <a:off x="6766560" y="1417320"/>
-            <a:ext cx="4754880" cy="274320"/>
-          </a:xfrm>
-          <a:prstGeom prst="rect">
-            <a:avLst/>
-          </a:prstGeom>
-          <a:noFill/>
-        </p:spPr>
-        <p:txBody>
-          <a:bodyPr wrap="square" lIns="0" tIns="0" rIns="0" bIns="0" anchor="ctr"/>
-          <a:lstStyle/>
-          <a:p>
-            <a:pPr marL="0" indent="0" algn="ctr">
-              <a:buNone/>
-            </a:pPr>
-            <a:r>
-              <a:rPr lang="en-US" sz="900">
-                <a:solidFill>
-                  <a:srgbClr val="94A3B8"/>
-                </a:solidFill>
-                <a:latin typeface="Consolas"/>
-                <a:ea typeface="Consolas"/>
-                <a:cs typeface="Consolas"/>
-              </a:rPr>
-              <a:t>Mengapa indeks ulang?</a:t>
-            </a:r>
-            <a:endParaRPr sz="900"/>
-          </a:p>
-        </p:txBody>
-      </p:sp>
-      <p:sp>
-        <p:nvSpPr>
-          <p:cNvPr id="23" name="Text 19">
-            <a:extLst>
-              <a:ext uri="{FF2B5EF4-FFF2-40B4-BE49-F238E27FC236}">
-                <a16:creationId xmlns:a16="http://schemas.microsoft.com/office/drawing/2014/main" id="{52571E5C-DFB6-4F51-8889-82CA8AFE6D3A}"/>
-              </a:ext>
-            </a:extLst>
-          </p:cNvPr>
-          <p:cNvSpPr>
-            <a:spLocks noGrp="1"/>
-          </p:cNvSpPr>
-          <p:nvPr/>
-        </p:nvSpPr>
-        <p:spPr>
-          <a:xfrm>
-            <a:off x="6355080" y="1783080"/>
-            <a:ext cx="5212080" cy="4297680"/>
-          </a:xfrm>
-          <a:prstGeom prst="rect">
-            <a:avLst/>
-          </a:prstGeom>
-          <a:noFill/>
-        </p:spPr>
-        <p:txBody>
-          <a:bodyPr wrap="none" lIns="0" tIns="0" rIns="0" bIns="0" anchor="t">
-            <a:noAutofit/>
-          </a:bodyPr>
-          <a:lstStyle/>
-          <a:p>
-            <a:pPr marL="0" indent="0" algn="l">
-              <a:spcAft>
-                <a:spcPts val="200"/>
-              </a:spcAft>
-              <a:buNone/>
-              <a:defRPr sz="1050">
-                <a:solidFill>
-                  <a:srgbClr val="DDEAF7"/>
-                </a:solidFill>
-                <a:latin typeface="Consolas"/>
-                <a:ea typeface="Consolas"/>
-                <a:cs typeface="Consolas"/>
-              </a:defRPr>
-            </a:pPr>
-            <a:r>
-              <a:rPr lang="en-US" sz="1600">
-                <a:solidFill>
-                  <a:srgbClr val="FFFFFF"/>
-                </a:solidFill>
-                <a:latin typeface="Aptos" panose="020B0004020202020204" pitchFamily="34" charset="0"/>
-                <a:ea typeface="Consolas"/>
-                <a:cs typeface="Consolas"/>
-              </a:rPr>
-              <a:t>rag.py ingest mengganti indeks lama
-secara transaksional dengan semua docs/.
-Tanpa ingest, file baru belum ada di DB.
-Cari kelas_visual.md pada file dan sources.
-Jangan masukkan rahasia atau data privat.
-Catat jumlah chunk sebelum/sesudah.</a:t>
-            </a:r>
-            <a:endParaRPr sz="1600">
-              <a:solidFill>
-                <a:srgbClr val="FFFFFF"/>
-              </a:solidFill>
-              <a:latin typeface="Aptos" panose="020B0004020202020204" pitchFamily="34" charset="0"/>
-            </a:endParaRPr>
-          </a:p>
-        </p:txBody>
-      </p:sp>
-    </p:spTree>
-    <p:extLst>
-      <p:ext uri="{BB962C8B-B14F-4D97-AF65-F5344CB8AC3E}">
-        <p14:creationId xmlns:p14="http://schemas.microsoft.com/office/powerpoint/2010/main" val="164200899"/>
-      </p:ext>
-    </p:extLst>
-  </p:cSld>
-  <p:clrMapOvr>
-    <a:masterClrMapping/>
-  </p:clrMapOvr>
-</p:sld>
-</file>
-
-<file path=ppt/slides/slide15.xml><?xml version="1.0" encoding="utf-8"?>
-<p:sld xmlns:a="http://schemas.openxmlformats.org/drawingml/2006/main" xmlns:r="http://schemas.openxmlformats.org/officeDocument/2006/relationships" xmlns:p="http://schemas.openxmlformats.org/presentationml/2006/main">
-  <p:cSld>
-    <p:bg>
-      <p:bgPr>
-        <a:solidFill>
-          <a:srgbClr val="FFFFFF"/>
-        </a:solidFill>
-        <a:effectLst/>
-      </p:bgPr>
-    </p:bg>
-    <p:spTree>
-      <p:nvGrpSpPr>
-        <p:cNvPr id="1" name=""/>
-        <p:cNvGrpSpPr/>
-        <p:nvPr/>
-      </p:nvGrpSpPr>
-      <p:grpSpPr>
-        <a:xfrm>
-          <a:off x="0" y="0"/>
-          <a:ext cx="0" cy="0"/>
-          <a:chOff x="0" y="0"/>
-          <a:chExt cx="0" cy="0"/>
-        </a:xfrm>
-      </p:grpSpPr>
-      <p:sp>
-        <p:nvSpPr>
-          <p:cNvPr id="2" name="Text 0">
-            <a:extLst>
-              <a:ext uri="{FF2B5EF4-FFF2-40B4-BE49-F238E27FC236}">
-                <a16:creationId xmlns:a16="http://schemas.microsoft.com/office/drawing/2014/main" id="{F779FF6B-910B-4E58-955B-7B6FE29829C1}"/>
-              </a:ext>
-            </a:extLst>
-          </p:cNvPr>
-          <p:cNvSpPr>
-            <a:spLocks noGrp="1"/>
-          </p:cNvSpPr>
-          <p:nvPr/>
-        </p:nvSpPr>
-        <p:spPr>
-          <a:xfrm>
-            <a:off x="457200" y="6492240"/>
-            <a:ext cx="7315200" cy="274320"/>
-          </a:xfrm>
-          <a:prstGeom prst="rect">
-            <a:avLst/>
-          </a:prstGeom>
-          <a:noFill/>
-        </p:spPr>
-        <p:txBody>
-          <a:bodyPr wrap="square" lIns="0" tIns="0" rIns="0" bIns="0" anchor="ctr"/>
-          <a:lstStyle/>
-          <a:p>
-            <a:pPr marL="0" indent="0" algn="l">
-              <a:buNone/>
-            </a:pPr>
-            <a:r>
-              <a:rPr sz="900">
-                <a:solidFill>
-                  <a:srgbClr val="64748B"/>
-                </a:solidFill>
-                <a:latin typeface="Calibri"/>
-                <a:ea typeface="Calibri"/>
-                <a:cs typeface="Calibri"/>
-              </a:rPr>
-              <a:t>BINUS UNIVERSITY  |  Cloud Services  |  Praktikum 11</a:t>
-            </a:r>
-            <a:endParaRPr sz="900"/>
-          </a:p>
-        </p:txBody>
-      </p:sp>
-      <p:sp>
-        <p:nvSpPr>
-          <p:cNvPr id="3" name="Text 1">
-            <a:extLst>
-              <a:ext uri="{FF2B5EF4-FFF2-40B4-BE49-F238E27FC236}">
-                <a16:creationId xmlns:a16="http://schemas.microsoft.com/office/drawing/2014/main" id="{3352C906-5F0A-42A0-94F0-9170DC749E53}"/>
-              </a:ext>
-            </a:extLst>
-          </p:cNvPr>
-          <p:cNvSpPr>
-            <a:spLocks noGrp="1"/>
-          </p:cNvSpPr>
-          <p:nvPr/>
-        </p:nvSpPr>
-        <p:spPr>
-          <a:xfrm>
-            <a:off x="11247120" y="6492240"/>
-            <a:ext cx="457200" cy="274320"/>
-          </a:xfrm>
-          <a:prstGeom prst="rect">
-            <a:avLst/>
-          </a:prstGeom>
-          <a:noFill/>
-        </p:spPr>
-        <p:txBody>
-          <a:bodyPr wrap="square" lIns="0" tIns="0" rIns="0" bIns="0" anchor="ctr"/>
-          <a:lstStyle/>
-          <a:p>
-            <a:pPr marL="0" indent="0" algn="r">
-              <a:buNone/>
-            </a:pPr>
-            <a:r>
-              <a:rPr lang="en-US" sz="900" b="1">
-                <a:solidFill>
-                  <a:srgbClr val="64748B"/>
-                </a:solidFill>
-                <a:latin typeface="Calibri"/>
-                <a:ea typeface="Calibri"/>
-                <a:cs typeface="Calibri"/>
-              </a:rPr>
-              <a:t>15</a:t>
-            </a:r>
-            <a:endParaRPr sz="900"/>
-          </a:p>
-        </p:txBody>
-      </p:sp>
-      <p:sp>
-        <p:nvSpPr>
-          <p:cNvPr id="4" name="Shape 2">
-            <a:extLst>
-              <a:ext uri="{FF2B5EF4-FFF2-40B4-BE49-F238E27FC236}">
-                <a16:creationId xmlns:a16="http://schemas.microsoft.com/office/drawing/2014/main" id="{BAEEB222-C692-4EAC-956E-AC234E3B4E07}"/>
-              </a:ext>
-            </a:extLst>
-          </p:cNvPr>
-          <p:cNvSpPr>
-            <a:spLocks noGrp="1"/>
-          </p:cNvSpPr>
-          <p:nvPr/>
-        </p:nvSpPr>
-        <p:spPr>
-          <a:xfrm>
-            <a:off x="457200" y="6446520"/>
-            <a:ext cx="228600" cy="36576"/>
+          <p:cNvPr id="29" name="Shape 18">
+            <a:extLst>
+              <a:ext uri="{FF2B5EF4-FFF2-40B4-BE49-F238E27FC236}">
+                <a16:creationId xmlns:a16="http://schemas.microsoft.com/office/drawing/2014/main" id="{7FC777FC-F540-418C-9FA3-B9D94F01598D}"/>
+              </a:ext>
+            </a:extLst>
+          </p:cNvPr>
+          <p:cNvSpPr>
+            <a:spLocks noGrp="1"/>
+          </p:cNvSpPr>
+          <p:nvPr/>
+        </p:nvSpPr>
+        <p:spPr>
+          <a:xfrm>
+            <a:off x="6446520" y="5349240"/>
+            <a:ext cx="5029200" cy="731520"/>
           </a:xfrm>
           <a:prstGeom prst="rect">
             <a:avLst/>
@@ -7793,6 +7968,232 @@
             <a:prstDash val="solid"/>
           </a:ln>
         </p:spPr>
+        <p:txBody>
+          <a:bodyPr/>
+          <a:p/>
+        </p:txBody>
+      </p:sp>
+      <p:sp>
+        <p:nvSpPr>
+          <p:cNvPr id="30" name="Text 19">
+            <a:extLst>
+              <a:ext uri="{FF2B5EF4-FFF2-40B4-BE49-F238E27FC236}">
+                <a16:creationId xmlns:a16="http://schemas.microsoft.com/office/drawing/2014/main" id="{D535A2DE-B237-4417-B547-47453DC8DB66}"/>
+              </a:ext>
+            </a:extLst>
+          </p:cNvPr>
+          <p:cNvSpPr>
+            <a:spLocks noGrp="1"/>
+          </p:cNvSpPr>
+          <p:nvPr/>
+        </p:nvSpPr>
+        <p:spPr>
+          <a:xfrm>
+            <a:off x="6446520" y="5349240"/>
+            <a:ext cx="5029200" cy="731520"/>
+          </a:xfrm>
+          <a:prstGeom prst="rect">
+            <a:avLst/>
+          </a:prstGeom>
+          <a:noFill/>
+        </p:spPr>
+        <p:txBody>
+          <a:bodyPr wrap="square" lIns="0" tIns="0" rIns="0" bIns="0" anchor="ctr"/>
+          <a:lstStyle/>
+          <a:p>
+            <a:pPr marL="0" indent="0" algn="ctr">
+              <a:buNone/>
+            </a:pPr>
+            <a:r>
+              <a:rPr lang="en-US" sz="1500" i="1">
+                <a:solidFill>
+                  <a:srgbClr val="FFFFFF"/>
+                </a:solidFill>
+                <a:latin typeface="Aptos" panose="020B0004020202020204" pitchFamily="34" charset="0"/>
+                <a:ea typeface="Calibri"/>
+                <a:cs typeface="Calibri"/>
+              </a:rPr>
+              <a:t>Skor jarak membantu telusur, bukan bukti fakta.</a:t>
+            </a:r>
+            <a:endParaRPr sz="1500">
+              <a:solidFill>
+                <a:srgbClr val="FFFFFF"/>
+              </a:solidFill>
+              <a:latin typeface="Aptos" panose="020B0004020202020204" pitchFamily="34" charset="0"/>
+            </a:endParaRPr>
+          </a:p>
+        </p:txBody>
+      </p:sp>
+      <p:pic>
+        <p:nvPicPr>
+          <p:cNvPr id="63" name="Picture 62" descr="11_api_200_respons.png"/>
+          <p:cNvPicPr>
+            <a:picLocks noChangeAspect="1"/>
+          </p:cNvPicPr>
+          <p:nvPr/>
+        </p:nvPicPr>
+        <p:blipFill>
+          <a:blip r:embed="rId12"/>
+          <a:stretch>
+            <a:fillRect/>
+          </a:stretch>
+        </p:blipFill>
+        <p:spPr>
+          <a:xfrm>
+            <a:off x="6446520" y="2342357"/>
+            <a:ext cx="5029200" cy="2493325"/>
+          </a:xfrm>
+          <a:prstGeom prst="rect">
+            <a:avLst/>
+          </a:prstGeom>
+        </p:spPr>
+      </p:pic>
+    </p:spTree>
+  </p:cSld>
+  <p:clrMapOvr>
+    <a:masterClrMapping/>
+  </p:clrMapOvr>
+</p:sld>
+</file>
+
+<file path=ppt/slides/slide15.xml><?xml version="1.0" encoding="utf-8"?>
+<p:sld xmlns:a="http://schemas.openxmlformats.org/drawingml/2006/main" xmlns:p="http://schemas.openxmlformats.org/presentationml/2006/main" xmlns:r="http://schemas.openxmlformats.org/officeDocument/2006/relationships">
+  <p:cSld>
+    <p:spTree>
+      <p:nvGrpSpPr>
+        <p:cNvPr id="1" name=""/>
+        <p:cNvGrpSpPr/>
+        <p:nvPr/>
+      </p:nvGrpSpPr>
+      <p:grpSpPr/>
+      <p:sp>
+        <p:nvSpPr>
+          <p:cNvPr id="2" name="Text 0">
+            <a:extLst>
+              <a:ext uri="{FF2B5EF4-FFF2-40B4-BE49-F238E27FC236}">
+                <a16:creationId xmlns:a16="http://schemas.microsoft.com/office/drawing/2014/main" id="{F779FF6B-910B-4E58-955B-7B6FE29829C1}"/>
+              </a:ext>
+            </a:extLst>
+          </p:cNvPr>
+          <p:cNvSpPr>
+            <a:spLocks noGrp="1"/>
+          </p:cNvSpPr>
+          <p:nvPr/>
+        </p:nvSpPr>
+        <p:spPr>
+          <a:xfrm>
+            <a:off x="457200" y="6492240"/>
+            <a:ext cx="7315200" cy="274320"/>
+          </a:xfrm>
+          <a:prstGeom prst="rect">
+            <a:avLst/>
+          </a:prstGeom>
+          <a:noFill/>
+        </p:spPr>
+        <p:txBody>
+          <a:bodyPr wrap="square" lIns="0" tIns="0" rIns="0" bIns="0" anchor="ctr"/>
+          <a:lstStyle/>
+          <a:p>
+            <a:pPr marL="0" indent="0" algn="l">
+              <a:buNone/>
+            </a:pPr>
+            <a:r>
+              <a:rPr sz="900">
+                <a:solidFill>
+                  <a:srgbClr val="64748B"/>
+                </a:solidFill>
+                <a:latin typeface="Calibri"/>
+                <a:ea typeface="Calibri"/>
+                <a:cs typeface="Calibri"/>
+              </a:rPr>
+              <a:t>BINUS UNIVERSITY  |  Cloud Services  |  Praktikum 11</a:t>
+            </a:r>
+            <a:endParaRPr sz="900"/>
+          </a:p>
+        </p:txBody>
+      </p:sp>
+      <p:sp>
+        <p:nvSpPr>
+          <p:cNvPr id="3" name="Text 1">
+            <a:extLst>
+              <a:ext uri="{FF2B5EF4-FFF2-40B4-BE49-F238E27FC236}">
+                <a16:creationId xmlns:a16="http://schemas.microsoft.com/office/drawing/2014/main" id="{3352C906-5F0A-42A0-94F0-9170DC749E53}"/>
+              </a:ext>
+            </a:extLst>
+          </p:cNvPr>
+          <p:cNvSpPr>
+            <a:spLocks noGrp="1"/>
+          </p:cNvSpPr>
+          <p:nvPr/>
+        </p:nvSpPr>
+        <p:spPr>
+          <a:xfrm>
+            <a:off x="11247120" y="6492240"/>
+            <a:ext cx="457200" cy="274320"/>
+          </a:xfrm>
+          <a:prstGeom prst="rect">
+            <a:avLst/>
+          </a:prstGeom>
+          <a:noFill/>
+        </p:spPr>
+        <p:txBody>
+          <a:bodyPr wrap="square" lIns="0" tIns="0" rIns="0" bIns="0" anchor="ctr"/>
+          <a:lstStyle/>
+          <a:p>
+            <a:pPr marL="0" indent="0" algn="r">
+              <a:buNone/>
+            </a:pPr>
+            <a:r>
+              <a:rPr lang="en-US" sz="900" b="1">
+                <a:solidFill>
+                  <a:srgbClr val="64748B"/>
+                </a:solidFill>
+                <a:latin typeface="Calibri"/>
+                <a:ea typeface="Calibri"/>
+                <a:cs typeface="Calibri"/>
+              </a:rPr>
+              <a:t>15</a:t>
+            </a:r>
+            <a:endParaRPr sz="900"/>
+          </a:p>
+        </p:txBody>
+      </p:sp>
+      <p:sp>
+        <p:nvSpPr>
+          <p:cNvPr id="4" name="Shape 2">
+            <a:extLst>
+              <a:ext uri="{FF2B5EF4-FFF2-40B4-BE49-F238E27FC236}">
+                <a16:creationId xmlns:a16="http://schemas.microsoft.com/office/drawing/2014/main" id="{BAEEB222-C692-4EAC-956E-AC234E3B4E07}"/>
+              </a:ext>
+            </a:extLst>
+          </p:cNvPr>
+          <p:cNvSpPr>
+            <a:spLocks noGrp="1"/>
+          </p:cNvSpPr>
+          <p:nvPr/>
+        </p:nvSpPr>
+        <p:spPr>
+          <a:xfrm>
+            <a:off x="457200" y="6446520"/>
+            <a:ext cx="228600" cy="36576"/>
+          </a:xfrm>
+          <a:prstGeom prst="rect">
+            <a:avLst/>
+          </a:prstGeom>
+          <a:solidFill>
+            <a:srgbClr val="F37021"/>
+          </a:solidFill>
+          <a:ln w="12700">
+            <a:solidFill>
+              <a:srgbClr val="F37021"/>
+            </a:solidFill>
+            <a:prstDash val="solid"/>
+          </a:ln>
+        </p:spPr>
+        <p:txBody>
+          <a:bodyPr/>
+          <a:p/>
+        </p:txBody>
       </p:sp>
       <p:pic>
         <p:nvPicPr>
@@ -7827,7 +8228,7 @@
           <p:nvPr/>
         </p:nvPicPr>
         <p:blipFill>
-          <a:blip r:embed="rId4"/>
+          <a:blip r:embed="rId10"/>
           <a:stretch>
             <a:fillRect/>
           </a:stretch>
@@ -7872,6 +8273,10 @@
             <a:prstDash val="solid"/>
           </a:ln>
         </p:spPr>
+        <p:txBody>
+          <a:bodyPr/>
+          <a:p/>
+        </p:txBody>
       </p:sp>
       <p:sp>
         <p:nvSpPr>
@@ -7913,7 +8318,7 @@
                 <a:ea typeface="Calibri"/>
                 <a:cs typeface="Calibri"/>
               </a:rPr>
-              <a:t>Bukti 5 | Dokumen baru masuk indeks</a:t>
+              <a:t>Bukti API | top_k nol ditolak</a:t>
             </a:r>
             <a:endParaRPr sz="2200"/>
           </a:p>
@@ -7959,7 +8364,7 @@
                 <a:ea typeface="Calibri"/>
                 <a:cs typeface="Calibri"/>
               </a:rPr>
-              <a:t>Output ingest setelah file kelas_visual.md ditambahkan</a:t>
+              <a:t>Validasi request memberi HTTP 422 sebelum query database</a:t>
             </a:r>
             <a:endParaRPr sz="1200"/>
           </a:p>
@@ -7997,6 +8402,10 @@
             <a:prstDash val="solid"/>
           </a:ln>
         </p:spPr>
+        <p:txBody>
+          <a:bodyPr/>
+          <a:p/>
+        </p:txBody>
       </p:sp>
       <p:sp>
         <p:nvSpPr>
@@ -8053,7 +8462,7 @@
           <p:nvPr/>
         </p:nvPicPr>
         <p:blipFill>
-          <a:blip r:embed="rId5"/>
+          <a:blip r:embed="rId8"/>
           <a:stretch>
             <a:fillRect/>
           </a:stretch>
@@ -8100,7 +8509,7 @@
               <a:buNone/>
             </a:pPr>
             <a:r>
-              <a:rPr lang="pt-BR" sz="1400">
+              <a:rPr lang="en-US" sz="1400">
                 <a:solidFill>
                   <a:srgbClr val="312124"/>
                 </a:solidFill>
@@ -8108,7 +8517,7 @@
                 <a:ea typeface="Calibri"/>
                 <a:cs typeface="Calibri"/>
               </a:rPr>
-              <a:t>File kelas_visual.md berada di docs/.</a:t>
+              <a:t>POST /api/ask dengan top_k=0.</a:t>
             </a:r>
             <a:endParaRPr sz="1400">
               <a:solidFill>
@@ -8175,7 +8584,7 @@
               <a:buNone/>
             </a:pPr>
             <a:r>
-              <a:rPr lang="nb-NO" sz="1400">
+              <a:rPr lang="en-US" sz="1400">
                 <a:solidFill>
                   <a:srgbClr val="312124"/>
                 </a:solidFill>
@@ -8183,7 +8592,7 @@
                 <a:ea typeface="Calibri"/>
                 <a:cs typeface="Calibri"/>
               </a:rPr>
-              <a:t>Ingest ulang memproses empat file.</a:t>
+              <a:t>Batas yang sah adalah 1 sampai 10.</a:t>
             </a:r>
             <a:endParaRPr sz="1400">
               <a:solidFill>
@@ -8203,7 +8612,7 @@
           <p:nvPr/>
         </p:nvPicPr>
         <p:blipFill>
-          <a:blip r:embed="rId7"/>
+          <a:blip r:embed="rId4"/>
           <a:stretch>
             <a:fillRect/>
           </a:stretch>
@@ -8258,7 +8667,7 @@
                 <a:ea typeface="Calibri"/>
                 <a:cs typeface="Calibri"/>
               </a:rPr>
-              <a:t>Screenshot menampilkan chunks=7.</a:t>
+              <a:t>Pydantic memeriksa JSON request.</a:t>
             </a:r>
             <a:endParaRPr sz="1400">
               <a:solidFill>
@@ -8278,7 +8687,7 @@
           <p:nvPr/>
         </p:nvPicPr>
         <p:blipFill>
-          <a:blip r:embed="rId8"/>
+          <a:blip r:embed="rId2"/>
           <a:stretch>
             <a:fillRect/>
           </a:stretch>
@@ -8325,7 +8734,7 @@
               <a:buNone/>
             </a:pPr>
             <a:r>
-              <a:rPr lang="en-US" sz="1400">
+              <a:rPr lang="sv-SE" sz="1400">
                 <a:solidFill>
                   <a:srgbClr val="312124"/>
                 </a:solidFill>
@@ -8333,7 +8742,7 @@
                 <a:ea typeface="Calibri"/>
                 <a:cs typeface="Calibri"/>
               </a:rPr>
-              <a:t>Mode tetap hashing-384 baseline.</a:t>
+              <a:t>Handler retrieval tidak dijalankan.</a:t>
             </a:r>
             <a:endParaRPr sz="1400">
               <a:solidFill>
@@ -8353,7 +8762,7 @@
           <p:nvPr/>
         </p:nvPicPr>
         <p:blipFill>
-          <a:blip r:embed="rId9"/>
+          <a:blip r:embed="rId11"/>
           <a:stretch>
             <a:fillRect/>
           </a:stretch>
@@ -8400,7 +8809,7 @@
               <a:buNone/>
             </a:pPr>
             <a:r>
-              <a:rPr lang="nl-NL" sz="1400">
+              <a:rPr lang="en-US" sz="1400">
                 <a:solidFill>
                   <a:srgbClr val="312124"/>
                 </a:solidFill>
@@ -8408,7 +8817,7 @@
                 <a:ea typeface="Calibri"/>
                 <a:cs typeface="Calibri"/>
               </a:rPr>
-              <a:t>chunk_size=500 dan overlap=50.</a:t>
+              <a:t>HTTP 422 muncul pada server response.</a:t>
             </a:r>
             <a:endParaRPr sz="1400">
               <a:solidFill>
@@ -8428,7 +8837,7 @@
           <p:nvPr/>
         </p:nvPicPr>
         <p:blipFill>
-          <a:blip r:embed="rId10"/>
+          <a:blip r:embed="rId9"/>
           <a:stretch>
             <a:fillRect/>
           </a:stretch>
@@ -8483,7 +8892,7 @@
                 <a:ea typeface="Calibri"/>
                 <a:cs typeface="Calibri"/>
               </a:rPr>
-              <a:t>Uji pertanyaan untuk memeriksa top-K.</a:t>
+              <a:t>loc menunjuk body.top_k.</a:t>
             </a:r>
             <a:endParaRPr sz="1400">
               <a:solidFill>
@@ -8503,7 +8912,7 @@
           <p:nvPr/>
         </p:nvPicPr>
         <p:blipFill>
-          <a:blip r:embed="rId11"/>
+          <a:blip r:embed="rId7"/>
           <a:stretch>
             <a:fillRect/>
           </a:stretch>
@@ -8558,7 +8967,7 @@
                 <a:ea typeface="Calibri"/>
                 <a:cs typeface="Calibri"/>
               </a:rPr>
-              <a:t>Git hanya untuk dokumen contoh publik.</a:t>
+              <a:t>Pesan meminta nilai minimal satu.</a:t>
             </a:r>
             <a:endParaRPr sz="1400">
               <a:solidFill>
@@ -8601,6 +9010,10 @@
             <a:prstDash val="solid"/>
           </a:ln>
         </p:spPr>
+        <p:txBody>
+          <a:bodyPr/>
+          <a:p/>
+        </p:txBody>
       </p:sp>
       <p:sp>
         <p:nvSpPr>
@@ -8618,8 +9031,8 @@
         </p:nvSpPr>
         <p:spPr>
           <a:xfrm>
-            <a:off x="6446520" y="1600200"/>
-            <a:ext cx="5120640" cy="822960"/>
+            <a:off x="6446520" y="1508760"/>
+            <a:ext cx="5120640" cy="457200"/>
           </a:xfrm>
           <a:prstGeom prst="rect">
             <a:avLst/>
@@ -8718,6 +9131,10 @@
             <a:prstDash val="solid"/>
           </a:ln>
         </p:spPr>
+        <p:txBody>
+          <a:bodyPr/>
+          <a:p/>
+        </p:txBody>
       </p:sp>
       <p:sp>
         <p:nvSpPr>
@@ -8759,7 +9176,7 @@
                 <a:ea typeface="Calibri"/>
                 <a:cs typeface="Calibri"/>
               </a:rPr>
-              <a:t>Files=4 dan chunks=7 setelah reindex.</a:t>
+              <a:t>Respons 422 adalah hasil validasi yang diharapkan.</a:t>
             </a:r>
             <a:endParaRPr sz="1500">
               <a:solidFill>
@@ -8772,34 +9189,22 @@
       </p:sp>
       <p:pic>
         <p:nvPicPr>
-          <p:cNvPr id="6" name="Picture 5">
-            <a:extLst>
-              <a:ext uri="{FF2B5EF4-FFF2-40B4-BE49-F238E27FC236}">
-                <a16:creationId xmlns:a16="http://schemas.microsoft.com/office/drawing/2014/main" id="{989636F2-71EE-79E6-AFDE-1B3BE45AAAC4}"/>
-              </a:ext>
-            </a:extLst>
-          </p:cNvPr>
+          <p:cNvPr id="63" name="Picture 62" descr="11_api_422_respons.png"/>
           <p:cNvPicPr>
-            <a:picLocks/>
+            <a:picLocks noChangeAspect="1"/>
           </p:cNvPicPr>
           <p:nvPr/>
         </p:nvPicPr>
         <p:blipFill>
-          <a:blip r:embed="rId12">
-            <a:extLst>
-              <a:ext uri="{28A0092B-C50C-407E-A947-70E740481C1C}">
-                <a14:useLocalDpi xmlns:a14="http://schemas.microsoft.com/office/drawing/2010/main" val="0"/>
-              </a:ext>
-            </a:extLst>
-          </a:blip>
+          <a:blip r:embed="rId12"/>
           <a:stretch>
             <a:fillRect/>
           </a:stretch>
         </p:blipFill>
         <p:spPr>
           <a:xfrm>
-            <a:off x="6419088" y="2251021"/>
-            <a:ext cx="5084064" cy="2703431"/>
+            <a:off x="6446520" y="2614665"/>
+            <a:ext cx="5029200" cy="1948708"/>
           </a:xfrm>
           <a:prstGeom prst="rect">
             <a:avLst/>
@@ -8807,11 +9212,6 @@
         </p:spPr>
       </p:pic>
     </p:spTree>
-    <p:extLst>
-      <p:ext uri="{BB962C8B-B14F-4D97-AF65-F5344CB8AC3E}">
-        <p14:creationId xmlns:p14="http://schemas.microsoft.com/office/powerpoint/2010/main" val="4019146537"/>
-      </p:ext>
-    </p:extLst>
   </p:cSld>
   <p:clrMapOvr>
     <a:masterClrMapping/>
@@ -8968,6 +9368,10 @@
             <a:prstDash val="solid"/>
           </a:ln>
         </p:spPr>
+        <p:txBody>
+          <a:bodyPr/>
+          <a:p/>
+        </p:txBody>
       </p:sp>
       <p:pic>
         <p:nvPicPr>
@@ -9047,6 +9451,10 @@
             <a:prstDash val="solid"/>
           </a:ln>
         </p:spPr>
+        <p:txBody>
+          <a:bodyPr/>
+          <a:p/>
+        </p:txBody>
       </p:sp>
       <p:sp>
         <p:nvSpPr>
@@ -9080,7 +9488,7 @@
               <a:buNone/>
             </a:pPr>
             <a:r>
-              <a:rPr lang="nl-NL" sz="2200" b="1">
+              <a:rPr lang="en-US" sz="2200" b="1">
                 <a:solidFill>
                   <a:srgbClr val="1976D2"/>
                 </a:solidFill>
@@ -9088,7 +9496,7 @@
                 <a:ea typeface="Calibri"/>
                 <a:cs typeface="Calibri"/>
               </a:rPr>
-              <a:t>7 | Benchmark dan opsi semantic</a:t>
+              <a:t>6 | Kunci challenge dokumen baru</a:t>
             </a:r>
             <a:endParaRPr sz="2200"/>
           </a:p>
@@ -9134,7 +9542,7 @@
                 <a:ea typeface="Calibri"/>
                 <a:cs typeface="Calibri"/>
               </a:rPr>
-              <a:t>Ukur beberapa pertanyaan; bedakan baseline hash dari embedding model</a:t>
+              <a:t>Tambah pengetahuan kelas, indeks ulang, lalu buktikan di UI</a:t>
             </a:r>
             <a:endParaRPr sz="1200"/>
           </a:p>
@@ -9172,6 +9580,10 @@
             <a:prstDash val="solid"/>
           </a:ln>
         </p:spPr>
+        <p:txBody>
+          <a:bodyPr/>
+          <a:p/>
+        </p:txBody>
       </p:sp>
       <p:sp>
         <p:nvSpPr>
@@ -9205,6 +9617,10 @@
             <a:prstDash val="solid"/>
           </a:ln>
         </p:spPr>
+        <p:txBody>
+          <a:bodyPr/>
+          <a:p/>
+        </p:txBody>
       </p:sp>
       <p:sp>
         <p:nvSpPr>
@@ -9238,6 +9654,10 @@
             <a:prstDash val="solid"/>
           </a:ln>
         </p:spPr>
+        <p:txBody>
+          <a:bodyPr/>
+          <a:p/>
+        </p:txBody>
       </p:sp>
       <p:sp>
         <p:nvSpPr>
@@ -9271,6 +9691,10 @@
             <a:prstDash val="solid"/>
           </a:ln>
         </p:spPr>
+        <p:txBody>
+          <a:bodyPr/>
+          <a:p/>
+        </p:txBody>
       </p:sp>
       <p:sp>
         <p:nvSpPr>
@@ -9304,6 +9728,10 @@
             <a:prstDash val="solid"/>
           </a:ln>
         </p:spPr>
+        <p:txBody>
+          <a:bodyPr/>
+          <a:p/>
+        </p:txBody>
       </p:sp>
       <p:sp>
         <p:nvSpPr>
@@ -9345,7 +9773,7 @@
                 <a:ea typeface="Consolas"/>
                 <a:cs typeface="Consolas"/>
               </a:rPr>
-              <a:t>Perintah</a:t>
+              <a:t>PowerShell</a:t>
             </a:r>
             <a:endParaRPr sz="900"/>
           </a:p>
@@ -9404,13 +9832,11 @@
                 <a:ea typeface="Consolas"/>
                 <a:cs typeface="Consolas"/>
               </a:rPr>
-              <a:t>.\.venv\Scripts\python benchmark.py
-# 3 pertanyaan × 5 pengulangan.
-# Opsional semantic:
-.\.venv\Scripts\python -m pip install `
-  -r requirements-semantic.txt
-# EMBED_MODE=semantic di .env,
-# lalu jalankan rag.py ingest ulang.</a:t>
+              <a:t>Set-Content docs/kelas_visual.md -Value `
+  'Status visual membantu on-call memeriksa health.'
+.\.venv\Scripts\python rag.py ingest
+.\.venv\Scripts\python rag.py ask `
+  "Apa manfaat status visual untuk on-call?"</a:t>
             </a:r>
             <a:endParaRPr sz="1500">
               <a:solidFill>
@@ -9453,6 +9879,10 @@
             <a:prstDash val="solid"/>
           </a:ln>
         </p:spPr>
+        <p:txBody>
+          <a:bodyPr/>
+          <a:p/>
+        </p:txBody>
       </p:sp>
       <p:sp>
         <p:nvSpPr>
@@ -9486,6 +9916,10 @@
             <a:prstDash val="solid"/>
           </a:ln>
         </p:spPr>
+        <p:txBody>
+          <a:bodyPr/>
+          <a:p/>
+        </p:txBody>
       </p:sp>
       <p:sp>
         <p:nvSpPr>
@@ -9519,6 +9953,10 @@
             <a:prstDash val="solid"/>
           </a:ln>
         </p:spPr>
+        <p:txBody>
+          <a:bodyPr/>
+          <a:p/>
+        </p:txBody>
       </p:sp>
       <p:sp>
         <p:nvSpPr>
@@ -9552,6 +9990,10 @@
             <a:prstDash val="solid"/>
           </a:ln>
         </p:spPr>
+        <p:txBody>
+          <a:bodyPr/>
+          <a:p/>
+        </p:txBody>
       </p:sp>
       <p:sp>
         <p:nvSpPr>
@@ -9585,6 +10027,10 @@
             <a:prstDash val="solid"/>
           </a:ln>
         </p:spPr>
+        <p:txBody>
+          <a:bodyPr/>
+          <a:p/>
+        </p:txBody>
       </p:sp>
       <p:sp>
         <p:nvSpPr>
@@ -9626,7 +10072,7 @@
                 <a:ea typeface="Consolas"/>
                 <a:cs typeface="Consolas"/>
               </a:rPr>
-              <a:t>Apa yang dilaporkan?</a:t>
+              <a:t>Mengapa indeks ulang?</a:t>
             </a:r>
             <a:endParaRPr sz="900"/>
           </a:p>
@@ -9685,12 +10131,12 @@
                 <a:ea typeface="Consolas"/>
                 <a:cs typeface="Consolas"/>
               </a:rPr>
-              <a:t>benchmark.py menulis JSONL lokal.
-p50 = median, p95 = nearest-rank.
-Semantic = all-MiniLM-L6-v2, 384 dim.
-Input model sekitar 256 word pieces;
-chunk dipendekkan sampai &lt;= batas.
-Groq/LLM memerlukan key server opsional.</a:t>
+              <a:t>rag.py ingest mengganti indeks lama
+secara transaksional dengan semua docs/.
+Tanpa ingest, file baru belum ada di DB.
+Cari kelas_visual.md pada file dan sources.
+Jangan masukkan rahasia atau data privat.
+Catat jumlah chunk sebelum/sesudah.</a:t>
             </a:r>
             <a:endParaRPr sz="1600">
               <a:solidFill>
@@ -9704,7 +10150,7 @@
     </p:spTree>
     <p:extLst>
       <p:ext uri="{BB962C8B-B14F-4D97-AF65-F5344CB8AC3E}">
-        <p14:creationId xmlns:p14="http://schemas.microsoft.com/office/powerpoint/2010/main" val="3701174920"/>
+        <p14:creationId xmlns:p14="http://schemas.microsoft.com/office/powerpoint/2010/main" val="164200899"/>
       </p:ext>
     </p:extLst>
   </p:cSld>
@@ -9863,6 +10309,10 @@
             <a:prstDash val="solid"/>
           </a:ln>
         </p:spPr>
+        <p:txBody>
+          <a:bodyPr/>
+          <a:p/>
+        </p:txBody>
       </p:sp>
       <p:pic>
         <p:nvPicPr>
@@ -9942,6 +10392,10 @@
             <a:prstDash val="solid"/>
           </a:ln>
         </p:spPr>
+        <p:txBody>
+          <a:bodyPr/>
+          <a:p/>
+        </p:txBody>
       </p:sp>
       <p:sp>
         <p:nvSpPr>
@@ -9983,7 +10437,7 @@
                 <a:ea typeface="Calibri"/>
                 <a:cs typeface="Calibri"/>
               </a:rPr>
-              <a:t>Bukti 6 | Benchmark 15 query aktual</a:t>
+              <a:t>Bukti 5 | Dokumen baru masuk indeks</a:t>
             </a:r>
             <a:endParaRPr sz="2200"/>
           </a:p>
@@ -10029,7 +10483,7 @@
                 <a:ea typeface="Calibri"/>
                 <a:cs typeface="Calibri"/>
               </a:rPr>
-              <a:t>Tiga pertanyaan × lima pengulangan pada mesin uji lokal</a:t>
+              <a:t>Output ingest setelah file kelas_visual.md ditambahkan</a:t>
             </a:r>
             <a:endParaRPr sz="1200"/>
           </a:p>
@@ -10067,6 +10521,10 @@
             <a:prstDash val="solid"/>
           </a:ln>
         </p:spPr>
+        <p:txBody>
+          <a:bodyPr/>
+          <a:p/>
+        </p:txBody>
       </p:sp>
       <p:sp>
         <p:nvSpPr>
@@ -10170,7 +10628,7 @@
               <a:buNone/>
             </a:pPr>
             <a:r>
-              <a:rPr lang="en-US" sz="1400">
+              <a:rPr lang="pt-BR" sz="1400">
                 <a:solidFill>
                   <a:srgbClr val="312124"/>
                 </a:solidFill>
@@ -10178,7 +10636,7 @@
                 <a:ea typeface="Calibri"/>
                 <a:cs typeface="Calibri"/>
               </a:rPr>
-              <a:t>benchmark.py --repeat 5 berjalan.</a:t>
+              <a:t>File kelas_visual.md berada di docs/.</a:t>
             </a:r>
             <a:endParaRPr sz="1400">
               <a:solidFill>
@@ -10245,7 +10703,7 @@
               <a:buNone/>
             </a:pPr>
             <a:r>
-              <a:rPr lang="en-US" sz="1400">
+              <a:rPr lang="nb-NO" sz="1400">
                 <a:solidFill>
                   <a:srgbClr val="312124"/>
                 </a:solidFill>
@@ -10253,7 +10711,7 @@
                 <a:ea typeface="Calibri"/>
                 <a:cs typeface="Calibri"/>
               </a:rPr>
-              <a:t>15 sampel, masing-masing tiga sumber.</a:t>
+              <a:t>Ingest ulang memproses empat file.</a:t>
             </a:r>
             <a:endParaRPr sz="1400">
               <a:solidFill>
@@ -10328,7 +10786,7 @@
                 <a:ea typeface="Calibri"/>
                 <a:cs typeface="Calibri"/>
               </a:rPr>
-              <a:t>p50 = 61.51 ms pada mesin uji.</a:t>
+              <a:t>Screenshot menampilkan chunks=7.</a:t>
             </a:r>
             <a:endParaRPr sz="1400">
               <a:solidFill>
@@ -10403,7 +10861,7 @@
                 <a:ea typeface="Calibri"/>
                 <a:cs typeface="Calibri"/>
               </a:rPr>
-              <a:t>p95 = 189.26 ms pada mesin uji.</a:t>
+              <a:t>Mode tetap hashing-384 baseline.</a:t>
             </a:r>
             <a:endParaRPr sz="1400">
               <a:solidFill>
@@ -10470,7 +10928,7 @@
               <a:buNone/>
             </a:pPr>
             <a:r>
-              <a:rPr lang="en-US" sz="1400">
+              <a:rPr lang="nl-NL" sz="1400">
                 <a:solidFill>
                   <a:srgbClr val="312124"/>
                 </a:solidFill>
@@ -10478,7 +10936,7 @@
                 <a:ea typeface="Calibri"/>
                 <a:cs typeface="Calibri"/>
               </a:rPr>
-              <a:t>Latensi berubah menurut mesin/beban.</a:t>
+              <a:t>chunk_size=500 dan overlap=50.</a:t>
             </a:r>
             <a:endParaRPr sz="1400">
               <a:solidFill>
@@ -10553,7 +11011,7 @@
                 <a:ea typeface="Calibri"/>
                 <a:cs typeface="Calibri"/>
               </a:rPr>
-              <a:t>JSONL menyimpan tiap respons.</a:t>
+              <a:t>Uji pertanyaan untuk memeriksa top-K.</a:t>
             </a:r>
             <a:endParaRPr sz="1400">
               <a:solidFill>
@@ -10628,7 +11086,7 @@
                 <a:ea typeface="Calibri"/>
                 <a:cs typeface="Calibri"/>
               </a:rPr>
-              <a:t>Mode hash belum biaya API LLM.</a:t>
+              <a:t>Git hanya untuk dokumen contoh publik.</a:t>
             </a:r>
             <a:endParaRPr sz="1400">
               <a:solidFill>
@@ -10671,6 +11129,10 @@
             <a:prstDash val="solid"/>
           </a:ln>
         </p:spPr>
+        <p:txBody>
+          <a:bodyPr/>
+          <a:p/>
+        </p:txBody>
       </p:sp>
       <p:sp>
         <p:nvSpPr>
@@ -10788,6 +11250,10 @@
             <a:prstDash val="solid"/>
           </a:ln>
         </p:spPr>
+        <p:txBody>
+          <a:bodyPr/>
+          <a:p/>
+        </p:txBody>
       </p:sp>
       <p:sp>
         <p:nvSpPr>
@@ -10829,7 +11295,7 @@
                 <a:ea typeface="Calibri"/>
                 <a:cs typeface="Calibri"/>
               </a:rPr>
-              <a:t>15 sampel; p50 61.51 ms; p95 189.26 ms.</a:t>
+              <a:t>Files=4 dan chunks=7 setelah reindex.</a:t>
             </a:r>
             <a:endParaRPr sz="1500">
               <a:solidFill>
@@ -10845,7 +11311,7 @@
           <p:cNvPr id="6" name="Picture 5">
             <a:extLst>
               <a:ext uri="{FF2B5EF4-FFF2-40B4-BE49-F238E27FC236}">
-                <a16:creationId xmlns:a16="http://schemas.microsoft.com/office/drawing/2014/main" id="{623279D3-6F9A-27F1-0A03-E9CB5EA2202F}"/>
+                <a16:creationId xmlns:a16="http://schemas.microsoft.com/office/drawing/2014/main" id="{989636F2-71EE-79E6-AFDE-1B3BE45AAAC4}"/>
               </a:ext>
             </a:extLst>
           </p:cNvPr>
@@ -10868,8 +11334,8 @@
         </p:blipFill>
         <p:spPr>
           <a:xfrm>
-            <a:off x="6419088" y="2388031"/>
-            <a:ext cx="5084064" cy="2429410"/>
+            <a:off x="6419088" y="2251021"/>
+            <a:ext cx="5084064" cy="2703431"/>
           </a:xfrm>
           <a:prstGeom prst="rect">
             <a:avLst/>
@@ -10879,7 +11345,7 @@
     </p:spTree>
     <p:extLst>
       <p:ext uri="{BB962C8B-B14F-4D97-AF65-F5344CB8AC3E}">
-        <p14:creationId xmlns:p14="http://schemas.microsoft.com/office/powerpoint/2010/main" val="253219963"/>
+        <p14:creationId xmlns:p14="http://schemas.microsoft.com/office/powerpoint/2010/main" val="4019146537"/>
       </p:ext>
     </p:extLst>
   </p:cSld>
@@ -11038,6 +11504,10 @@
             <a:prstDash val="solid"/>
           </a:ln>
         </p:spPr>
+        <p:txBody>
+          <a:bodyPr/>
+          <a:p/>
+        </p:txBody>
       </p:sp>
       <p:pic>
         <p:nvPicPr>
@@ -11117,6 +11587,10 @@
             <a:prstDash val="solid"/>
           </a:ln>
         </p:spPr>
+        <p:txBody>
+          <a:bodyPr/>
+          <a:p/>
+        </p:txBody>
       </p:sp>
       <p:sp>
         <p:nvSpPr>
@@ -11150,7 +11624,7 @@
               <a:buNone/>
             </a:pPr>
             <a:r>
-              <a:rPr lang="en-US" sz="2200" b="1">
+              <a:rPr lang="nl-NL" sz="2200" b="1">
                 <a:solidFill>
                   <a:srgbClr val="1976D2"/>
                 </a:solidFill>
@@ -11158,7 +11632,7 @@
                 <a:ea typeface="Calibri"/>
                 <a:cs typeface="Calibri"/>
               </a:rPr>
-              <a:t>8 | Kunci challenge 10 cek RAG</a:t>
+              <a:t>7 | Benchmark dan opsi semantic</a:t>
             </a:r>
             <a:endParaRPr sz="2200"/>
           </a:p>
@@ -11196,7 +11670,7 @@
               <a:buNone/>
             </a:pPr>
             <a:r>
-              <a:rPr lang="sv-SE" sz="1200" i="1">
+              <a:rPr lang="en-US" sz="1200" i="1">
                 <a:solidFill>
                   <a:srgbClr val="64748B"/>
                 </a:solidFill>
@@ -11204,7 +11678,7 @@
                 <a:ea typeface="Calibri"/>
                 <a:cs typeface="Calibri"/>
               </a:rPr>
-              <a:t>Jalankan ketika Compose, ingest, dan Uvicorn masih hidup</a:t>
+              <a:t>Ukur beberapa pertanyaan; bedakan baseline hash dari embedding model</a:t>
             </a:r>
             <a:endParaRPr sz="1200"/>
           </a:p>
@@ -11242,6 +11716,10 @@
             <a:prstDash val="solid"/>
           </a:ln>
         </p:spPr>
+        <p:txBody>
+          <a:bodyPr/>
+          <a:p/>
+        </p:txBody>
       </p:sp>
       <p:sp>
         <p:nvSpPr>
@@ -11275,6 +11753,10 @@
             <a:prstDash val="solid"/>
           </a:ln>
         </p:spPr>
+        <p:txBody>
+          <a:bodyPr/>
+          <a:p/>
+        </p:txBody>
       </p:sp>
       <p:sp>
         <p:nvSpPr>
@@ -11308,6 +11790,10 @@
             <a:prstDash val="solid"/>
           </a:ln>
         </p:spPr>
+        <p:txBody>
+          <a:bodyPr/>
+          <a:p/>
+        </p:txBody>
       </p:sp>
       <p:sp>
         <p:nvSpPr>
@@ -11341,6 +11827,10 @@
             <a:prstDash val="solid"/>
           </a:ln>
         </p:spPr>
+        <p:txBody>
+          <a:bodyPr/>
+          <a:p/>
+        </p:txBody>
       </p:sp>
       <p:sp>
         <p:nvSpPr>
@@ -11374,6 +11864,10 @@
             <a:prstDash val="solid"/>
           </a:ln>
         </p:spPr>
+        <p:txBody>
+          <a:bodyPr/>
+          <a:p/>
+        </p:txBody>
       </p:sp>
       <p:sp>
         <p:nvSpPr>
@@ -11474,9 +11968,13 @@
                 <a:ea typeface="Consolas"/>
                 <a:cs typeface="Consolas"/>
               </a:rPr>
-              <a:t>.\.venv\Scripts\python -B `
-  tests\challenge.py
-# Target: challenge: 10 PASS, 0 FAIL.</a:t>
+              <a:t>.\.venv\Scripts\python benchmark.py
+# 3 pertanyaan × 5 pengulangan.
+# Opsional semantic:
+.\.venv\Scripts\python -m pip install `
+  -r requirements-semantic.txt
+# EMBED_MODE=semantic di .env,
+# lalu jalankan rag.py ingest ulang.</a:t>
             </a:r>
             <a:endParaRPr sz="1500">
               <a:solidFill>
@@ -11519,6 +12017,10 @@
             <a:prstDash val="solid"/>
           </a:ln>
         </p:spPr>
+        <p:txBody>
+          <a:bodyPr/>
+          <a:p/>
+        </p:txBody>
       </p:sp>
       <p:sp>
         <p:nvSpPr>
@@ -11552,6 +12054,10 @@
             <a:prstDash val="solid"/>
           </a:ln>
         </p:spPr>
+        <p:txBody>
+          <a:bodyPr/>
+          <a:p/>
+        </p:txBody>
       </p:sp>
       <p:sp>
         <p:nvSpPr>
@@ -11585,6 +12091,10 @@
             <a:prstDash val="solid"/>
           </a:ln>
         </p:spPr>
+        <p:txBody>
+          <a:bodyPr/>
+          <a:p/>
+        </p:txBody>
       </p:sp>
       <p:sp>
         <p:nvSpPr>
@@ -11618,6 +12128,10 @@
             <a:prstDash val="solid"/>
           </a:ln>
         </p:spPr>
+        <p:txBody>
+          <a:bodyPr/>
+          <a:p/>
+        </p:txBody>
       </p:sp>
       <p:sp>
         <p:nvSpPr>
@@ -11651,6 +12165,10 @@
             <a:prstDash val="solid"/>
           </a:ln>
         </p:spPr>
+        <p:txBody>
+          <a:bodyPr/>
+          <a:p/>
+        </p:txBody>
       </p:sp>
       <p:sp>
         <p:nvSpPr>
@@ -11692,7 +12210,7 @@
                 <a:ea typeface="Consolas"/>
                 <a:cs typeface="Consolas"/>
               </a:rPr>
-              <a:t>Cakupan checker</a:t>
+              <a:t>Apa yang dilaporkan?</a:t>
             </a:r>
             <a:endParaRPr sz="900"/>
           </a:p>
@@ -11751,12 +12269,12 @@
                 <a:ea typeface="Consolas"/>
                 <a:cs typeface="Consolas"/>
               </a:rPr>
-              <a:t>384 dimensi dan chunk valid.
-p95 nearest-rank konsisten.
-/health dan /ready 200.
-Ask memberi jawaban + sumber.
-top_k=0 ditolak HTTP 422.
-Ekstraktif memakai sitasi [S1].</a:t>
+              <a:t>benchmark.py menulis JSONL lokal.
+p50 = median, p95 = nearest-rank.
+Semantic = all-MiniLM-L6-v2, 384 dim.
+Input model sekitar 256 word pieces;
+chunk dipendekkan sampai &lt;= batas.
+Groq/LLM memerlukan key server opsional.</a:t>
             </a:r>
             <a:endParaRPr sz="1600">
               <a:solidFill>
@@ -11770,7 +12288,7 @@
     </p:spTree>
     <p:extLst>
       <p:ext uri="{BB962C8B-B14F-4D97-AF65-F5344CB8AC3E}">
-        <p14:creationId xmlns:p14="http://schemas.microsoft.com/office/powerpoint/2010/main" val="4120040058"/>
+        <p14:creationId xmlns:p14="http://schemas.microsoft.com/office/powerpoint/2010/main" val="3701174920"/>
       </p:ext>
     </p:extLst>
   </p:cSld>
@@ -11929,6 +12447,10 @@
             <a:prstDash val="solid"/>
           </a:ln>
         </p:spPr>
+        <p:txBody>
+          <a:bodyPr/>
+          <a:p/>
+        </p:txBody>
       </p:sp>
       <p:pic>
         <p:nvPicPr>
@@ -12008,6 +12530,10 @@
             <a:prstDash val="solid"/>
           </a:ln>
         </p:spPr>
+        <p:txBody>
+          <a:bodyPr/>
+          <a:p/>
+        </p:txBody>
       </p:sp>
       <p:sp>
         <p:nvSpPr>
@@ -12041,7 +12567,7 @@
               <a:buNone/>
             </a:pPr>
             <a:r>
-              <a:rPr lang="nb-NO" sz="2200" b="1">
+              <a:rPr lang="en-US" sz="2200" b="1">
                 <a:solidFill>
                   <a:srgbClr val="1976D2"/>
                 </a:solidFill>
@@ -12049,7 +12575,7 @@
                 <a:ea typeface="Calibri"/>
                 <a:cs typeface="Calibri"/>
               </a:rPr>
-              <a:t>Bukti 7 | Challenge 10 PASS</a:t>
+              <a:t>Bukti 6 | Benchmark 15 query aktual</a:t>
             </a:r>
             <a:endParaRPr sz="2200"/>
           </a:p>
@@ -12095,7 +12621,7 @@
                 <a:ea typeface="Calibri"/>
                 <a:cs typeface="Calibri"/>
               </a:rPr>
-              <a:t>Output uji end-to-end aktual setelah server dan DB siap</a:t>
+              <a:t>Tiga pertanyaan × lima pengulangan pada mesin uji lokal</a:t>
             </a:r>
             <a:endParaRPr sz="1200"/>
           </a:p>
@@ -12133,6 +12659,10 @@
             <a:prstDash val="solid"/>
           </a:ln>
         </p:spPr>
+        <p:txBody>
+          <a:bodyPr/>
+          <a:p/>
+        </p:txBody>
       </p:sp>
       <p:sp>
         <p:nvSpPr>
@@ -12236,7 +12766,7 @@
               <a:buNone/>
             </a:pPr>
             <a:r>
-              <a:rPr lang="fi-FI" sz="1400">
+              <a:rPr lang="en-US" sz="1400">
                 <a:solidFill>
                   <a:srgbClr val="312124"/>
                 </a:solidFill>
@@ -12244,7 +12774,7 @@
                 <a:ea typeface="Calibri"/>
                 <a:cs typeface="Calibri"/>
               </a:rPr>
-              <a:t>Jalankan tes dari root repo.</a:t>
+              <a:t>benchmark.py --repeat 5 berjalan.</a:t>
             </a:r>
             <a:endParaRPr sz="1400">
               <a:solidFill>
@@ -12319,7 +12849,7 @@
                 <a:ea typeface="Calibri"/>
                 <a:cs typeface="Calibri"/>
               </a:rPr>
-              <a:t>Tes memeriksa fungsi dan HTTP.</a:t>
+              <a:t>15 sampel, masing-masing tiga sumber.</a:t>
             </a:r>
             <a:endParaRPr sz="1400">
               <a:solidFill>
@@ -12394,7 +12924,7 @@
                 <a:ea typeface="Calibri"/>
                 <a:cs typeface="Calibri"/>
               </a:rPr>
-              <a:t>Liveness dan readiness berbeda.</a:t>
+              <a:t>p50 = 61.51 ms pada mesin uji.</a:t>
             </a:r>
             <a:endParaRPr sz="1400">
               <a:solidFill>
@@ -12469,7 +12999,7 @@
                 <a:ea typeface="Calibri"/>
                 <a:cs typeface="Calibri"/>
               </a:rPr>
-              <a:t>Referensi sumber dapat dilacak.</a:t>
+              <a:t>p95 = 189.26 ms pada mesin uji.</a:t>
             </a:r>
             <a:endParaRPr sz="1400">
               <a:solidFill>
@@ -12544,7 +13074,7 @@
                 <a:ea typeface="Calibri"/>
                 <a:cs typeface="Calibri"/>
               </a:rPr>
-              <a:t>Input top_k=0 ditolak 422.</a:t>
+              <a:t>Latensi berubah menurut mesin/beban.</a:t>
             </a:r>
             <a:endParaRPr sz="1400">
               <a:solidFill>
@@ -12619,7 +13149,7 @@
                 <a:ea typeface="Calibri"/>
                 <a:cs typeface="Calibri"/>
               </a:rPr>
-              <a:t>Mode default tidak memanggil API bayar.</a:t>
+              <a:t>JSONL menyimpan tiap respons.</a:t>
             </a:r>
             <a:endParaRPr sz="1400">
               <a:solidFill>
@@ -12694,7 +13224,7 @@
                 <a:ea typeface="Calibri"/>
                 <a:cs typeface="Calibri"/>
               </a:rPr>
-              <a:t>Semua 10 PASS, 0 FAIL.</a:t>
+              <a:t>Mode hash belum biaya API LLM.</a:t>
             </a:r>
             <a:endParaRPr sz="1400">
               <a:solidFill>
@@ -12737,6 +13267,10 @@
             <a:prstDash val="solid"/>
           </a:ln>
         </p:spPr>
+        <p:txBody>
+          <a:bodyPr/>
+          <a:p/>
+        </p:txBody>
       </p:sp>
       <p:sp>
         <p:nvSpPr>
@@ -12854,6 +13388,10 @@
             <a:prstDash val="solid"/>
           </a:ln>
         </p:spPr>
+        <p:txBody>
+          <a:bodyPr/>
+          <a:p/>
+        </p:txBody>
       </p:sp>
       <p:sp>
         <p:nvSpPr>
@@ -12895,7 +13433,7 @@
                 <a:ea typeface="Calibri"/>
                 <a:cs typeface="Calibri"/>
               </a:rPr>
-              <a:t>Challenge lengkap: 10 PASS, 0 FAIL.</a:t>
+              <a:t>15 sampel; p50 61.51 ms; p95 189.26 ms.</a:t>
             </a:r>
             <a:endParaRPr sz="1500">
               <a:solidFill>
@@ -12911,7 +13449,7 @@
           <p:cNvPr id="6" name="Picture 5">
             <a:extLst>
               <a:ext uri="{FF2B5EF4-FFF2-40B4-BE49-F238E27FC236}">
-                <a16:creationId xmlns:a16="http://schemas.microsoft.com/office/drawing/2014/main" id="{1EDDB1C5-FF78-49D8-68FA-06D40BEA89A8}"/>
+                <a16:creationId xmlns:a16="http://schemas.microsoft.com/office/drawing/2014/main" id="{623279D3-6F9A-27F1-0A03-E9CB5EA2202F}"/>
               </a:ext>
             </a:extLst>
           </p:cNvPr>
@@ -12934,8 +13472,8 @@
         </p:blipFill>
         <p:spPr>
           <a:xfrm>
-            <a:off x="6419088" y="2696936"/>
-            <a:ext cx="5084064" cy="1811600"/>
+            <a:off x="6419088" y="2388031"/>
+            <a:ext cx="5084064" cy="2429410"/>
           </a:xfrm>
           <a:prstGeom prst="rect">
             <a:avLst/>
@@ -12945,7 +13483,7 @@
     </p:spTree>
     <p:extLst>
       <p:ext uri="{BB962C8B-B14F-4D97-AF65-F5344CB8AC3E}">
-        <p14:creationId xmlns:p14="http://schemas.microsoft.com/office/powerpoint/2010/main" val="583695354"/>
+        <p14:creationId xmlns:p14="http://schemas.microsoft.com/office/powerpoint/2010/main" val="253219963"/>
       </p:ext>
     </p:extLst>
   </p:cSld>
@@ -13104,6 +13642,10 @@
             <a:prstDash val="solid"/>
           </a:ln>
         </p:spPr>
+        <p:txBody>
+          <a:bodyPr/>
+          <a:p/>
+        </p:txBody>
       </p:sp>
       <p:pic>
         <p:nvPicPr>
@@ -13183,6 +13725,10 @@
             <a:prstDash val="solid"/>
           </a:ln>
         </p:spPr>
+        <p:txBody>
+          <a:bodyPr/>
+          <a:p/>
+        </p:txBody>
       </p:sp>
       <p:sp>
         <p:nvSpPr>
@@ -13308,6 +13854,10 @@
             <a:prstDash val="solid"/>
           </a:ln>
         </p:spPr>
+        <p:txBody>
+          <a:bodyPr/>
+          <a:p/>
+        </p:txBody>
       </p:sp>
       <p:sp>
         <p:nvSpPr>
@@ -13906,6 +14456,10 @@
             <a:prstDash val="solid"/>
           </a:ln>
         </p:spPr>
+        <p:txBody>
+          <a:bodyPr/>
+          <a:p/>
+        </p:txBody>
       </p:sp>
       <p:sp>
         <p:nvSpPr>
@@ -14120,6 +14674,10 @@
             <a:prstDash val="solid"/>
           </a:ln>
         </p:spPr>
+        <p:txBody>
+          <a:bodyPr/>
+          <a:p/>
+        </p:txBody>
       </p:sp>
       <p:sp>
         <p:nvSpPr>
@@ -14329,6 +14887,10 @@
             <a:prstDash val="solid"/>
           </a:ln>
         </p:spPr>
+        <p:txBody>
+          <a:bodyPr/>
+          <a:p/>
+        </p:txBody>
       </p:sp>
       <p:pic>
         <p:nvPicPr>
@@ -14408,6 +14970,10 @@
             <a:prstDash val="solid"/>
           </a:ln>
         </p:spPr>
+        <p:txBody>
+          <a:bodyPr/>
+          <a:p/>
+        </p:txBody>
       </p:sp>
       <p:sp>
         <p:nvSpPr>
@@ -14441,7 +15007,7 @@
               <a:buNone/>
             </a:pPr>
             <a:r>
-              <a:rPr lang="nl-NL" sz="2200" b="1">
+              <a:rPr lang="en-US" sz="2200" b="1">
                 <a:solidFill>
                   <a:srgbClr val="1976D2"/>
                 </a:solidFill>
@@ -14449,7 +15015,7 @@
                 <a:ea typeface="Calibri"/>
                 <a:cs typeface="Calibri"/>
               </a:rPr>
-              <a:t>9 | Git aman dan jalur cloud</a:t>
+              <a:t>8 | Kunci challenge 10 cek RAG</a:t>
             </a:r>
             <a:endParaRPr sz="2200"/>
           </a:p>
@@ -14487,7 +15053,7 @@
               <a:buNone/>
             </a:pPr>
             <a:r>
-              <a:rPr lang="en-US" sz="1200" i="1">
+              <a:rPr lang="sv-SE" sz="1200" i="1">
                 <a:solidFill>
                   <a:srgbClr val="64748B"/>
                 </a:solidFill>
@@ -14495,7 +15061,7 @@
                 <a:ea typeface="Calibri"/>
                 <a:cs typeface="Calibri"/>
               </a:rPr>
-              <a:t>Sumber dan SQL boleh dipush; credential dan benchmark lokal tidak</a:t>
+              <a:t>Jalankan ketika Compose, ingest, dan Uvicorn masih hidup</a:t>
             </a:r>
             <a:endParaRPr sz="1200"/>
           </a:p>
@@ -14533,6 +15099,10 @@
             <a:prstDash val="solid"/>
           </a:ln>
         </p:spPr>
+        <p:txBody>
+          <a:bodyPr/>
+          <a:p/>
+        </p:txBody>
       </p:sp>
       <p:sp>
         <p:nvSpPr>
@@ -14566,6 +15136,10 @@
             <a:prstDash val="solid"/>
           </a:ln>
         </p:spPr>
+        <p:txBody>
+          <a:bodyPr/>
+          <a:p/>
+        </p:txBody>
       </p:sp>
       <p:sp>
         <p:nvSpPr>
@@ -14599,6 +15173,10 @@
             <a:prstDash val="solid"/>
           </a:ln>
         </p:spPr>
+        <p:txBody>
+          <a:bodyPr/>
+          <a:p/>
+        </p:txBody>
       </p:sp>
       <p:sp>
         <p:nvSpPr>
@@ -14632,6 +15210,10 @@
             <a:prstDash val="solid"/>
           </a:ln>
         </p:spPr>
+        <p:txBody>
+          <a:bodyPr/>
+          <a:p/>
+        </p:txBody>
       </p:sp>
       <p:sp>
         <p:nvSpPr>
@@ -14665,6 +15247,2144 @@
             <a:prstDash val="solid"/>
           </a:ln>
         </p:spPr>
+        <p:txBody>
+          <a:bodyPr/>
+          <a:p/>
+        </p:txBody>
+      </p:sp>
+      <p:sp>
+        <p:nvSpPr>
+          <p:cNvPr id="15" name="Text 11">
+            <a:extLst>
+              <a:ext uri="{FF2B5EF4-FFF2-40B4-BE49-F238E27FC236}">
+                <a16:creationId xmlns:a16="http://schemas.microsoft.com/office/drawing/2014/main" id="{5F8F799B-4840-4D3C-92EE-5F455663B5BB}"/>
+              </a:ext>
+            </a:extLst>
+          </p:cNvPr>
+          <p:cNvSpPr>
+            <a:spLocks noGrp="1"/>
+          </p:cNvSpPr>
+          <p:nvPr/>
+        </p:nvSpPr>
+        <p:spPr>
+          <a:xfrm>
+            <a:off x="1005840" y="1417320"/>
+            <a:ext cx="4846320" cy="274320"/>
+          </a:xfrm>
+          <a:prstGeom prst="rect">
+            <a:avLst/>
+          </a:prstGeom>
+          <a:noFill/>
+        </p:spPr>
+        <p:txBody>
+          <a:bodyPr wrap="square" lIns="0" tIns="0" rIns="0" bIns="0" anchor="ctr"/>
+          <a:lstStyle/>
+          <a:p>
+            <a:pPr marL="0" indent="0" algn="ctr">
+              <a:buNone/>
+            </a:pPr>
+            <a:r>
+              <a:rPr lang="en-US" sz="900">
+                <a:solidFill>
+                  <a:srgbClr val="94A3B8"/>
+                </a:solidFill>
+                <a:latin typeface="Consolas"/>
+                <a:ea typeface="Consolas"/>
+                <a:cs typeface="Consolas"/>
+              </a:rPr>
+              <a:t>Perintah</a:t>
+            </a:r>
+            <a:endParaRPr sz="900"/>
+          </a:p>
+        </p:txBody>
+      </p:sp>
+      <p:sp>
+        <p:nvSpPr>
+          <p:cNvPr id="16" name="Text 12">
+            <a:extLst>
+              <a:ext uri="{FF2B5EF4-FFF2-40B4-BE49-F238E27FC236}">
+                <a16:creationId xmlns:a16="http://schemas.microsoft.com/office/drawing/2014/main" id="{513750E3-5216-4832-B866-430374D15F24}"/>
+              </a:ext>
+            </a:extLst>
+          </p:cNvPr>
+          <p:cNvSpPr>
+            <a:spLocks noGrp="1"/>
+          </p:cNvSpPr>
+          <p:nvPr/>
+        </p:nvSpPr>
+        <p:spPr>
+          <a:xfrm>
+            <a:off x="594360" y="1783080"/>
+            <a:ext cx="5303520" cy="4297680"/>
+          </a:xfrm>
+          <a:prstGeom prst="rect">
+            <a:avLst/>
+          </a:prstGeom>
+          <a:noFill/>
+        </p:spPr>
+        <p:txBody>
+          <a:bodyPr wrap="none" lIns="0" tIns="0" rIns="0" bIns="0" anchor="t">
+            <a:noAutofit/>
+          </a:bodyPr>
+          <a:lstStyle/>
+          <a:p>
+            <a:pPr marL="0" indent="0" algn="l">
+              <a:spcAft>
+                <a:spcPts val="200"/>
+              </a:spcAft>
+              <a:buNone/>
+              <a:defRPr sz="1050">
+                <a:solidFill>
+                  <a:srgbClr val="DDEAF7"/>
+                </a:solidFill>
+                <a:latin typeface="Consolas"/>
+                <a:ea typeface="Consolas"/>
+                <a:cs typeface="Consolas"/>
+              </a:defRPr>
+            </a:pPr>
+            <a:r>
+              <a:rPr lang="en-US" sz="1500">
+                <a:solidFill>
+                  <a:srgbClr val="FFFFFF"/>
+                </a:solidFill>
+                <a:latin typeface="Consolas" panose="020B0609020204030204" pitchFamily="49" charset="0"/>
+                <a:ea typeface="Consolas"/>
+                <a:cs typeface="Consolas"/>
+              </a:rPr>
+              <a:t>.\.venv\Scripts\python -B `
+  tests\challenge.py
+# Target: challenge: 10 PASS, 0 FAIL.</a:t>
+            </a:r>
+            <a:endParaRPr sz="1500">
+              <a:solidFill>
+                <a:srgbClr val="FFFFFF"/>
+              </a:solidFill>
+              <a:latin typeface="Consolas" panose="020B0609020204030204" pitchFamily="49" charset="0"/>
+            </a:endParaRPr>
+          </a:p>
+        </p:txBody>
+      </p:sp>
+      <p:sp>
+        <p:nvSpPr>
+          <p:cNvPr id="17" name="Shape 13">
+            <a:extLst>
+              <a:ext uri="{FF2B5EF4-FFF2-40B4-BE49-F238E27FC236}">
+                <a16:creationId xmlns:a16="http://schemas.microsoft.com/office/drawing/2014/main" id="{141079E7-6267-430B-91AC-297B6D68EED3}"/>
+              </a:ext>
+            </a:extLst>
+          </p:cNvPr>
+          <p:cNvSpPr>
+            <a:spLocks noGrp="1"/>
+          </p:cNvSpPr>
+          <p:nvPr/>
+        </p:nvSpPr>
+        <p:spPr>
+          <a:xfrm>
+            <a:off x="6217920" y="1417320"/>
+            <a:ext cx="5486400" cy="4754880"/>
+          </a:xfrm>
+          <a:prstGeom prst="rect">
+            <a:avLst/>
+          </a:prstGeom>
+          <a:solidFill>
+            <a:srgbClr val="1E293B"/>
+          </a:solidFill>
+          <a:ln w="12700">
+            <a:solidFill>
+              <a:srgbClr val="0F172A"/>
+            </a:solidFill>
+            <a:prstDash val="solid"/>
+          </a:ln>
+        </p:spPr>
+        <p:txBody>
+          <a:bodyPr/>
+          <a:p/>
+        </p:txBody>
+      </p:sp>
+      <p:sp>
+        <p:nvSpPr>
+          <p:cNvPr id="18" name="Shape 14">
+            <a:extLst>
+              <a:ext uri="{FF2B5EF4-FFF2-40B4-BE49-F238E27FC236}">
+                <a16:creationId xmlns:a16="http://schemas.microsoft.com/office/drawing/2014/main" id="{53EC92CF-DEE8-49D4-97A3-416C041F2A76}"/>
+              </a:ext>
+            </a:extLst>
+          </p:cNvPr>
+          <p:cNvSpPr>
+            <a:spLocks noGrp="1"/>
+          </p:cNvSpPr>
+          <p:nvPr/>
+        </p:nvSpPr>
+        <p:spPr>
+          <a:xfrm>
+            <a:off x="6217920" y="1417320"/>
+            <a:ext cx="5486400" cy="274320"/>
+          </a:xfrm>
+          <a:prstGeom prst="rect">
+            <a:avLst/>
+          </a:prstGeom>
+          <a:solidFill>
+            <a:srgbClr val="0F172A"/>
+          </a:solidFill>
+          <a:ln w="12700">
+            <a:solidFill>
+              <a:srgbClr val="0F172A"/>
+            </a:solidFill>
+            <a:prstDash val="solid"/>
+          </a:ln>
+        </p:spPr>
+        <p:txBody>
+          <a:bodyPr/>
+          <a:p/>
+        </p:txBody>
+      </p:sp>
+      <p:sp>
+        <p:nvSpPr>
+          <p:cNvPr id="19" name="Shape 15">
+            <a:extLst>
+              <a:ext uri="{FF2B5EF4-FFF2-40B4-BE49-F238E27FC236}">
+                <a16:creationId xmlns:a16="http://schemas.microsoft.com/office/drawing/2014/main" id="{F12772E3-51C4-4C3E-892A-C77B19318F97}"/>
+              </a:ext>
+            </a:extLst>
+          </p:cNvPr>
+          <p:cNvSpPr>
+            <a:spLocks noGrp="1"/>
+          </p:cNvSpPr>
+          <p:nvPr/>
+        </p:nvSpPr>
+        <p:spPr>
+          <a:xfrm>
+            <a:off x="6309360" y="1499616"/>
+            <a:ext cx="109728" cy="109728"/>
+          </a:xfrm>
+          <a:prstGeom prst="ellipse">
+            <a:avLst/>
+          </a:prstGeom>
+          <a:solidFill>
+            <a:srgbClr val="EF4444"/>
+          </a:solidFill>
+          <a:ln w="12700">
+            <a:solidFill>
+              <a:srgbClr val="EF4444"/>
+            </a:solidFill>
+            <a:prstDash val="solid"/>
+          </a:ln>
+        </p:spPr>
+        <p:txBody>
+          <a:bodyPr/>
+          <a:p/>
+        </p:txBody>
+      </p:sp>
+      <p:sp>
+        <p:nvSpPr>
+          <p:cNvPr id="20" name="Shape 16">
+            <a:extLst>
+              <a:ext uri="{FF2B5EF4-FFF2-40B4-BE49-F238E27FC236}">
+                <a16:creationId xmlns:a16="http://schemas.microsoft.com/office/drawing/2014/main" id="{401E9D7D-9E1E-4A69-A3D3-F597DA3AFFA5}"/>
+              </a:ext>
+            </a:extLst>
+          </p:cNvPr>
+          <p:cNvSpPr>
+            <a:spLocks noGrp="1"/>
+          </p:cNvSpPr>
+          <p:nvPr/>
+        </p:nvSpPr>
+        <p:spPr>
+          <a:xfrm>
+            <a:off x="6446520" y="1499616"/>
+            <a:ext cx="109728" cy="109728"/>
+          </a:xfrm>
+          <a:prstGeom prst="ellipse">
+            <a:avLst/>
+          </a:prstGeom>
+          <a:solidFill>
+            <a:srgbClr val="F59E0B"/>
+          </a:solidFill>
+          <a:ln w="12700">
+            <a:solidFill>
+              <a:srgbClr val="F59E0B"/>
+            </a:solidFill>
+            <a:prstDash val="solid"/>
+          </a:ln>
+        </p:spPr>
+        <p:txBody>
+          <a:bodyPr/>
+          <a:p/>
+        </p:txBody>
+      </p:sp>
+      <p:sp>
+        <p:nvSpPr>
+          <p:cNvPr id="21" name="Shape 17">
+            <a:extLst>
+              <a:ext uri="{FF2B5EF4-FFF2-40B4-BE49-F238E27FC236}">
+                <a16:creationId xmlns:a16="http://schemas.microsoft.com/office/drawing/2014/main" id="{7A22D841-0221-436E-B321-0918C7B414B3}"/>
+              </a:ext>
+            </a:extLst>
+          </p:cNvPr>
+          <p:cNvSpPr>
+            <a:spLocks noGrp="1"/>
+          </p:cNvSpPr>
+          <p:nvPr/>
+        </p:nvSpPr>
+        <p:spPr>
+          <a:xfrm>
+            <a:off x="6583680" y="1499616"/>
+            <a:ext cx="109728" cy="109728"/>
+          </a:xfrm>
+          <a:prstGeom prst="ellipse">
+            <a:avLst/>
+          </a:prstGeom>
+          <a:solidFill>
+            <a:srgbClr val="10B981"/>
+          </a:solidFill>
+          <a:ln w="12700">
+            <a:solidFill>
+              <a:srgbClr val="10B981"/>
+            </a:solidFill>
+            <a:prstDash val="solid"/>
+          </a:ln>
+        </p:spPr>
+        <p:txBody>
+          <a:bodyPr/>
+          <a:p/>
+        </p:txBody>
+      </p:sp>
+      <p:sp>
+        <p:nvSpPr>
+          <p:cNvPr id="22" name="Text 18">
+            <a:extLst>
+              <a:ext uri="{FF2B5EF4-FFF2-40B4-BE49-F238E27FC236}">
+                <a16:creationId xmlns:a16="http://schemas.microsoft.com/office/drawing/2014/main" id="{F400FF3A-1B61-42A2-A9F9-3D8F8900FEC1}"/>
+              </a:ext>
+            </a:extLst>
+          </p:cNvPr>
+          <p:cNvSpPr>
+            <a:spLocks noGrp="1"/>
+          </p:cNvSpPr>
+          <p:nvPr/>
+        </p:nvSpPr>
+        <p:spPr>
+          <a:xfrm>
+            <a:off x="6766560" y="1417320"/>
+            <a:ext cx="4754880" cy="274320"/>
+          </a:xfrm>
+          <a:prstGeom prst="rect">
+            <a:avLst/>
+          </a:prstGeom>
+          <a:noFill/>
+        </p:spPr>
+        <p:txBody>
+          <a:bodyPr wrap="square" lIns="0" tIns="0" rIns="0" bIns="0" anchor="ctr"/>
+          <a:lstStyle/>
+          <a:p>
+            <a:pPr marL="0" indent="0" algn="ctr">
+              <a:buNone/>
+            </a:pPr>
+            <a:r>
+              <a:rPr lang="en-US" sz="900">
+                <a:solidFill>
+                  <a:srgbClr val="94A3B8"/>
+                </a:solidFill>
+                <a:latin typeface="Consolas"/>
+                <a:ea typeface="Consolas"/>
+                <a:cs typeface="Consolas"/>
+              </a:rPr>
+              <a:t>Cakupan checker</a:t>
+            </a:r>
+            <a:endParaRPr sz="900"/>
+          </a:p>
+        </p:txBody>
+      </p:sp>
+      <p:sp>
+        <p:nvSpPr>
+          <p:cNvPr id="23" name="Text 19">
+            <a:extLst>
+              <a:ext uri="{FF2B5EF4-FFF2-40B4-BE49-F238E27FC236}">
+                <a16:creationId xmlns:a16="http://schemas.microsoft.com/office/drawing/2014/main" id="{52571E5C-DFB6-4F51-8889-82CA8AFE6D3A}"/>
+              </a:ext>
+            </a:extLst>
+          </p:cNvPr>
+          <p:cNvSpPr>
+            <a:spLocks noGrp="1"/>
+          </p:cNvSpPr>
+          <p:nvPr/>
+        </p:nvSpPr>
+        <p:spPr>
+          <a:xfrm>
+            <a:off x="6355080" y="1783080"/>
+            <a:ext cx="5212080" cy="4297680"/>
+          </a:xfrm>
+          <a:prstGeom prst="rect">
+            <a:avLst/>
+          </a:prstGeom>
+          <a:noFill/>
+        </p:spPr>
+        <p:txBody>
+          <a:bodyPr wrap="none" lIns="0" tIns="0" rIns="0" bIns="0" anchor="t">
+            <a:noAutofit/>
+          </a:bodyPr>
+          <a:lstStyle/>
+          <a:p>
+            <a:pPr marL="0" indent="0" algn="l">
+              <a:spcAft>
+                <a:spcPts val="200"/>
+              </a:spcAft>
+              <a:buNone/>
+              <a:defRPr sz="1050">
+                <a:solidFill>
+                  <a:srgbClr val="DDEAF7"/>
+                </a:solidFill>
+                <a:latin typeface="Consolas"/>
+                <a:ea typeface="Consolas"/>
+                <a:cs typeface="Consolas"/>
+              </a:defRPr>
+            </a:pPr>
+            <a:r>
+              <a:rPr lang="en-US" sz="1600">
+                <a:solidFill>
+                  <a:srgbClr val="FFFFFF"/>
+                </a:solidFill>
+                <a:latin typeface="Aptos" panose="020B0004020202020204" pitchFamily="34" charset="0"/>
+                <a:ea typeface="Consolas"/>
+                <a:cs typeface="Consolas"/>
+              </a:rPr>
+              <a:t>384 dimensi dan chunk valid.
+p95 nearest-rank konsisten.
+/health dan /ready 200.
+Ask memberi jawaban + sumber.
+top_k=0 ditolak HTTP 422.
+Ekstraktif memakai sitasi [S1].</a:t>
+            </a:r>
+            <a:endParaRPr sz="1600">
+              <a:solidFill>
+                <a:srgbClr val="FFFFFF"/>
+              </a:solidFill>
+              <a:latin typeface="Aptos" panose="020B0004020202020204" pitchFamily="34" charset="0"/>
+            </a:endParaRPr>
+          </a:p>
+        </p:txBody>
+      </p:sp>
+    </p:spTree>
+    <p:extLst>
+      <p:ext uri="{BB962C8B-B14F-4D97-AF65-F5344CB8AC3E}">
+        <p14:creationId xmlns:p14="http://schemas.microsoft.com/office/powerpoint/2010/main" val="4120040058"/>
+      </p:ext>
+    </p:extLst>
+  </p:cSld>
+  <p:clrMapOvr>
+    <a:masterClrMapping/>
+  </p:clrMapOvr>
+</p:sld>
+</file>
+
+<file path=ppt/slides/slide21.xml><?xml version="1.0" encoding="utf-8"?>
+<p:sld xmlns:a="http://schemas.openxmlformats.org/drawingml/2006/main" xmlns:r="http://schemas.openxmlformats.org/officeDocument/2006/relationships" xmlns:p="http://schemas.openxmlformats.org/presentationml/2006/main">
+  <p:cSld>
+    <p:bg>
+      <p:bgPr>
+        <a:solidFill>
+          <a:srgbClr val="FFFFFF"/>
+        </a:solidFill>
+        <a:effectLst/>
+      </p:bgPr>
+    </p:bg>
+    <p:spTree>
+      <p:nvGrpSpPr>
+        <p:cNvPr id="1" name=""/>
+        <p:cNvGrpSpPr/>
+        <p:nvPr/>
+      </p:nvGrpSpPr>
+      <p:grpSpPr>
+        <a:xfrm>
+          <a:off x="0" y="0"/>
+          <a:ext cx="0" cy="0"/>
+          <a:chOff x="0" y="0"/>
+          <a:chExt cx="0" cy="0"/>
+        </a:xfrm>
+      </p:grpSpPr>
+      <p:sp>
+        <p:nvSpPr>
+          <p:cNvPr id="2" name="Text 0">
+            <a:extLst>
+              <a:ext uri="{FF2B5EF4-FFF2-40B4-BE49-F238E27FC236}">
+                <a16:creationId xmlns:a16="http://schemas.microsoft.com/office/drawing/2014/main" id="{F779FF6B-910B-4E58-955B-7B6FE29829C1}"/>
+              </a:ext>
+            </a:extLst>
+          </p:cNvPr>
+          <p:cNvSpPr>
+            <a:spLocks noGrp="1"/>
+          </p:cNvSpPr>
+          <p:nvPr/>
+        </p:nvSpPr>
+        <p:spPr>
+          <a:xfrm>
+            <a:off x="457200" y="6492240"/>
+            <a:ext cx="7315200" cy="274320"/>
+          </a:xfrm>
+          <a:prstGeom prst="rect">
+            <a:avLst/>
+          </a:prstGeom>
+          <a:noFill/>
+        </p:spPr>
+        <p:txBody>
+          <a:bodyPr wrap="square" lIns="0" tIns="0" rIns="0" bIns="0" anchor="ctr"/>
+          <a:lstStyle/>
+          <a:p>
+            <a:pPr marL="0" indent="0" algn="l">
+              <a:buNone/>
+            </a:pPr>
+            <a:r>
+              <a:rPr sz="900">
+                <a:solidFill>
+                  <a:srgbClr val="64748B"/>
+                </a:solidFill>
+                <a:latin typeface="Calibri"/>
+                <a:ea typeface="Calibri"/>
+                <a:cs typeface="Calibri"/>
+              </a:rPr>
+              <a:t>BINUS UNIVERSITY  |  Cloud Services  |  Praktikum 11</a:t>
+            </a:r>
+            <a:endParaRPr sz="900"/>
+          </a:p>
+        </p:txBody>
+      </p:sp>
+      <p:sp>
+        <p:nvSpPr>
+          <p:cNvPr id="3" name="Text 1">
+            <a:extLst>
+              <a:ext uri="{FF2B5EF4-FFF2-40B4-BE49-F238E27FC236}">
+                <a16:creationId xmlns:a16="http://schemas.microsoft.com/office/drawing/2014/main" id="{3352C906-5F0A-42A0-94F0-9170DC749E53}"/>
+              </a:ext>
+            </a:extLst>
+          </p:cNvPr>
+          <p:cNvSpPr>
+            <a:spLocks noGrp="1"/>
+          </p:cNvSpPr>
+          <p:nvPr/>
+        </p:nvSpPr>
+        <p:spPr>
+          <a:xfrm>
+            <a:off x="11247120" y="6492240"/>
+            <a:ext cx="457200" cy="274320"/>
+          </a:xfrm>
+          <a:prstGeom prst="rect">
+            <a:avLst/>
+          </a:prstGeom>
+          <a:noFill/>
+        </p:spPr>
+        <p:txBody>
+          <a:bodyPr wrap="square" lIns="0" tIns="0" rIns="0" bIns="0" anchor="ctr"/>
+          <a:lstStyle/>
+          <a:p>
+            <a:pPr marL="0" indent="0" algn="r">
+              <a:buNone/>
+            </a:pPr>
+            <a:r>
+              <a:rPr lang="en-US" sz="900" b="1">
+                <a:solidFill>
+                  <a:srgbClr val="64748B"/>
+                </a:solidFill>
+                <a:latin typeface="Calibri"/>
+                <a:ea typeface="Calibri"/>
+                <a:cs typeface="Calibri"/>
+              </a:rPr>
+              <a:t>21</a:t>
+            </a:r>
+            <a:endParaRPr sz="900"/>
+          </a:p>
+        </p:txBody>
+      </p:sp>
+      <p:sp>
+        <p:nvSpPr>
+          <p:cNvPr id="4" name="Shape 2">
+            <a:extLst>
+              <a:ext uri="{FF2B5EF4-FFF2-40B4-BE49-F238E27FC236}">
+                <a16:creationId xmlns:a16="http://schemas.microsoft.com/office/drawing/2014/main" id="{BAEEB222-C692-4EAC-956E-AC234E3B4E07}"/>
+              </a:ext>
+            </a:extLst>
+          </p:cNvPr>
+          <p:cNvSpPr>
+            <a:spLocks noGrp="1"/>
+          </p:cNvSpPr>
+          <p:nvPr/>
+        </p:nvSpPr>
+        <p:spPr>
+          <a:xfrm>
+            <a:off x="457200" y="6446520"/>
+            <a:ext cx="228600" cy="36576"/>
+          </a:xfrm>
+          <a:prstGeom prst="rect">
+            <a:avLst/>
+          </a:prstGeom>
+          <a:solidFill>
+            <a:srgbClr val="F37021"/>
+          </a:solidFill>
+          <a:ln w="12700">
+            <a:solidFill>
+              <a:srgbClr val="F37021"/>
+            </a:solidFill>
+            <a:prstDash val="solid"/>
+          </a:ln>
+        </p:spPr>
+        <p:txBody>
+          <a:bodyPr/>
+          <a:p/>
+        </p:txBody>
+      </p:sp>
+      <p:pic>
+        <p:nvPicPr>
+          <p:cNvPr id="43" name="Image 0"/>
+          <p:cNvPicPr>
+            <a:picLocks noChangeAspect="1"/>
+          </p:cNvPicPr>
+          <p:nvPr/>
+        </p:nvPicPr>
+        <p:blipFill>
+          <a:blip r:embed="rId3"/>
+          <a:stretch>
+            <a:fillRect/>
+          </a:stretch>
+        </p:blipFill>
+        <p:spPr>
+          <a:xfrm>
+            <a:off x="274320" y="164592"/>
+            <a:ext cx="914400" cy="603504"/>
+          </a:xfrm>
+          <a:prstGeom prst="rect">
+            <a:avLst/>
+          </a:prstGeom>
+        </p:spPr>
+      </p:pic>
+      <p:pic>
+        <p:nvPicPr>
+          <p:cNvPr id="44" name="Image 1"/>
+          <p:cNvPicPr>
+            <a:picLocks noChangeAspect="1"/>
+          </p:cNvPicPr>
+          <p:nvPr/>
+        </p:nvPicPr>
+        <p:blipFill>
+          <a:blip r:embed="rId4"/>
+          <a:stretch>
+            <a:fillRect/>
+          </a:stretch>
+        </p:blipFill>
+        <p:spPr>
+          <a:xfrm>
+            <a:off x="10881360" y="182880"/>
+            <a:ext cx="1005840" cy="512064"/>
+          </a:xfrm>
+          <a:prstGeom prst="rect">
+            <a:avLst/>
+          </a:prstGeom>
+        </p:spPr>
+      </p:pic>
+      <p:sp>
+        <p:nvSpPr>
+          <p:cNvPr id="7" name="Shape 3">
+            <a:extLst>
+              <a:ext uri="{FF2B5EF4-FFF2-40B4-BE49-F238E27FC236}">
+                <a16:creationId xmlns:a16="http://schemas.microsoft.com/office/drawing/2014/main" id="{0BB8DDD6-8220-4D71-BBC2-85CF025DF430}"/>
+              </a:ext>
+            </a:extLst>
+          </p:cNvPr>
+          <p:cNvSpPr>
+            <a:spLocks noGrp="1"/>
+          </p:cNvSpPr>
+          <p:nvPr/>
+        </p:nvSpPr>
+        <p:spPr>
+          <a:xfrm>
+            <a:off x="457200" y="868680"/>
+            <a:ext cx="11247120" cy="0"/>
+          </a:xfrm>
+          <a:prstGeom prst="line">
+            <a:avLst/>
+          </a:prstGeom>
+          <a:noFill/>
+          <a:ln w="12700">
+            <a:solidFill>
+              <a:srgbClr val="E2E8F0"/>
+            </a:solidFill>
+            <a:prstDash val="solid"/>
+          </a:ln>
+        </p:spPr>
+        <p:txBody>
+          <a:bodyPr/>
+          <a:p/>
+        </p:txBody>
+      </p:sp>
+      <p:sp>
+        <p:nvSpPr>
+          <p:cNvPr id="8" name="Text 4">
+            <a:extLst>
+              <a:ext uri="{FF2B5EF4-FFF2-40B4-BE49-F238E27FC236}">
+                <a16:creationId xmlns:a16="http://schemas.microsoft.com/office/drawing/2014/main" id="{2465D56B-C6C4-41CD-9002-401D1A37B4F9}"/>
+              </a:ext>
+            </a:extLst>
+          </p:cNvPr>
+          <p:cNvSpPr>
+            <a:spLocks noGrp="1"/>
+          </p:cNvSpPr>
+          <p:nvPr/>
+        </p:nvSpPr>
+        <p:spPr>
+          <a:xfrm>
+            <a:off x="2011680" y="182880"/>
+            <a:ext cx="8138160" cy="502920"/>
+          </a:xfrm>
+          <a:prstGeom prst="rect">
+            <a:avLst/>
+          </a:prstGeom>
+          <a:noFill/>
+        </p:spPr>
+        <p:txBody>
+          <a:bodyPr wrap="square" lIns="0" tIns="0" rIns="0" bIns="0" anchor="ctr"/>
+          <a:lstStyle/>
+          <a:p>
+            <a:pPr marL="0" indent="0" algn="ctr">
+              <a:buNone/>
+            </a:pPr>
+            <a:r>
+              <a:rPr lang="nb-NO" sz="2200" b="1">
+                <a:solidFill>
+                  <a:srgbClr val="1976D2"/>
+                </a:solidFill>
+                <a:latin typeface="Calibri"/>
+                <a:ea typeface="Calibri"/>
+                <a:cs typeface="Calibri"/>
+              </a:rPr>
+              <a:t>Bukti 7 | Challenge 10 PASS</a:t>
+            </a:r>
+            <a:endParaRPr sz="2200"/>
+          </a:p>
+        </p:txBody>
+      </p:sp>
+      <p:sp>
+        <p:nvSpPr>
+          <p:cNvPr id="9" name="Text 5">
+            <a:extLst>
+              <a:ext uri="{FF2B5EF4-FFF2-40B4-BE49-F238E27FC236}">
+                <a16:creationId xmlns:a16="http://schemas.microsoft.com/office/drawing/2014/main" id="{6267422E-13CF-4C4B-B92C-BD5193C399A1}"/>
+              </a:ext>
+            </a:extLst>
+          </p:cNvPr>
+          <p:cNvSpPr>
+            <a:spLocks noGrp="1"/>
+          </p:cNvSpPr>
+          <p:nvPr/>
+        </p:nvSpPr>
+        <p:spPr>
+          <a:xfrm>
+            <a:off x="457200" y="960120"/>
+            <a:ext cx="11247120" cy="320040"/>
+          </a:xfrm>
+          <a:prstGeom prst="rect">
+            <a:avLst/>
+          </a:prstGeom>
+          <a:noFill/>
+        </p:spPr>
+        <p:txBody>
+          <a:bodyPr wrap="square" lIns="0" tIns="0" rIns="0" bIns="0" anchor="ctr"/>
+          <a:lstStyle/>
+          <a:p>
+            <a:pPr marL="0" indent="0" algn="ctr">
+              <a:buNone/>
+            </a:pPr>
+            <a:r>
+              <a:rPr lang="en-US" sz="1200" i="1">
+                <a:solidFill>
+                  <a:srgbClr val="64748B"/>
+                </a:solidFill>
+                <a:latin typeface="Calibri"/>
+                <a:ea typeface="Calibri"/>
+                <a:cs typeface="Calibri"/>
+              </a:rPr>
+              <a:t>Output uji end-to-end aktual setelah server dan DB siap</a:t>
+            </a:r>
+            <a:endParaRPr sz="1200"/>
+          </a:p>
+        </p:txBody>
+      </p:sp>
+      <p:sp>
+        <p:nvSpPr>
+          <p:cNvPr id="10" name="Shape 6">
+            <a:extLst>
+              <a:ext uri="{FF2B5EF4-FFF2-40B4-BE49-F238E27FC236}">
+                <a16:creationId xmlns:a16="http://schemas.microsoft.com/office/drawing/2014/main" id="{F83768A1-8663-4DA0-8F88-261CD281B343}"/>
+              </a:ext>
+            </a:extLst>
+          </p:cNvPr>
+          <p:cNvSpPr>
+            <a:spLocks noGrp="1"/>
+          </p:cNvSpPr>
+          <p:nvPr/>
+        </p:nvSpPr>
+        <p:spPr>
+          <a:xfrm>
+            <a:off x="457200" y="1417320"/>
+            <a:ext cx="5577840" cy="4754880"/>
+          </a:xfrm>
+          <a:prstGeom prst="rect">
+            <a:avLst/>
+          </a:prstGeom>
+          <a:solidFill>
+            <a:srgbClr val="F8FAFC"/>
+          </a:solidFill>
+          <a:ln w="12700">
+            <a:solidFill>
+              <a:srgbClr val="E2E8F0"/>
+            </a:solidFill>
+            <a:prstDash val="solid"/>
+          </a:ln>
+        </p:spPr>
+        <p:txBody>
+          <a:bodyPr/>
+          <a:p/>
+        </p:txBody>
+      </p:sp>
+      <p:sp>
+        <p:nvSpPr>
+          <p:cNvPr id="11" name="Text 7">
+            <a:extLst>
+              <a:ext uri="{FF2B5EF4-FFF2-40B4-BE49-F238E27FC236}">
+                <a16:creationId xmlns:a16="http://schemas.microsoft.com/office/drawing/2014/main" id="{FEA5EA30-C448-4C70-9EC6-2481712E62F8}"/>
+              </a:ext>
+            </a:extLst>
+          </p:cNvPr>
+          <p:cNvSpPr>
+            <a:spLocks noGrp="1"/>
+          </p:cNvSpPr>
+          <p:nvPr/>
+        </p:nvSpPr>
+        <p:spPr>
+          <a:xfrm>
+            <a:off x="685800" y="1600200"/>
+            <a:ext cx="5120640" cy="822960"/>
+          </a:xfrm>
+          <a:prstGeom prst="rect">
+            <a:avLst/>
+          </a:prstGeom>
+          <a:noFill/>
+        </p:spPr>
+        <p:txBody>
+          <a:bodyPr wrap="square" lIns="0" tIns="0" rIns="0" bIns="0" anchor="ctr"/>
+          <a:lstStyle/>
+          <a:p>
+            <a:pPr marL="0" indent="0">
+              <a:buNone/>
+            </a:pPr>
+            <a:r>
+              <a:rPr lang="en-US" sz="1100" b="1" spc="300">
+                <a:solidFill>
+                  <a:srgbClr val="F37021"/>
+                </a:solidFill>
+                <a:latin typeface="Calibri"/>
+                <a:ea typeface="Calibri"/>
+                <a:cs typeface="Calibri"/>
+              </a:rPr>
+              <a:t>PERINTAH, FUNGSI, DAN HASIL</a:t>
+            </a:r>
+            <a:endParaRPr sz="1100"/>
+          </a:p>
+        </p:txBody>
+      </p:sp>
+      <p:pic>
+        <p:nvPicPr>
+          <p:cNvPr id="50" name="Image 2"/>
+          <p:cNvPicPr>
+            <a:picLocks noChangeAspect="1"/>
+          </p:cNvPicPr>
+          <p:nvPr/>
+        </p:nvPicPr>
+        <p:blipFill>
+          <a:blip r:embed="rId5"/>
+          <a:stretch>
+            <a:fillRect/>
+          </a:stretch>
+        </p:blipFill>
+        <p:spPr>
+          <a:xfrm>
+            <a:off x="777240" y="2697480"/>
+            <a:ext cx="292608" cy="292608"/>
+          </a:xfrm>
+          <a:prstGeom prst="rect">
+            <a:avLst/>
+          </a:prstGeom>
+        </p:spPr>
+      </p:pic>
+      <p:sp>
+        <p:nvSpPr>
+          <p:cNvPr id="13" name="Text 8">
+            <a:extLst>
+              <a:ext uri="{FF2B5EF4-FFF2-40B4-BE49-F238E27FC236}">
+                <a16:creationId xmlns:a16="http://schemas.microsoft.com/office/drawing/2014/main" id="{D3B25D18-01EE-4A7E-BCC4-163B8F4E205C}"/>
+              </a:ext>
+            </a:extLst>
+          </p:cNvPr>
+          <p:cNvSpPr>
+            <a:spLocks noGrp="1"/>
+          </p:cNvSpPr>
+          <p:nvPr/>
+        </p:nvSpPr>
+        <p:spPr>
+          <a:xfrm>
+            <a:off x="1207008" y="2606040"/>
+            <a:ext cx="4709160" cy="457200"/>
+          </a:xfrm>
+          <a:prstGeom prst="rect">
+            <a:avLst/>
+          </a:prstGeom>
+          <a:noFill/>
+        </p:spPr>
+        <p:txBody>
+          <a:bodyPr wrap="square" lIns="0" tIns="0" rIns="0" bIns="0" anchor="ctr"/>
+          <a:lstStyle/>
+          <a:p>
+            <a:pPr marL="0" indent="0">
+              <a:buNone/>
+            </a:pPr>
+            <a:r>
+              <a:rPr lang="fi-FI" sz="1400">
+                <a:solidFill>
+                  <a:srgbClr val="312124"/>
+                </a:solidFill>
+                <a:latin typeface="Aptos" panose="020B0004020202020204" pitchFamily="34" charset="0"/>
+                <a:ea typeface="Calibri"/>
+                <a:cs typeface="Calibri"/>
+              </a:rPr>
+              <a:t>Jalankan tes dari root repo.</a:t>
+            </a:r>
+            <a:endParaRPr sz="1400">
+              <a:solidFill>
+                <a:srgbClr val="312124"/>
+              </a:solidFill>
+              <a:latin typeface="Aptos" panose="020B0004020202020204" pitchFamily="34" charset="0"/>
+            </a:endParaRPr>
+          </a:p>
+        </p:txBody>
+      </p:sp>
+      <p:pic>
+        <p:nvPicPr>
+          <p:cNvPr id="52" name="Image 3"/>
+          <p:cNvPicPr>
+            <a:picLocks noChangeAspect="1"/>
+          </p:cNvPicPr>
+          <p:nvPr/>
+        </p:nvPicPr>
+        <p:blipFill>
+          <a:blip r:embed="rId6"/>
+          <a:stretch>
+            <a:fillRect/>
+          </a:stretch>
+        </p:blipFill>
+        <p:spPr>
+          <a:xfrm>
+            <a:off x="777240" y="3200400"/>
+            <a:ext cx="292608" cy="292608"/>
+          </a:xfrm>
+          <a:prstGeom prst="rect">
+            <a:avLst/>
+          </a:prstGeom>
+        </p:spPr>
+      </p:pic>
+      <p:sp>
+        <p:nvSpPr>
+          <p:cNvPr id="15" name="Text 9">
+            <a:extLst>
+              <a:ext uri="{FF2B5EF4-FFF2-40B4-BE49-F238E27FC236}">
+                <a16:creationId xmlns:a16="http://schemas.microsoft.com/office/drawing/2014/main" id="{EA13C62C-A937-4AB2-A4E7-CAA3ED764E30}"/>
+              </a:ext>
+            </a:extLst>
+          </p:cNvPr>
+          <p:cNvSpPr>
+            <a:spLocks noGrp="1"/>
+          </p:cNvSpPr>
+          <p:nvPr/>
+        </p:nvSpPr>
+        <p:spPr>
+          <a:xfrm>
+            <a:off x="1207008" y="3108960"/>
+            <a:ext cx="4709160" cy="457200"/>
+          </a:xfrm>
+          <a:prstGeom prst="rect">
+            <a:avLst/>
+          </a:prstGeom>
+          <a:noFill/>
+        </p:spPr>
+        <p:txBody>
+          <a:bodyPr wrap="square" lIns="0" tIns="0" rIns="0" bIns="0" anchor="ctr"/>
+          <a:lstStyle/>
+          <a:p>
+            <a:pPr marL="0" indent="0">
+              <a:buNone/>
+            </a:pPr>
+            <a:r>
+              <a:rPr lang="en-US" sz="1400">
+                <a:solidFill>
+                  <a:srgbClr val="312124"/>
+                </a:solidFill>
+                <a:latin typeface="Aptos" panose="020B0004020202020204" pitchFamily="34" charset="0"/>
+                <a:ea typeface="Calibri"/>
+                <a:cs typeface="Calibri"/>
+              </a:rPr>
+              <a:t>Tes memeriksa fungsi dan HTTP.</a:t>
+            </a:r>
+            <a:endParaRPr sz="1400">
+              <a:solidFill>
+                <a:srgbClr val="312124"/>
+              </a:solidFill>
+              <a:latin typeface="Aptos" panose="020B0004020202020204" pitchFamily="34" charset="0"/>
+            </a:endParaRPr>
+          </a:p>
+        </p:txBody>
+      </p:sp>
+      <p:pic>
+        <p:nvPicPr>
+          <p:cNvPr id="54" name="Image 4"/>
+          <p:cNvPicPr>
+            <a:picLocks noChangeAspect="1"/>
+          </p:cNvPicPr>
+          <p:nvPr/>
+        </p:nvPicPr>
+        <p:blipFill>
+          <a:blip r:embed="rId7"/>
+          <a:stretch>
+            <a:fillRect/>
+          </a:stretch>
+        </p:blipFill>
+        <p:spPr>
+          <a:xfrm>
+            <a:off x="777240" y="3703320"/>
+            <a:ext cx="292608" cy="292608"/>
+          </a:xfrm>
+          <a:prstGeom prst="rect">
+            <a:avLst/>
+          </a:prstGeom>
+        </p:spPr>
+      </p:pic>
+      <p:sp>
+        <p:nvSpPr>
+          <p:cNvPr id="17" name="Text 10">
+            <a:extLst>
+              <a:ext uri="{FF2B5EF4-FFF2-40B4-BE49-F238E27FC236}">
+                <a16:creationId xmlns:a16="http://schemas.microsoft.com/office/drawing/2014/main" id="{D7B16F52-3399-4FCE-9D9A-B5CF3C65E519}"/>
+              </a:ext>
+            </a:extLst>
+          </p:cNvPr>
+          <p:cNvSpPr>
+            <a:spLocks noGrp="1"/>
+          </p:cNvSpPr>
+          <p:nvPr/>
+        </p:nvSpPr>
+        <p:spPr>
+          <a:xfrm>
+            <a:off x="1207008" y="3611880"/>
+            <a:ext cx="4709160" cy="457200"/>
+          </a:xfrm>
+          <a:prstGeom prst="rect">
+            <a:avLst/>
+          </a:prstGeom>
+          <a:noFill/>
+        </p:spPr>
+        <p:txBody>
+          <a:bodyPr wrap="square" lIns="0" tIns="0" rIns="0" bIns="0" anchor="ctr"/>
+          <a:lstStyle/>
+          <a:p>
+            <a:pPr marL="0" indent="0">
+              <a:buNone/>
+            </a:pPr>
+            <a:r>
+              <a:rPr lang="en-US" sz="1400">
+                <a:solidFill>
+                  <a:srgbClr val="312124"/>
+                </a:solidFill>
+                <a:latin typeface="Aptos" panose="020B0004020202020204" pitchFamily="34" charset="0"/>
+                <a:ea typeface="Calibri"/>
+                <a:cs typeface="Calibri"/>
+              </a:rPr>
+              <a:t>Liveness dan readiness berbeda.</a:t>
+            </a:r>
+            <a:endParaRPr sz="1400">
+              <a:solidFill>
+                <a:srgbClr val="312124"/>
+              </a:solidFill>
+              <a:latin typeface="Aptos" panose="020B0004020202020204" pitchFamily="34" charset="0"/>
+            </a:endParaRPr>
+          </a:p>
+        </p:txBody>
+      </p:sp>
+      <p:pic>
+        <p:nvPicPr>
+          <p:cNvPr id="56" name="Image 5"/>
+          <p:cNvPicPr>
+            <a:picLocks noChangeAspect="1"/>
+          </p:cNvPicPr>
+          <p:nvPr/>
+        </p:nvPicPr>
+        <p:blipFill>
+          <a:blip r:embed="rId8"/>
+          <a:stretch>
+            <a:fillRect/>
+          </a:stretch>
+        </p:blipFill>
+        <p:spPr>
+          <a:xfrm>
+            <a:off x="777240" y="4206240"/>
+            <a:ext cx="292608" cy="292608"/>
+          </a:xfrm>
+          <a:prstGeom prst="rect">
+            <a:avLst/>
+          </a:prstGeom>
+        </p:spPr>
+      </p:pic>
+      <p:sp>
+        <p:nvSpPr>
+          <p:cNvPr id="19" name="Text 11">
+            <a:extLst>
+              <a:ext uri="{FF2B5EF4-FFF2-40B4-BE49-F238E27FC236}">
+                <a16:creationId xmlns:a16="http://schemas.microsoft.com/office/drawing/2014/main" id="{BBE1F27C-32AF-4CD9-A303-059FE396650A}"/>
+              </a:ext>
+            </a:extLst>
+          </p:cNvPr>
+          <p:cNvSpPr>
+            <a:spLocks noGrp="1"/>
+          </p:cNvSpPr>
+          <p:nvPr/>
+        </p:nvSpPr>
+        <p:spPr>
+          <a:xfrm>
+            <a:off x="1207008" y="4114800"/>
+            <a:ext cx="4709160" cy="457200"/>
+          </a:xfrm>
+          <a:prstGeom prst="rect">
+            <a:avLst/>
+          </a:prstGeom>
+          <a:noFill/>
+        </p:spPr>
+        <p:txBody>
+          <a:bodyPr wrap="square" lIns="0" tIns="0" rIns="0" bIns="0" anchor="ctr"/>
+          <a:lstStyle/>
+          <a:p>
+            <a:pPr marL="0" indent="0">
+              <a:buNone/>
+            </a:pPr>
+            <a:r>
+              <a:rPr lang="en-US" sz="1400">
+                <a:solidFill>
+                  <a:srgbClr val="312124"/>
+                </a:solidFill>
+                <a:latin typeface="Aptos" panose="020B0004020202020204" pitchFamily="34" charset="0"/>
+                <a:ea typeface="Calibri"/>
+                <a:cs typeface="Calibri"/>
+              </a:rPr>
+              <a:t>Referensi sumber dapat dilacak.</a:t>
+            </a:r>
+            <a:endParaRPr sz="1400">
+              <a:solidFill>
+                <a:srgbClr val="312124"/>
+              </a:solidFill>
+              <a:latin typeface="Aptos" panose="020B0004020202020204" pitchFamily="34" charset="0"/>
+            </a:endParaRPr>
+          </a:p>
+        </p:txBody>
+      </p:sp>
+      <p:pic>
+        <p:nvPicPr>
+          <p:cNvPr id="58" name="Image 6"/>
+          <p:cNvPicPr>
+            <a:picLocks noChangeAspect="1"/>
+          </p:cNvPicPr>
+          <p:nvPr/>
+        </p:nvPicPr>
+        <p:blipFill>
+          <a:blip r:embed="rId9"/>
+          <a:stretch>
+            <a:fillRect/>
+          </a:stretch>
+        </p:blipFill>
+        <p:spPr>
+          <a:xfrm>
+            <a:off x="777240" y="4709160"/>
+            <a:ext cx="292608" cy="292608"/>
+          </a:xfrm>
+          <a:prstGeom prst="rect">
+            <a:avLst/>
+          </a:prstGeom>
+        </p:spPr>
+      </p:pic>
+      <p:sp>
+        <p:nvSpPr>
+          <p:cNvPr id="21" name="Text 12">
+            <a:extLst>
+              <a:ext uri="{FF2B5EF4-FFF2-40B4-BE49-F238E27FC236}">
+                <a16:creationId xmlns:a16="http://schemas.microsoft.com/office/drawing/2014/main" id="{B2F0D419-6A60-4F73-AA96-AB2F2DE7D27D}"/>
+              </a:ext>
+            </a:extLst>
+          </p:cNvPr>
+          <p:cNvSpPr>
+            <a:spLocks noGrp="1"/>
+          </p:cNvSpPr>
+          <p:nvPr/>
+        </p:nvSpPr>
+        <p:spPr>
+          <a:xfrm>
+            <a:off x="1207008" y="4617720"/>
+            <a:ext cx="4709160" cy="457200"/>
+          </a:xfrm>
+          <a:prstGeom prst="rect">
+            <a:avLst/>
+          </a:prstGeom>
+          <a:noFill/>
+        </p:spPr>
+        <p:txBody>
+          <a:bodyPr wrap="square" lIns="0" tIns="0" rIns="0" bIns="0" anchor="ctr"/>
+          <a:lstStyle/>
+          <a:p>
+            <a:pPr marL="0" indent="0">
+              <a:buNone/>
+            </a:pPr>
+            <a:r>
+              <a:rPr lang="en-US" sz="1400">
+                <a:solidFill>
+                  <a:srgbClr val="312124"/>
+                </a:solidFill>
+                <a:latin typeface="Aptos" panose="020B0004020202020204" pitchFamily="34" charset="0"/>
+                <a:ea typeface="Calibri"/>
+                <a:cs typeface="Calibri"/>
+              </a:rPr>
+              <a:t>Input top_k=0 ditolak 422.</a:t>
+            </a:r>
+            <a:endParaRPr sz="1400">
+              <a:solidFill>
+                <a:srgbClr val="312124"/>
+              </a:solidFill>
+              <a:latin typeface="Aptos" panose="020B0004020202020204" pitchFamily="34" charset="0"/>
+            </a:endParaRPr>
+          </a:p>
+        </p:txBody>
+      </p:sp>
+      <p:pic>
+        <p:nvPicPr>
+          <p:cNvPr id="60" name="Image 7"/>
+          <p:cNvPicPr>
+            <a:picLocks noChangeAspect="1"/>
+          </p:cNvPicPr>
+          <p:nvPr/>
+        </p:nvPicPr>
+        <p:blipFill>
+          <a:blip r:embed="rId10"/>
+          <a:stretch>
+            <a:fillRect/>
+          </a:stretch>
+        </p:blipFill>
+        <p:spPr>
+          <a:xfrm>
+            <a:off x="777240" y="5212080"/>
+            <a:ext cx="292608" cy="292608"/>
+          </a:xfrm>
+          <a:prstGeom prst="rect">
+            <a:avLst/>
+          </a:prstGeom>
+        </p:spPr>
+      </p:pic>
+      <p:sp>
+        <p:nvSpPr>
+          <p:cNvPr id="23" name="Text 13">
+            <a:extLst>
+              <a:ext uri="{FF2B5EF4-FFF2-40B4-BE49-F238E27FC236}">
+                <a16:creationId xmlns:a16="http://schemas.microsoft.com/office/drawing/2014/main" id="{7348AFF7-ECF9-4F80-B0E4-ECA2A459930F}"/>
+              </a:ext>
+            </a:extLst>
+          </p:cNvPr>
+          <p:cNvSpPr>
+            <a:spLocks noGrp="1"/>
+          </p:cNvSpPr>
+          <p:nvPr/>
+        </p:nvSpPr>
+        <p:spPr>
+          <a:xfrm>
+            <a:off x="1207008" y="5120640"/>
+            <a:ext cx="4709160" cy="457200"/>
+          </a:xfrm>
+          <a:prstGeom prst="rect">
+            <a:avLst/>
+          </a:prstGeom>
+          <a:noFill/>
+        </p:spPr>
+        <p:txBody>
+          <a:bodyPr wrap="square" lIns="0" tIns="0" rIns="0" bIns="0" anchor="ctr"/>
+          <a:lstStyle/>
+          <a:p>
+            <a:pPr marL="0" indent="0">
+              <a:buNone/>
+            </a:pPr>
+            <a:r>
+              <a:rPr lang="en-US" sz="1400">
+                <a:solidFill>
+                  <a:srgbClr val="312124"/>
+                </a:solidFill>
+                <a:latin typeface="Aptos" panose="020B0004020202020204" pitchFamily="34" charset="0"/>
+                <a:ea typeface="Calibri"/>
+                <a:cs typeface="Calibri"/>
+              </a:rPr>
+              <a:t>Mode default tidak memanggil API bayar.</a:t>
+            </a:r>
+            <a:endParaRPr sz="1400">
+              <a:solidFill>
+                <a:srgbClr val="312124"/>
+              </a:solidFill>
+              <a:latin typeface="Aptos" panose="020B0004020202020204" pitchFamily="34" charset="0"/>
+            </a:endParaRPr>
+          </a:p>
+        </p:txBody>
+      </p:sp>
+      <p:pic>
+        <p:nvPicPr>
+          <p:cNvPr id="62" name="Image 8"/>
+          <p:cNvPicPr>
+            <a:picLocks noChangeAspect="1"/>
+          </p:cNvPicPr>
+          <p:nvPr/>
+        </p:nvPicPr>
+        <p:blipFill>
+          <a:blip r:embed="rId11"/>
+          <a:stretch>
+            <a:fillRect/>
+          </a:stretch>
+        </p:blipFill>
+        <p:spPr>
+          <a:xfrm>
+            <a:off x="777240" y="5715000"/>
+            <a:ext cx="292608" cy="292608"/>
+          </a:xfrm>
+          <a:prstGeom prst="rect">
+            <a:avLst/>
+          </a:prstGeom>
+        </p:spPr>
+      </p:pic>
+      <p:sp>
+        <p:nvSpPr>
+          <p:cNvPr id="25" name="Text 14">
+            <a:extLst>
+              <a:ext uri="{FF2B5EF4-FFF2-40B4-BE49-F238E27FC236}">
+                <a16:creationId xmlns:a16="http://schemas.microsoft.com/office/drawing/2014/main" id="{B8FE3C74-8320-40DA-82D3-27789ED07C54}"/>
+              </a:ext>
+            </a:extLst>
+          </p:cNvPr>
+          <p:cNvSpPr>
+            <a:spLocks noGrp="1"/>
+          </p:cNvSpPr>
+          <p:nvPr/>
+        </p:nvSpPr>
+        <p:spPr>
+          <a:xfrm>
+            <a:off x="1207008" y="5623560"/>
+            <a:ext cx="4709160" cy="457200"/>
+          </a:xfrm>
+          <a:prstGeom prst="rect">
+            <a:avLst/>
+          </a:prstGeom>
+          <a:noFill/>
+        </p:spPr>
+        <p:txBody>
+          <a:bodyPr wrap="square" lIns="0" tIns="0" rIns="0" bIns="0" anchor="ctr"/>
+          <a:lstStyle/>
+          <a:p>
+            <a:pPr marL="0" indent="0">
+              <a:buNone/>
+            </a:pPr>
+            <a:r>
+              <a:rPr lang="en-US" sz="1400">
+                <a:solidFill>
+                  <a:srgbClr val="312124"/>
+                </a:solidFill>
+                <a:latin typeface="Aptos" panose="020B0004020202020204" pitchFamily="34" charset="0"/>
+                <a:ea typeface="Calibri"/>
+                <a:cs typeface="Calibri"/>
+              </a:rPr>
+              <a:t>Semua 10 PASS, 0 FAIL.</a:t>
+            </a:r>
+            <a:endParaRPr sz="1400">
+              <a:solidFill>
+                <a:srgbClr val="312124"/>
+              </a:solidFill>
+              <a:latin typeface="Aptos" panose="020B0004020202020204" pitchFamily="34" charset="0"/>
+            </a:endParaRPr>
+          </a:p>
+        </p:txBody>
+      </p:sp>
+      <p:sp>
+        <p:nvSpPr>
+          <p:cNvPr id="26" name="Shape 15">
+            <a:extLst>
+              <a:ext uri="{FF2B5EF4-FFF2-40B4-BE49-F238E27FC236}">
+                <a16:creationId xmlns:a16="http://schemas.microsoft.com/office/drawing/2014/main" id="{3341A3AF-3A5B-49CA-B13D-2C307F1C248E}"/>
+              </a:ext>
+            </a:extLst>
+          </p:cNvPr>
+          <p:cNvSpPr>
+            <a:spLocks noGrp="1"/>
+          </p:cNvSpPr>
+          <p:nvPr/>
+        </p:nvSpPr>
+        <p:spPr>
+          <a:xfrm>
+            <a:off x="6217920" y="1417320"/>
+            <a:ext cx="5486400" cy="4754880"/>
+          </a:xfrm>
+          <a:prstGeom prst="rect">
+            <a:avLst/>
+          </a:prstGeom>
+          <a:solidFill>
+            <a:srgbClr val="002677"/>
+          </a:solidFill>
+          <a:ln w="12700">
+            <a:solidFill>
+              <a:srgbClr val="002677"/>
+            </a:solidFill>
+            <a:prstDash val="solid"/>
+          </a:ln>
+        </p:spPr>
+        <p:txBody>
+          <a:bodyPr/>
+          <a:p/>
+        </p:txBody>
+      </p:sp>
+      <p:sp>
+        <p:nvSpPr>
+          <p:cNvPr id="27" name="Text 16">
+            <a:extLst>
+              <a:ext uri="{FF2B5EF4-FFF2-40B4-BE49-F238E27FC236}">
+                <a16:creationId xmlns:a16="http://schemas.microsoft.com/office/drawing/2014/main" id="{1B597074-D41C-477E-B011-37C4588A174E}"/>
+              </a:ext>
+            </a:extLst>
+          </p:cNvPr>
+          <p:cNvSpPr>
+            <a:spLocks noGrp="1"/>
+          </p:cNvSpPr>
+          <p:nvPr/>
+        </p:nvSpPr>
+        <p:spPr>
+          <a:xfrm>
+            <a:off x="6446520" y="1600200"/>
+            <a:ext cx="5120640" cy="822960"/>
+          </a:xfrm>
+          <a:prstGeom prst="rect">
+            <a:avLst/>
+          </a:prstGeom>
+          <a:noFill/>
+        </p:spPr>
+        <p:txBody>
+          <a:bodyPr wrap="square" lIns="0" tIns="0" rIns="0" bIns="0" anchor="ctr"/>
+          <a:lstStyle/>
+          <a:p>
+            <a:pPr marL="0" indent="0">
+              <a:buNone/>
+            </a:pPr>
+            <a:r>
+              <a:rPr lang="en-US" sz="1100" b="1" spc="300">
+                <a:solidFill>
+                  <a:srgbClr val="F37021"/>
+                </a:solidFill>
+                <a:latin typeface="Calibri"/>
+                <a:ea typeface="Calibri"/>
+                <a:cs typeface="Calibri"/>
+              </a:rPr>
+              <a:t>BUKTI PADA MESIN UJI</a:t>
+            </a:r>
+            <a:endParaRPr sz="1100"/>
+          </a:p>
+        </p:txBody>
+      </p:sp>
+      <p:sp>
+        <p:nvSpPr>
+          <p:cNvPr id="28" name="Text 17">
+            <a:extLst>
+              <a:ext uri="{FF2B5EF4-FFF2-40B4-BE49-F238E27FC236}">
+                <a16:creationId xmlns:a16="http://schemas.microsoft.com/office/drawing/2014/main" id="{1F6CB16E-FFA7-4EB8-9831-521CE3804336}"/>
+              </a:ext>
+            </a:extLst>
+          </p:cNvPr>
+          <p:cNvSpPr>
+            <a:spLocks noGrp="1"/>
+          </p:cNvSpPr>
+          <p:nvPr/>
+        </p:nvSpPr>
+        <p:spPr>
+          <a:xfrm>
+            <a:off x="6446520" y="2606040"/>
+            <a:ext cx="5029200" cy="2743200"/>
+          </a:xfrm>
+          <a:prstGeom prst="rect">
+            <a:avLst/>
+          </a:prstGeom>
+          <a:noFill/>
+        </p:spPr>
+        <p:txBody>
+          <a:bodyPr wrap="square" anchor="ctr"/>
+          <a:lstStyle/>
+          <a:p>
+            <a:pPr marL="0" indent="0">
+              <a:spcAft>
+                <a:spcPts val="600"/>
+              </a:spcAft>
+              <a:buNone/>
+            </a:pPr>
+            <a:endParaRPr sz="1200"/>
+          </a:p>
+        </p:txBody>
+      </p:sp>
+      <p:sp>
+        <p:nvSpPr>
+          <p:cNvPr id="29" name="Shape 18">
+            <a:extLst>
+              <a:ext uri="{FF2B5EF4-FFF2-40B4-BE49-F238E27FC236}">
+                <a16:creationId xmlns:a16="http://schemas.microsoft.com/office/drawing/2014/main" id="{7FC777FC-F540-418C-9FA3-B9D94F01598D}"/>
+              </a:ext>
+            </a:extLst>
+          </p:cNvPr>
+          <p:cNvSpPr>
+            <a:spLocks noGrp="1"/>
+          </p:cNvSpPr>
+          <p:nvPr/>
+        </p:nvSpPr>
+        <p:spPr>
+          <a:xfrm>
+            <a:off x="6446520" y="5349240"/>
+            <a:ext cx="5029200" cy="731520"/>
+          </a:xfrm>
+          <a:prstGeom prst="rect">
+            <a:avLst/>
+          </a:prstGeom>
+          <a:solidFill>
+            <a:srgbClr val="F37021"/>
+          </a:solidFill>
+          <a:ln w="12700">
+            <a:solidFill>
+              <a:srgbClr val="F37021"/>
+            </a:solidFill>
+            <a:prstDash val="solid"/>
+          </a:ln>
+        </p:spPr>
+        <p:txBody>
+          <a:bodyPr/>
+          <a:p/>
+        </p:txBody>
+      </p:sp>
+      <p:sp>
+        <p:nvSpPr>
+          <p:cNvPr id="30" name="Text 19">
+            <a:extLst>
+              <a:ext uri="{FF2B5EF4-FFF2-40B4-BE49-F238E27FC236}">
+                <a16:creationId xmlns:a16="http://schemas.microsoft.com/office/drawing/2014/main" id="{D535A2DE-B237-4417-B547-47453DC8DB66}"/>
+              </a:ext>
+            </a:extLst>
+          </p:cNvPr>
+          <p:cNvSpPr>
+            <a:spLocks noGrp="1"/>
+          </p:cNvSpPr>
+          <p:nvPr/>
+        </p:nvSpPr>
+        <p:spPr>
+          <a:xfrm>
+            <a:off x="6446520" y="5349240"/>
+            <a:ext cx="5029200" cy="731520"/>
+          </a:xfrm>
+          <a:prstGeom prst="rect">
+            <a:avLst/>
+          </a:prstGeom>
+          <a:noFill/>
+        </p:spPr>
+        <p:txBody>
+          <a:bodyPr wrap="square" lIns="0" tIns="0" rIns="0" bIns="0" anchor="ctr"/>
+          <a:lstStyle/>
+          <a:p>
+            <a:pPr marL="0" indent="0" algn="ctr">
+              <a:buNone/>
+            </a:pPr>
+            <a:r>
+              <a:rPr lang="en-US" sz="1500" i="1">
+                <a:solidFill>
+                  <a:srgbClr val="FFFFFF"/>
+                </a:solidFill>
+                <a:latin typeface="Aptos" panose="020B0004020202020204" pitchFamily="34" charset="0"/>
+                <a:ea typeface="Calibri"/>
+                <a:cs typeface="Calibri"/>
+              </a:rPr>
+              <a:t>Challenge lengkap: 10 PASS, 0 FAIL.</a:t>
+            </a:r>
+            <a:endParaRPr sz="1500">
+              <a:solidFill>
+                <a:srgbClr val="FFFFFF"/>
+              </a:solidFill>
+              <a:latin typeface="Aptos" panose="020B0004020202020204" pitchFamily="34" charset="0"/>
+            </a:endParaRPr>
+          </a:p>
+        </p:txBody>
+      </p:sp>
+      <p:pic>
+        <p:nvPicPr>
+          <p:cNvPr id="6" name="Picture 5">
+            <a:extLst>
+              <a:ext uri="{FF2B5EF4-FFF2-40B4-BE49-F238E27FC236}">
+                <a16:creationId xmlns:a16="http://schemas.microsoft.com/office/drawing/2014/main" id="{1EDDB1C5-FF78-49D8-68FA-06D40BEA89A8}"/>
+              </a:ext>
+            </a:extLst>
+          </p:cNvPr>
+          <p:cNvPicPr>
+            <a:picLocks/>
+          </p:cNvPicPr>
+          <p:nvPr/>
+        </p:nvPicPr>
+        <p:blipFill>
+          <a:blip r:embed="rId12">
+            <a:extLst>
+              <a:ext uri="{28A0092B-C50C-407E-A947-70E740481C1C}">
+                <a14:useLocalDpi xmlns:a14="http://schemas.microsoft.com/office/drawing/2010/main" val="0"/>
+              </a:ext>
+            </a:extLst>
+          </a:blip>
+          <a:stretch>
+            <a:fillRect/>
+          </a:stretch>
+        </p:blipFill>
+        <p:spPr>
+          <a:xfrm>
+            <a:off x="6419088" y="2696936"/>
+            <a:ext cx="5084064" cy="1811600"/>
+          </a:xfrm>
+          <a:prstGeom prst="rect">
+            <a:avLst/>
+          </a:prstGeom>
+        </p:spPr>
+      </p:pic>
+    </p:spTree>
+    <p:extLst>
+      <p:ext uri="{BB962C8B-B14F-4D97-AF65-F5344CB8AC3E}">
+        <p14:creationId xmlns:p14="http://schemas.microsoft.com/office/powerpoint/2010/main" val="583695354"/>
+      </p:ext>
+    </p:extLst>
+  </p:cSld>
+  <p:clrMapOvr>
+    <a:masterClrMapping/>
+  </p:clrMapOvr>
+</p:sld>
+</file>
+
+<file path=ppt/slides/slide22.xml><?xml version="1.0" encoding="utf-8"?>
+<p:sld xmlns:a="http://schemas.openxmlformats.org/drawingml/2006/main" xmlns:r="http://schemas.openxmlformats.org/officeDocument/2006/relationships" xmlns:p="http://schemas.openxmlformats.org/presentationml/2006/main">
+  <p:cSld>
+    <p:bg>
+      <p:bgPr>
+        <a:solidFill>
+          <a:srgbClr val="FFFFFF"/>
+        </a:solidFill>
+        <a:effectLst/>
+      </p:bgPr>
+    </p:bg>
+    <p:spTree>
+      <p:nvGrpSpPr>
+        <p:cNvPr id="1" name=""/>
+        <p:cNvGrpSpPr/>
+        <p:nvPr/>
+      </p:nvGrpSpPr>
+      <p:grpSpPr>
+        <a:xfrm>
+          <a:off x="0" y="0"/>
+          <a:ext cx="0" cy="0"/>
+          <a:chOff x="0" y="0"/>
+          <a:chExt cx="0" cy="0"/>
+        </a:xfrm>
+      </p:grpSpPr>
+      <p:sp>
+        <p:nvSpPr>
+          <p:cNvPr id="2" name="Text 0">
+            <a:extLst>
+              <a:ext uri="{FF2B5EF4-FFF2-40B4-BE49-F238E27FC236}">
+                <a16:creationId xmlns:a16="http://schemas.microsoft.com/office/drawing/2014/main" id="{DD4054BC-ADC2-4986-AAF9-895DC6D31A3F}"/>
+              </a:ext>
+            </a:extLst>
+          </p:cNvPr>
+          <p:cNvSpPr>
+            <a:spLocks noGrp="1"/>
+          </p:cNvSpPr>
+          <p:nvPr/>
+        </p:nvSpPr>
+        <p:spPr>
+          <a:xfrm>
+            <a:off x="457200" y="6492240"/>
+            <a:ext cx="7315200" cy="274320"/>
+          </a:xfrm>
+          <a:prstGeom prst="rect">
+            <a:avLst/>
+          </a:prstGeom>
+          <a:noFill/>
+        </p:spPr>
+        <p:txBody>
+          <a:bodyPr wrap="square" lIns="0" tIns="0" rIns="0" bIns="0" anchor="ctr"/>
+          <a:lstStyle/>
+          <a:p>
+            <a:pPr marL="0" indent="0" algn="l">
+              <a:buNone/>
+            </a:pPr>
+            <a:r>
+              <a:rPr sz="900">
+                <a:solidFill>
+                  <a:srgbClr val="64748B"/>
+                </a:solidFill>
+                <a:latin typeface="Calibri"/>
+                <a:ea typeface="Calibri"/>
+                <a:cs typeface="Calibri"/>
+              </a:rPr>
+              <a:t>BINUS UNIVERSITY  |  Cloud Services  |  Praktikum 11</a:t>
+            </a:r>
+            <a:endParaRPr sz="900"/>
+          </a:p>
+        </p:txBody>
+      </p:sp>
+      <p:sp>
+        <p:nvSpPr>
+          <p:cNvPr id="3" name="Text 1">
+            <a:extLst>
+              <a:ext uri="{FF2B5EF4-FFF2-40B4-BE49-F238E27FC236}">
+                <a16:creationId xmlns:a16="http://schemas.microsoft.com/office/drawing/2014/main" id="{3369F6F8-B7F5-4586-8C44-90E726E5751F}"/>
+              </a:ext>
+            </a:extLst>
+          </p:cNvPr>
+          <p:cNvSpPr>
+            <a:spLocks noGrp="1"/>
+          </p:cNvSpPr>
+          <p:nvPr/>
+        </p:nvSpPr>
+        <p:spPr>
+          <a:xfrm>
+            <a:off x="11247120" y="6492240"/>
+            <a:ext cx="457200" cy="274320"/>
+          </a:xfrm>
+          <a:prstGeom prst="rect">
+            <a:avLst/>
+          </a:prstGeom>
+          <a:noFill/>
+        </p:spPr>
+        <p:txBody>
+          <a:bodyPr wrap="square" lIns="0" tIns="0" rIns="0" bIns="0" anchor="ctr"/>
+          <a:lstStyle/>
+          <a:p>
+            <a:pPr marL="0" indent="0" algn="r">
+              <a:buNone/>
+            </a:pPr>
+            <a:r>
+              <a:rPr lang="en-US" sz="900" b="1">
+                <a:solidFill>
+                  <a:srgbClr val="64748B"/>
+                </a:solidFill>
+                <a:latin typeface="Calibri"/>
+                <a:ea typeface="Calibri"/>
+                <a:cs typeface="Calibri"/>
+              </a:rPr>
+              <a:t>22</a:t>
+            </a:r>
+            <a:endParaRPr sz="900"/>
+          </a:p>
+        </p:txBody>
+      </p:sp>
+      <p:sp>
+        <p:nvSpPr>
+          <p:cNvPr id="4" name="Shape 2">
+            <a:extLst>
+              <a:ext uri="{FF2B5EF4-FFF2-40B4-BE49-F238E27FC236}">
+                <a16:creationId xmlns:a16="http://schemas.microsoft.com/office/drawing/2014/main" id="{8A6EEF9E-A69E-4941-A56B-328F8CFBBE86}"/>
+              </a:ext>
+            </a:extLst>
+          </p:cNvPr>
+          <p:cNvSpPr>
+            <a:spLocks noGrp="1"/>
+          </p:cNvSpPr>
+          <p:nvPr/>
+        </p:nvSpPr>
+        <p:spPr>
+          <a:xfrm>
+            <a:off x="457200" y="6446520"/>
+            <a:ext cx="228600" cy="36576"/>
+          </a:xfrm>
+          <a:prstGeom prst="rect">
+            <a:avLst/>
+          </a:prstGeom>
+          <a:solidFill>
+            <a:srgbClr val="F37021"/>
+          </a:solidFill>
+          <a:ln w="12700">
+            <a:solidFill>
+              <a:srgbClr val="F37021"/>
+            </a:solidFill>
+            <a:prstDash val="solid"/>
+          </a:ln>
+        </p:spPr>
+        <p:txBody>
+          <a:bodyPr/>
+          <a:p/>
+        </p:txBody>
+      </p:sp>
+      <p:pic>
+        <p:nvPicPr>
+          <p:cNvPr id="29" name="Image 0"/>
+          <p:cNvPicPr>
+            <a:picLocks noChangeAspect="1"/>
+          </p:cNvPicPr>
+          <p:nvPr/>
+        </p:nvPicPr>
+        <p:blipFill>
+          <a:blip r:embed="rId3"/>
+          <a:stretch>
+            <a:fillRect/>
+          </a:stretch>
+        </p:blipFill>
+        <p:spPr>
+          <a:xfrm>
+            <a:off x="274320" y="164592"/>
+            <a:ext cx="914400" cy="603504"/>
+          </a:xfrm>
+          <a:prstGeom prst="rect">
+            <a:avLst/>
+          </a:prstGeom>
+        </p:spPr>
+      </p:pic>
+      <p:pic>
+        <p:nvPicPr>
+          <p:cNvPr id="30" name="Image 1"/>
+          <p:cNvPicPr>
+            <a:picLocks noChangeAspect="1"/>
+          </p:cNvPicPr>
+          <p:nvPr/>
+        </p:nvPicPr>
+        <p:blipFill>
+          <a:blip r:embed="rId4"/>
+          <a:stretch>
+            <a:fillRect/>
+          </a:stretch>
+        </p:blipFill>
+        <p:spPr>
+          <a:xfrm>
+            <a:off x="10881360" y="182880"/>
+            <a:ext cx="1005840" cy="512064"/>
+          </a:xfrm>
+          <a:prstGeom prst="rect">
+            <a:avLst/>
+          </a:prstGeom>
+        </p:spPr>
+      </p:pic>
+      <p:sp>
+        <p:nvSpPr>
+          <p:cNvPr id="7" name="Shape 3">
+            <a:extLst>
+              <a:ext uri="{FF2B5EF4-FFF2-40B4-BE49-F238E27FC236}">
+                <a16:creationId xmlns:a16="http://schemas.microsoft.com/office/drawing/2014/main" id="{FAEFB080-BD21-41C3-8266-81DA2E010299}"/>
+              </a:ext>
+            </a:extLst>
+          </p:cNvPr>
+          <p:cNvSpPr>
+            <a:spLocks noGrp="1"/>
+          </p:cNvSpPr>
+          <p:nvPr/>
+        </p:nvSpPr>
+        <p:spPr>
+          <a:xfrm>
+            <a:off x="457200" y="868680"/>
+            <a:ext cx="11247120" cy="0"/>
+          </a:xfrm>
+          <a:prstGeom prst="line">
+            <a:avLst/>
+          </a:prstGeom>
+          <a:noFill/>
+          <a:ln w="12700">
+            <a:solidFill>
+              <a:srgbClr val="E2E8F0"/>
+            </a:solidFill>
+            <a:prstDash val="solid"/>
+          </a:ln>
+        </p:spPr>
+        <p:txBody>
+          <a:bodyPr/>
+          <a:p/>
+        </p:txBody>
+      </p:sp>
+      <p:sp>
+        <p:nvSpPr>
+          <p:cNvPr id="8" name="Text 4">
+            <a:extLst>
+              <a:ext uri="{FF2B5EF4-FFF2-40B4-BE49-F238E27FC236}">
+                <a16:creationId xmlns:a16="http://schemas.microsoft.com/office/drawing/2014/main" id="{5A8475FE-12CA-406C-B684-7A9421E1CABB}"/>
+              </a:ext>
+            </a:extLst>
+          </p:cNvPr>
+          <p:cNvSpPr>
+            <a:spLocks noGrp="1"/>
+          </p:cNvSpPr>
+          <p:nvPr/>
+        </p:nvSpPr>
+        <p:spPr>
+          <a:xfrm>
+            <a:off x="2011680" y="182880"/>
+            <a:ext cx="8138160" cy="502920"/>
+          </a:xfrm>
+          <a:prstGeom prst="rect">
+            <a:avLst/>
+          </a:prstGeom>
+          <a:noFill/>
+        </p:spPr>
+        <p:txBody>
+          <a:bodyPr wrap="square" lIns="0" tIns="0" rIns="0" bIns="0" anchor="ctr"/>
+          <a:lstStyle/>
+          <a:p>
+            <a:pPr marL="0" indent="0" algn="ctr">
+              <a:buNone/>
+            </a:pPr>
+            <a:r>
+              <a:rPr lang="nl-NL" sz="2200" b="1">
+                <a:solidFill>
+                  <a:srgbClr val="1976D2"/>
+                </a:solidFill>
+                <a:latin typeface="Calibri"/>
+                <a:ea typeface="Calibri"/>
+                <a:cs typeface="Calibri"/>
+              </a:rPr>
+              <a:t>9 | Git aman dan jalur cloud</a:t>
+            </a:r>
+            <a:endParaRPr sz="2200"/>
+          </a:p>
+        </p:txBody>
+      </p:sp>
+      <p:sp>
+        <p:nvSpPr>
+          <p:cNvPr id="9" name="Text 5">
+            <a:extLst>
+              <a:ext uri="{FF2B5EF4-FFF2-40B4-BE49-F238E27FC236}">
+                <a16:creationId xmlns:a16="http://schemas.microsoft.com/office/drawing/2014/main" id="{974BA88A-E417-4322-BFC2-99722614447A}"/>
+              </a:ext>
+            </a:extLst>
+          </p:cNvPr>
+          <p:cNvSpPr>
+            <a:spLocks noGrp="1"/>
+          </p:cNvSpPr>
+          <p:nvPr/>
+        </p:nvSpPr>
+        <p:spPr>
+          <a:xfrm>
+            <a:off x="457200" y="960120"/>
+            <a:ext cx="11247120" cy="320040"/>
+          </a:xfrm>
+          <a:prstGeom prst="rect">
+            <a:avLst/>
+          </a:prstGeom>
+          <a:noFill/>
+        </p:spPr>
+        <p:txBody>
+          <a:bodyPr wrap="square" lIns="0" tIns="0" rIns="0" bIns="0" anchor="ctr"/>
+          <a:lstStyle/>
+          <a:p>
+            <a:pPr marL="0" indent="0" algn="ctr">
+              <a:buNone/>
+            </a:pPr>
+            <a:r>
+              <a:rPr lang="en-US" sz="1200" i="1">
+                <a:solidFill>
+                  <a:srgbClr val="64748B"/>
+                </a:solidFill>
+                <a:latin typeface="Calibri"/>
+                <a:ea typeface="Calibri"/>
+                <a:cs typeface="Calibri"/>
+              </a:rPr>
+              <a:t>Sumber dan SQL boleh dipush; credential dan benchmark lokal tidak</a:t>
+            </a:r>
+            <a:endParaRPr sz="1200"/>
+          </a:p>
+        </p:txBody>
+      </p:sp>
+      <p:sp>
+        <p:nvSpPr>
+          <p:cNvPr id="10" name="Shape 6">
+            <a:extLst>
+              <a:ext uri="{FF2B5EF4-FFF2-40B4-BE49-F238E27FC236}">
+                <a16:creationId xmlns:a16="http://schemas.microsoft.com/office/drawing/2014/main" id="{1998E377-C26D-41C5-A62D-C594E0E7AB74}"/>
+              </a:ext>
+            </a:extLst>
+          </p:cNvPr>
+          <p:cNvSpPr>
+            <a:spLocks noGrp="1"/>
+          </p:cNvSpPr>
+          <p:nvPr/>
+        </p:nvSpPr>
+        <p:spPr>
+          <a:xfrm>
+            <a:off x="457200" y="1417320"/>
+            <a:ext cx="5577840" cy="4754880"/>
+          </a:xfrm>
+          <a:prstGeom prst="rect">
+            <a:avLst/>
+          </a:prstGeom>
+          <a:solidFill>
+            <a:srgbClr val="1E293B"/>
+          </a:solidFill>
+          <a:ln w="12700">
+            <a:solidFill>
+              <a:srgbClr val="0F172A"/>
+            </a:solidFill>
+            <a:prstDash val="solid"/>
+          </a:ln>
+        </p:spPr>
+        <p:txBody>
+          <a:bodyPr/>
+          <a:p/>
+        </p:txBody>
+      </p:sp>
+      <p:sp>
+        <p:nvSpPr>
+          <p:cNvPr id="11" name="Shape 7">
+            <a:extLst>
+              <a:ext uri="{FF2B5EF4-FFF2-40B4-BE49-F238E27FC236}">
+                <a16:creationId xmlns:a16="http://schemas.microsoft.com/office/drawing/2014/main" id="{9615A271-5B91-428F-82D6-D2F273DC3156}"/>
+              </a:ext>
+            </a:extLst>
+          </p:cNvPr>
+          <p:cNvSpPr>
+            <a:spLocks noGrp="1"/>
+          </p:cNvSpPr>
+          <p:nvPr/>
+        </p:nvSpPr>
+        <p:spPr>
+          <a:xfrm>
+            <a:off x="457200" y="1417320"/>
+            <a:ext cx="5577840" cy="274320"/>
+          </a:xfrm>
+          <a:prstGeom prst="rect">
+            <a:avLst/>
+          </a:prstGeom>
+          <a:solidFill>
+            <a:srgbClr val="0F172A"/>
+          </a:solidFill>
+          <a:ln w="12700">
+            <a:solidFill>
+              <a:srgbClr val="0F172A"/>
+            </a:solidFill>
+            <a:prstDash val="solid"/>
+          </a:ln>
+        </p:spPr>
+        <p:txBody>
+          <a:bodyPr/>
+          <a:p/>
+        </p:txBody>
+      </p:sp>
+      <p:sp>
+        <p:nvSpPr>
+          <p:cNvPr id="12" name="Shape 8">
+            <a:extLst>
+              <a:ext uri="{FF2B5EF4-FFF2-40B4-BE49-F238E27FC236}">
+                <a16:creationId xmlns:a16="http://schemas.microsoft.com/office/drawing/2014/main" id="{4DC7F0B0-1BB7-4B86-B7A8-78D1387F315D}"/>
+              </a:ext>
+            </a:extLst>
+          </p:cNvPr>
+          <p:cNvSpPr>
+            <a:spLocks noGrp="1"/>
+          </p:cNvSpPr>
+          <p:nvPr/>
+        </p:nvSpPr>
+        <p:spPr>
+          <a:xfrm>
+            <a:off x="548640" y="1499616"/>
+            <a:ext cx="109728" cy="109728"/>
+          </a:xfrm>
+          <a:prstGeom prst="ellipse">
+            <a:avLst/>
+          </a:prstGeom>
+          <a:solidFill>
+            <a:srgbClr val="EF4444"/>
+          </a:solidFill>
+          <a:ln w="12700">
+            <a:solidFill>
+              <a:srgbClr val="EF4444"/>
+            </a:solidFill>
+            <a:prstDash val="solid"/>
+          </a:ln>
+        </p:spPr>
+        <p:txBody>
+          <a:bodyPr/>
+          <a:p/>
+        </p:txBody>
+      </p:sp>
+      <p:sp>
+        <p:nvSpPr>
+          <p:cNvPr id="13" name="Shape 9">
+            <a:extLst>
+              <a:ext uri="{FF2B5EF4-FFF2-40B4-BE49-F238E27FC236}">
+                <a16:creationId xmlns:a16="http://schemas.microsoft.com/office/drawing/2014/main" id="{ED9BC19C-3C17-44CF-BE11-E1047B10275D}"/>
+              </a:ext>
+            </a:extLst>
+          </p:cNvPr>
+          <p:cNvSpPr>
+            <a:spLocks noGrp="1"/>
+          </p:cNvSpPr>
+          <p:nvPr/>
+        </p:nvSpPr>
+        <p:spPr>
+          <a:xfrm>
+            <a:off x="685800" y="1499616"/>
+            <a:ext cx="109728" cy="109728"/>
+          </a:xfrm>
+          <a:prstGeom prst="ellipse">
+            <a:avLst/>
+          </a:prstGeom>
+          <a:solidFill>
+            <a:srgbClr val="F59E0B"/>
+          </a:solidFill>
+          <a:ln w="12700">
+            <a:solidFill>
+              <a:srgbClr val="F59E0B"/>
+            </a:solidFill>
+            <a:prstDash val="solid"/>
+          </a:ln>
+        </p:spPr>
+        <p:txBody>
+          <a:bodyPr/>
+          <a:p/>
+        </p:txBody>
+      </p:sp>
+      <p:sp>
+        <p:nvSpPr>
+          <p:cNvPr id="14" name="Shape 10">
+            <a:extLst>
+              <a:ext uri="{FF2B5EF4-FFF2-40B4-BE49-F238E27FC236}">
+                <a16:creationId xmlns:a16="http://schemas.microsoft.com/office/drawing/2014/main" id="{7BA2CA47-0A5C-4334-A1B7-262D9E9FD124}"/>
+              </a:ext>
+            </a:extLst>
+          </p:cNvPr>
+          <p:cNvSpPr>
+            <a:spLocks noGrp="1"/>
+          </p:cNvSpPr>
+          <p:nvPr/>
+        </p:nvSpPr>
+        <p:spPr>
+          <a:xfrm>
+            <a:off x="822960" y="1499616"/>
+            <a:ext cx="109728" cy="109728"/>
+          </a:xfrm>
+          <a:prstGeom prst="ellipse">
+            <a:avLst/>
+          </a:prstGeom>
+          <a:solidFill>
+            <a:srgbClr val="10B981"/>
+          </a:solidFill>
+          <a:ln w="12700">
+            <a:solidFill>
+              <a:srgbClr val="10B981"/>
+            </a:solidFill>
+            <a:prstDash val="solid"/>
+          </a:ln>
+        </p:spPr>
+        <p:txBody>
+          <a:bodyPr/>
+          <a:p/>
+        </p:txBody>
       </p:sp>
       <p:sp>
         <p:nvSpPr>
@@ -14816,6 +17536,10 @@
             <a:prstDash val="solid"/>
           </a:ln>
         </p:spPr>
+        <p:txBody>
+          <a:bodyPr/>
+          <a:p/>
+        </p:txBody>
       </p:sp>
       <p:sp>
         <p:nvSpPr>
@@ -14849,6 +17573,10 @@
             <a:prstDash val="solid"/>
           </a:ln>
         </p:spPr>
+        <p:txBody>
+          <a:bodyPr/>
+          <a:p/>
+        </p:txBody>
       </p:sp>
       <p:sp>
         <p:nvSpPr>
@@ -14882,6 +17610,10 @@
             <a:prstDash val="solid"/>
           </a:ln>
         </p:spPr>
+        <p:txBody>
+          <a:bodyPr/>
+          <a:p/>
+        </p:txBody>
       </p:sp>
       <p:sp>
         <p:nvSpPr>
@@ -14915,6 +17647,10 @@
             <a:prstDash val="solid"/>
           </a:ln>
         </p:spPr>
+        <p:txBody>
+          <a:bodyPr/>
+          <a:p/>
+        </p:txBody>
       </p:sp>
       <p:sp>
         <p:nvSpPr>
@@ -14948,6 +17684,10 @@
             <a:prstDash val="solid"/>
           </a:ln>
         </p:spPr>
+        <p:txBody>
+          <a:bodyPr/>
+          <a:p/>
+        </p:txBody>
       </p:sp>
       <p:sp>
         <p:nvSpPr>
@@ -15226,6 +17966,10 @@
             <a:prstDash val="solid"/>
           </a:ln>
         </p:spPr>
+        <p:txBody>
+          <a:bodyPr/>
+          <a:p/>
+        </p:txBody>
       </p:sp>
       <p:pic>
         <p:nvPicPr>
@@ -15305,6 +18049,10 @@
             <a:prstDash val="solid"/>
           </a:ln>
         </p:spPr>
+        <p:txBody>
+          <a:bodyPr/>
+          <a:p/>
+        </p:txBody>
       </p:sp>
       <p:sp>
         <p:nvSpPr>
@@ -15430,6 +18178,10 @@
             <a:prstDash val="solid"/>
           </a:ln>
         </p:spPr>
+        <p:txBody>
+          <a:bodyPr/>
+          <a:p/>
+        </p:txBody>
       </p:sp>
       <p:sp>
         <p:nvSpPr>
@@ -15463,6 +18215,10 @@
             <a:prstDash val="solid"/>
           </a:ln>
         </p:spPr>
+        <p:txBody>
+          <a:bodyPr/>
+          <a:p/>
+        </p:txBody>
       </p:sp>
       <p:sp>
         <p:nvSpPr>
@@ -15496,6 +18252,10 @@
             <a:prstDash val="solid"/>
           </a:ln>
         </p:spPr>
+        <p:txBody>
+          <a:bodyPr/>
+          <a:p/>
+        </p:txBody>
       </p:sp>
       <p:sp>
         <p:nvSpPr>
@@ -15529,6 +18289,10 @@
             <a:prstDash val="solid"/>
           </a:ln>
         </p:spPr>
+        <p:txBody>
+          <a:bodyPr/>
+          <a:p/>
+        </p:txBody>
       </p:sp>
       <p:sp>
         <p:nvSpPr>
@@ -15562,6 +18326,10 @@
             <a:prstDash val="solid"/>
           </a:ln>
         </p:spPr>
+        <p:txBody>
+          <a:bodyPr/>
+          <a:p/>
+        </p:txBody>
       </p:sp>
       <p:sp>
         <p:nvSpPr>
@@ -15712,6 +18480,10 @@
             <a:prstDash val="solid"/>
           </a:ln>
         </p:spPr>
+        <p:txBody>
+          <a:bodyPr/>
+          <a:p/>
+        </p:txBody>
       </p:sp>
       <p:sp>
         <p:nvSpPr>
@@ -15745,6 +18517,10 @@
             <a:prstDash val="solid"/>
           </a:ln>
         </p:spPr>
+        <p:txBody>
+          <a:bodyPr/>
+          <a:p/>
+        </p:txBody>
       </p:sp>
       <p:sp>
         <p:nvSpPr>
@@ -15778,6 +18554,10 @@
             <a:prstDash val="solid"/>
           </a:ln>
         </p:spPr>
+        <p:txBody>
+          <a:bodyPr/>
+          <a:p/>
+        </p:txBody>
       </p:sp>
       <p:sp>
         <p:nvSpPr>
@@ -15811,6 +18591,10 @@
             <a:prstDash val="solid"/>
           </a:ln>
         </p:spPr>
+        <p:txBody>
+          <a:bodyPr/>
+          <a:p/>
+        </p:txBody>
       </p:sp>
       <p:sp>
         <p:nvSpPr>
@@ -15844,6 +18628,10 @@
             <a:prstDash val="solid"/>
           </a:ln>
         </p:spPr>
+        <p:txBody>
+          <a:bodyPr/>
+          <a:p/>
+        </p:txBody>
       </p:sp>
       <p:sp>
         <p:nvSpPr>
@@ -16122,6 +18910,10 @@
             <a:prstDash val="solid"/>
           </a:ln>
         </p:spPr>
+        <p:txBody>
+          <a:bodyPr/>
+          <a:p/>
+        </p:txBody>
       </p:sp>
       <p:pic>
         <p:nvPicPr>
@@ -16201,6 +18993,10 @@
             <a:prstDash val="solid"/>
           </a:ln>
         </p:spPr>
+        <p:txBody>
+          <a:bodyPr/>
+          <a:p/>
+        </p:txBody>
       </p:sp>
       <p:sp>
         <p:nvSpPr>
@@ -16326,6 +19122,10 @@
             <a:prstDash val="solid"/>
           </a:ln>
         </p:spPr>
+        <p:txBody>
+          <a:bodyPr/>
+          <a:p/>
+        </p:txBody>
       </p:sp>
       <p:sp>
         <p:nvSpPr>
@@ -16930,6 +19730,10 @@
             <a:prstDash val="solid"/>
           </a:ln>
         </p:spPr>
+        <p:txBody>
+          <a:bodyPr/>
+          <a:p/>
+        </p:txBody>
       </p:sp>
       <p:sp>
         <p:nvSpPr>
@@ -17047,6 +19851,10 @@
             <a:prstDash val="solid"/>
           </a:ln>
         </p:spPr>
+        <p:txBody>
+          <a:bodyPr/>
+          <a:p/>
+        </p:txBody>
       </p:sp>
       <p:sp>
         <p:nvSpPr>
@@ -17297,6 +20105,10 @@
             <a:prstDash val="solid"/>
           </a:ln>
         </p:spPr>
+        <p:txBody>
+          <a:bodyPr/>
+          <a:p/>
+        </p:txBody>
       </p:sp>
       <p:pic>
         <p:nvPicPr>
@@ -17376,6 +20188,10 @@
             <a:prstDash val="solid"/>
           </a:ln>
         </p:spPr>
+        <p:txBody>
+          <a:bodyPr/>
+          <a:p/>
+        </p:txBody>
       </p:sp>
       <p:sp>
         <p:nvSpPr>
@@ -17501,6 +20317,10 @@
             <a:prstDash val="solid"/>
           </a:ln>
         </p:spPr>
+        <p:txBody>
+          <a:bodyPr/>
+          <a:p/>
+        </p:txBody>
       </p:sp>
       <p:sp>
         <p:nvSpPr>
@@ -18105,6 +20925,10 @@
             <a:prstDash val="solid"/>
           </a:ln>
         </p:spPr>
+        <p:txBody>
+          <a:bodyPr/>
+          <a:p/>
+        </p:txBody>
       </p:sp>
       <p:sp>
         <p:nvSpPr>
@@ -18222,6 +21046,10 @@
             <a:prstDash val="solid"/>
           </a:ln>
         </p:spPr>
+        <p:txBody>
+          <a:bodyPr/>
+          <a:p/>
+        </p:txBody>
       </p:sp>
       <p:sp>
         <p:nvSpPr>
@@ -18472,6 +21300,10 @@
             <a:prstDash val="solid"/>
           </a:ln>
         </p:spPr>
+        <p:txBody>
+          <a:bodyPr/>
+          <a:p/>
+        </p:txBody>
       </p:sp>
       <p:pic>
         <p:nvPicPr>
@@ -18551,6 +21383,10 @@
             <a:prstDash val="solid"/>
           </a:ln>
         </p:spPr>
+        <p:txBody>
+          <a:bodyPr/>
+          <a:p/>
+        </p:txBody>
       </p:sp>
       <p:sp>
         <p:nvSpPr>
@@ -18676,6 +21512,10 @@
             <a:prstDash val="solid"/>
           </a:ln>
         </p:spPr>
+        <p:txBody>
+          <a:bodyPr/>
+          <a:p/>
+        </p:txBody>
       </p:sp>
       <p:sp>
         <p:nvSpPr>
@@ -18709,6 +21549,10 @@
             <a:prstDash val="solid"/>
           </a:ln>
         </p:spPr>
+        <p:txBody>
+          <a:bodyPr/>
+          <a:p/>
+        </p:txBody>
       </p:sp>
       <p:sp>
         <p:nvSpPr>
@@ -18742,6 +21586,10 @@
             <a:prstDash val="solid"/>
           </a:ln>
         </p:spPr>
+        <p:txBody>
+          <a:bodyPr/>
+          <a:p/>
+        </p:txBody>
       </p:sp>
       <p:sp>
         <p:nvSpPr>
@@ -18775,6 +21623,10 @@
             <a:prstDash val="solid"/>
           </a:ln>
         </p:spPr>
+        <p:txBody>
+          <a:bodyPr/>
+          <a:p/>
+        </p:txBody>
       </p:sp>
       <p:sp>
         <p:nvSpPr>
@@ -18808,6 +21660,10 @@
             <a:prstDash val="solid"/>
           </a:ln>
         </p:spPr>
+        <p:txBody>
+          <a:bodyPr/>
+          <a:p/>
+        </p:txBody>
       </p:sp>
       <p:sp>
         <p:nvSpPr>
@@ -18956,6 +21812,10 @@
             <a:prstDash val="solid"/>
           </a:ln>
         </p:spPr>
+        <p:txBody>
+          <a:bodyPr/>
+          <a:p/>
+        </p:txBody>
       </p:sp>
       <p:sp>
         <p:nvSpPr>
@@ -18989,6 +21849,10 @@
             <a:prstDash val="solid"/>
           </a:ln>
         </p:spPr>
+        <p:txBody>
+          <a:bodyPr/>
+          <a:p/>
+        </p:txBody>
       </p:sp>
       <p:sp>
         <p:nvSpPr>
@@ -19022,6 +21886,10 @@
             <a:prstDash val="solid"/>
           </a:ln>
         </p:spPr>
+        <p:txBody>
+          <a:bodyPr/>
+          <a:p/>
+        </p:txBody>
       </p:sp>
       <p:sp>
         <p:nvSpPr>
@@ -19055,6 +21923,10 @@
             <a:prstDash val="solid"/>
           </a:ln>
         </p:spPr>
+        <p:txBody>
+          <a:bodyPr/>
+          <a:p/>
+        </p:txBody>
       </p:sp>
       <p:sp>
         <p:nvSpPr>
@@ -19088,6 +21960,10 @@
             <a:prstDash val="solid"/>
           </a:ln>
         </p:spPr>
+        <p:txBody>
+          <a:bodyPr/>
+          <a:p/>
+        </p:txBody>
       </p:sp>
       <p:sp>
         <p:nvSpPr>
@@ -19366,6 +22242,10 @@
             <a:prstDash val="solid"/>
           </a:ln>
         </p:spPr>
+        <p:txBody>
+          <a:bodyPr/>
+          <a:p/>
+        </p:txBody>
       </p:sp>
       <p:pic>
         <p:nvPicPr>
@@ -19445,6 +22325,10 @@
             <a:prstDash val="solid"/>
           </a:ln>
         </p:spPr>
+        <p:txBody>
+          <a:bodyPr/>
+          <a:p/>
+        </p:txBody>
       </p:sp>
       <p:sp>
         <p:nvSpPr>
@@ -19570,6 +22454,10 @@
             <a:prstDash val="solid"/>
           </a:ln>
         </p:spPr>
+        <p:txBody>
+          <a:bodyPr/>
+          <a:p/>
+        </p:txBody>
       </p:sp>
       <p:sp>
         <p:nvSpPr>
@@ -20174,6 +23062,10 @@
             <a:prstDash val="solid"/>
           </a:ln>
         </p:spPr>
+        <p:txBody>
+          <a:bodyPr/>
+          <a:p/>
+        </p:txBody>
       </p:sp>
       <p:sp>
         <p:nvSpPr>
@@ -20291,6 +23183,10 @@
             <a:prstDash val="solid"/>
           </a:ln>
         </p:spPr>
+        <p:txBody>
+          <a:bodyPr/>
+          <a:p/>
+        </p:txBody>
       </p:sp>
       <p:sp>
         <p:nvSpPr>
@@ -20541,6 +23437,10 @@
             <a:prstDash val="solid"/>
           </a:ln>
         </p:spPr>
+        <p:txBody>
+          <a:bodyPr/>
+          <a:p/>
+        </p:txBody>
       </p:sp>
       <p:pic>
         <p:nvPicPr>
@@ -20620,6 +23520,10 @@
             <a:prstDash val="solid"/>
           </a:ln>
         </p:spPr>
+        <p:txBody>
+          <a:bodyPr/>
+          <a:p/>
+        </p:txBody>
       </p:sp>
       <p:sp>
         <p:nvSpPr>
@@ -20745,6 +23649,10 @@
             <a:prstDash val="solid"/>
           </a:ln>
         </p:spPr>
+        <p:txBody>
+          <a:bodyPr/>
+          <a:p/>
+        </p:txBody>
       </p:sp>
       <p:sp>
         <p:nvSpPr>
@@ -20778,6 +23686,10 @@
             <a:prstDash val="solid"/>
           </a:ln>
         </p:spPr>
+        <p:txBody>
+          <a:bodyPr/>
+          <a:p/>
+        </p:txBody>
       </p:sp>
       <p:sp>
         <p:nvSpPr>
@@ -20811,6 +23723,10 @@
             <a:prstDash val="solid"/>
           </a:ln>
         </p:spPr>
+        <p:txBody>
+          <a:bodyPr/>
+          <a:p/>
+        </p:txBody>
       </p:sp>
       <p:sp>
         <p:nvSpPr>
@@ -20844,6 +23760,10 @@
             <a:prstDash val="solid"/>
           </a:ln>
         </p:spPr>
+        <p:txBody>
+          <a:bodyPr/>
+          <a:p/>
+        </p:txBody>
       </p:sp>
       <p:sp>
         <p:nvSpPr>
@@ -20877,6 +23797,10 @@
             <a:prstDash val="solid"/>
           </a:ln>
         </p:spPr>
+        <p:txBody>
+          <a:bodyPr/>
+          <a:p/>
+        </p:txBody>
       </p:sp>
       <p:sp>
         <p:nvSpPr>
@@ -21023,6 +23947,10 @@
             <a:prstDash val="solid"/>
           </a:ln>
         </p:spPr>
+        <p:txBody>
+          <a:bodyPr/>
+          <a:p/>
+        </p:txBody>
       </p:sp>
       <p:sp>
         <p:nvSpPr>
@@ -21056,6 +23984,10 @@
             <a:prstDash val="solid"/>
           </a:ln>
         </p:spPr>
+        <p:txBody>
+          <a:bodyPr/>
+          <a:p/>
+        </p:txBody>
       </p:sp>
       <p:sp>
         <p:nvSpPr>
@@ -21089,6 +24021,10 @@
             <a:prstDash val="solid"/>
           </a:ln>
         </p:spPr>
+        <p:txBody>
+          <a:bodyPr/>
+          <a:p/>
+        </p:txBody>
       </p:sp>
       <p:sp>
         <p:nvSpPr>
@@ -21122,6 +24058,10 @@
             <a:prstDash val="solid"/>
           </a:ln>
         </p:spPr>
+        <p:txBody>
+          <a:bodyPr/>
+          <a:p/>
+        </p:txBody>
       </p:sp>
       <p:sp>
         <p:nvSpPr>
@@ -21155,6 +24095,10 @@
             <a:prstDash val="solid"/>
           </a:ln>
         </p:spPr>
+        <p:txBody>
+          <a:bodyPr/>
+          <a:p/>
+        </p:txBody>
       </p:sp>
       <p:sp>
         <p:nvSpPr>
@@ -21434,6 +24378,10 @@
             <a:prstDash val="solid"/>
           </a:ln>
         </p:spPr>
+        <p:txBody>
+          <a:bodyPr/>
+          <a:p/>
+        </p:txBody>
       </p:sp>
       <p:pic>
         <p:nvPicPr>
@@ -21513,6 +24461,10 @@
             <a:prstDash val="solid"/>
           </a:ln>
         </p:spPr>
+        <p:txBody>
+          <a:bodyPr/>
+          <a:p/>
+        </p:txBody>
       </p:sp>
       <p:sp>
         <p:nvSpPr>
@@ -21638,6 +24590,10 @@
             <a:prstDash val="solid"/>
           </a:ln>
         </p:spPr>
+        <p:txBody>
+          <a:bodyPr/>
+          <a:p/>
+        </p:txBody>
       </p:sp>
       <p:sp>
         <p:nvSpPr>
@@ -22242,6 +25198,10 @@
             <a:prstDash val="solid"/>
           </a:ln>
         </p:spPr>
+        <p:txBody>
+          <a:bodyPr/>
+          <a:p/>
+        </p:txBody>
       </p:sp>
       <p:sp>
         <p:nvSpPr>
@@ -22359,6 +25319,10 @@
             <a:prstDash val="solid"/>
           </a:ln>
         </p:spPr>
+        <p:txBody>
+          <a:bodyPr/>
+          <a:p/>
+        </p:txBody>
       </p:sp>
       <p:sp>
         <p:nvSpPr>

--- a/slides/LAB11_RAG_pgvector_Bukti_Live.pptx
+++ b/slides/LAB11_RAG_pgvector_Bukti_Live.pptx
@@ -2,34 +2,34 @@
 <file path=ppt/presentation.xml><?xml version="1.0" encoding="utf-8"?>
 <p:presentation xmlns:p="http://schemas.openxmlformats.org/presentationml/2006/main">
   <p:sldMasterIdLst>
-    <p:sldMasterId xmlns:r="http://schemas.openxmlformats.org/officeDocument/2006/relationships" id="2147483648" r:id="Rdcd823dab9214a00"/>
+    <p:sldMasterId xmlns:r="http://schemas.openxmlformats.org/officeDocument/2006/relationships" id="2147483648" r:id="Rd34aacb498e24524"/>
   </p:sldMasterIdLst>
   <p:notesMasterIdLst>
-    <p:notesMasterId xmlns:r="http://schemas.openxmlformats.org/officeDocument/2006/relationships" r:id="Rcbcb1af9191b444e"/>
+    <p:notesMasterId xmlns:r="http://schemas.openxmlformats.org/officeDocument/2006/relationships" r:id="Rad67580782a04854"/>
   </p:notesMasterIdLst>
   <p:sldIdLst>
-    <p:sldId xmlns:r="http://schemas.openxmlformats.org/officeDocument/2006/relationships" id="256" r:id="Rb81511b671e14548"/>
-    <p:sldId xmlns:r="http://schemas.openxmlformats.org/officeDocument/2006/relationships" id="257" r:id="Re9280062d0ff429d"/>
-    <p:sldId xmlns:r="http://schemas.openxmlformats.org/officeDocument/2006/relationships" id="258" r:id="Rcf4ab13e8d314143"/>
-    <p:sldId xmlns:r="http://schemas.openxmlformats.org/officeDocument/2006/relationships" id="259" r:id="R6a1a4585d9f44b2f"/>
-    <p:sldId xmlns:r="http://schemas.openxmlformats.org/officeDocument/2006/relationships" id="260" r:id="R654e691c82e74011"/>
-    <p:sldId xmlns:r="http://schemas.openxmlformats.org/officeDocument/2006/relationships" id="261" r:id="Rdd2e95c38cc64a8c"/>
-    <p:sldId xmlns:r="http://schemas.openxmlformats.org/officeDocument/2006/relationships" id="262" r:id="R3d24dad58f314943"/>
-    <p:sldId xmlns:r="http://schemas.openxmlformats.org/officeDocument/2006/relationships" id="263" r:id="R42470436f76f4e26"/>
-    <p:sldId xmlns:r="http://schemas.openxmlformats.org/officeDocument/2006/relationships" id="264" r:id="Rbb45cda7278e4555"/>
-    <p:sldId xmlns:r="http://schemas.openxmlformats.org/officeDocument/2006/relationships" id="265" r:id="R5b423059b021420f"/>
-    <p:sldId xmlns:r="http://schemas.openxmlformats.org/officeDocument/2006/relationships" id="266" r:id="Ref6a6aae5cb64df9"/>
-    <p:sldId xmlns:r="http://schemas.openxmlformats.org/officeDocument/2006/relationships" id="267" r:id="R10a6e454159a448d"/>
-    <p:sldId xmlns:r="http://schemas.openxmlformats.org/officeDocument/2006/relationships" id="268" r:id="R6754dd0275ef4f43"/>
-    <p:sldId xmlns:r="http://schemas.openxmlformats.org/officeDocument/2006/relationships" id="269" r:id="R2135302bc45f447b"/>
-    <p:sldId xmlns:r="http://schemas.openxmlformats.org/officeDocument/2006/relationships" id="270" r:id="Rb7ea79c046ea4c5a"/>
-    <p:sldId xmlns:r="http://schemas.openxmlformats.org/officeDocument/2006/relationships" id="271" r:id="R6916491a24b142d5"/>
-    <p:sldId xmlns:r="http://schemas.openxmlformats.org/officeDocument/2006/relationships" id="272" r:id="Rafab212e0a1a45c3"/>
-    <p:sldId xmlns:r="http://schemas.openxmlformats.org/officeDocument/2006/relationships" id="273" r:id="R2185f524686f4263"/>
-    <p:sldId xmlns:r="http://schemas.openxmlformats.org/officeDocument/2006/relationships" id="274" r:id="R6dc759a54100490c"/>
-    <p:sldId xmlns:r="http://schemas.openxmlformats.org/officeDocument/2006/relationships" id="275" r:id="Rf45198361ebd41e7"/>
-    <p:sldId xmlns:r="http://schemas.openxmlformats.org/officeDocument/2006/relationships" id="276" r:id="R463c9c083e9a4b91"/>
-    <p:sldId xmlns:r="http://schemas.openxmlformats.org/officeDocument/2006/relationships" id="277" r:id="R17cdf37e27234d10"/>
+    <p:sldId xmlns:r="http://schemas.openxmlformats.org/officeDocument/2006/relationships" id="256" r:id="R01ad9adc3ff14004"/>
+    <p:sldId xmlns:r="http://schemas.openxmlformats.org/officeDocument/2006/relationships" id="257" r:id="Re63b4e83ea3944ed"/>
+    <p:sldId xmlns:r="http://schemas.openxmlformats.org/officeDocument/2006/relationships" id="258" r:id="Rac5c6e320bdc462f"/>
+    <p:sldId xmlns:r="http://schemas.openxmlformats.org/officeDocument/2006/relationships" id="259" r:id="R536e3b6666704173"/>
+    <p:sldId xmlns:r="http://schemas.openxmlformats.org/officeDocument/2006/relationships" id="260" r:id="R00c8aa9b352c482d"/>
+    <p:sldId xmlns:r="http://schemas.openxmlformats.org/officeDocument/2006/relationships" id="261" r:id="R96b3b192f41c447e"/>
+    <p:sldId xmlns:r="http://schemas.openxmlformats.org/officeDocument/2006/relationships" id="262" r:id="R48cb029463774f8c"/>
+    <p:sldId xmlns:r="http://schemas.openxmlformats.org/officeDocument/2006/relationships" id="263" r:id="R3dcd17cf509547ff"/>
+    <p:sldId xmlns:r="http://schemas.openxmlformats.org/officeDocument/2006/relationships" id="264" r:id="R63680d51f15b48d6"/>
+    <p:sldId xmlns:r="http://schemas.openxmlformats.org/officeDocument/2006/relationships" id="265" r:id="R3ab3d375df1f42fd"/>
+    <p:sldId xmlns:r="http://schemas.openxmlformats.org/officeDocument/2006/relationships" id="266" r:id="R05cc608a3b4b4a02"/>
+    <p:sldId xmlns:r="http://schemas.openxmlformats.org/officeDocument/2006/relationships" id="267" r:id="Rf07f6346177144e6"/>
+    <p:sldId xmlns:r="http://schemas.openxmlformats.org/officeDocument/2006/relationships" id="268" r:id="R6c7337b3bd6148f6"/>
+    <p:sldId xmlns:r="http://schemas.openxmlformats.org/officeDocument/2006/relationships" id="269" r:id="Rb424d4173e374153"/>
+    <p:sldId xmlns:r="http://schemas.openxmlformats.org/officeDocument/2006/relationships" id="270" r:id="Rb402d6e8f89a4e36"/>
+    <p:sldId xmlns:r="http://schemas.openxmlformats.org/officeDocument/2006/relationships" id="271" r:id="R224c3d937a214a45"/>
+    <p:sldId xmlns:r="http://schemas.openxmlformats.org/officeDocument/2006/relationships" id="272" r:id="Rf1e848388ed14fb7"/>
+    <p:sldId xmlns:r="http://schemas.openxmlformats.org/officeDocument/2006/relationships" id="273" r:id="Rc57b19b0b8514f34"/>
+    <p:sldId xmlns:r="http://schemas.openxmlformats.org/officeDocument/2006/relationships" id="274" r:id="Ra406c520d7454966"/>
+    <p:sldId xmlns:r="http://schemas.openxmlformats.org/officeDocument/2006/relationships" id="275" r:id="R2b64e3f1f2774f92"/>
+    <p:sldId xmlns:r="http://schemas.openxmlformats.org/officeDocument/2006/relationships" id="276" r:id="Rf275db4c00d54efe"/>
+    <p:sldId xmlns:r="http://schemas.openxmlformats.org/officeDocument/2006/relationships" id="277" r:id="R28105399fbb243af"/>
   </p:sldIdLst>
   <p:sldSz cx="12192000" cy="6858000"/>
   <p:notesSz cx="6858000" cy="9144000"/>
@@ -1998,7 +1998,7 @@
   </p:cSld>
   <p:clrMap bg1="lt1" tx1="dk1" bg2="lt2" tx2="dk2" accent1="accent1" accent2="accent2" accent3="accent3" accent4="accent4" accent5="accent5" accent6="accent6" hlink="hlink" folHlink="folHlink"/>
   <p:sldLayoutIdLst>
-    <p:sldLayoutId xmlns:r="http://schemas.openxmlformats.org/officeDocument/2006/relationships" id="2147483649" r:id="R2404d73339204c88"/>
+    <p:sldLayoutId xmlns:r="http://schemas.openxmlformats.org/officeDocument/2006/relationships" id="2147483649" r:id="R1fd5b12af28946c6"/>
   </p:sldLayoutIdLst>
   <p:hf sldNum="0" hdr="0" ftr="0" dt="0"/>
   <p:txStyles>
@@ -2551,7 +2551,7 @@
     <p:bg>
       <p:bgPr>
         <a:blipFill xmlns:a="http://schemas.openxmlformats.org/drawingml/2006/main" rotWithShape="1">
-          <a:blip xmlns:r="http://schemas.openxmlformats.org/officeDocument/2006/relationships" r:embed="R138b1bf0b42c41f0">
+          <a:blip xmlns:r="http://schemas.openxmlformats.org/officeDocument/2006/relationships" r:embed="R766a8cb47ec546c0">
             <a:lum/>
           </a:blip>
           <a:srcRect l="0" t="0" r="0" b="0"/>
@@ -2579,7 +2579,7 @@
           <p:nvPr/>
         </p:nvPicPr>
         <p:blipFill>
-          <a:blip xmlns:r="http://schemas.openxmlformats.org/officeDocument/2006/relationships" xmlns:a="http://schemas.openxmlformats.org/drawingml/2006/main" r:embed="Ra6b26f65c5ee46cf"/>
+          <a:blip xmlns:r="http://schemas.openxmlformats.org/officeDocument/2006/relationships" xmlns:a="http://schemas.openxmlformats.org/drawingml/2006/main" r:embed="R3eee44ddd8ae44f2"/>
           <a:stretch xmlns:a="http://schemas.openxmlformats.org/drawingml/2006/main">
             <a:fillRect l="0" t="0" r="0" b="0"/>
           </a:stretch>
@@ -2603,7 +2603,7 @@
           <p:nvPr/>
         </p:nvPicPr>
         <p:blipFill>
-          <a:blip xmlns:r="http://schemas.openxmlformats.org/officeDocument/2006/relationships" xmlns:a="http://schemas.openxmlformats.org/drawingml/2006/main" r:embed="R7012c7feb75d4b4c"/>
+          <a:blip xmlns:r="http://schemas.openxmlformats.org/officeDocument/2006/relationships" xmlns:a="http://schemas.openxmlformats.org/drawingml/2006/main" r:embed="Rc80baa8735554fb5"/>
           <a:stretch xmlns:a="http://schemas.openxmlformats.org/drawingml/2006/main">
             <a:fillRect l="0" t="0" r="0" b="0"/>
           </a:stretch>
@@ -3192,7 +3192,7 @@
           <p:nvPr/>
         </p:nvPicPr>
         <p:blipFill>
-          <a:blip xmlns:r="http://schemas.openxmlformats.org/officeDocument/2006/relationships" xmlns:a="http://schemas.openxmlformats.org/drawingml/2006/main" r:embed="R12a19dbb876545d7"/>
+          <a:blip xmlns:r="http://schemas.openxmlformats.org/officeDocument/2006/relationships" xmlns:a="http://schemas.openxmlformats.org/drawingml/2006/main" r:embed="R79b331ffcc0d467f"/>
           <a:stretch xmlns:a="http://schemas.openxmlformats.org/drawingml/2006/main">
             <a:fillRect l="0" t="0" r="0" b="0"/>
           </a:stretch>
@@ -3216,7 +3216,7 @@
           <p:nvPr/>
         </p:nvPicPr>
         <p:blipFill>
-          <a:blip xmlns:r="http://schemas.openxmlformats.org/officeDocument/2006/relationships" xmlns:a="http://schemas.openxmlformats.org/drawingml/2006/main" r:embed="Re33bcf69e63d4d8b"/>
+          <a:blip xmlns:r="http://schemas.openxmlformats.org/officeDocument/2006/relationships" xmlns:a="http://schemas.openxmlformats.org/drawingml/2006/main" r:embed="R96806063ccfb4f2f"/>
           <a:stretch xmlns:a="http://schemas.openxmlformats.org/drawingml/2006/main">
             <a:fillRect l="0" t="0" r="0" b="0"/>
           </a:stretch>
@@ -4139,7 +4139,7 @@
           <p:nvPr/>
         </p:nvPicPr>
         <p:blipFill>
-          <a:blip xmlns:r="http://schemas.openxmlformats.org/officeDocument/2006/relationships" xmlns:a="http://schemas.openxmlformats.org/drawingml/2006/main" r:embed="R5e70577ff37a4f97"/>
+          <a:blip xmlns:r="http://schemas.openxmlformats.org/officeDocument/2006/relationships" xmlns:a="http://schemas.openxmlformats.org/drawingml/2006/main" r:embed="R2a4db55654a343f6"/>
           <a:stretch xmlns:a="http://schemas.openxmlformats.org/drawingml/2006/main">
             <a:fillRect l="0" t="0" r="0" b="0"/>
           </a:stretch>
@@ -4163,7 +4163,7 @@
           <p:nvPr/>
         </p:nvPicPr>
         <p:blipFill>
-          <a:blip xmlns:r="http://schemas.openxmlformats.org/officeDocument/2006/relationships" xmlns:a="http://schemas.openxmlformats.org/drawingml/2006/main" r:embed="Rc7443a6bda364dee"/>
+          <a:blip xmlns:r="http://schemas.openxmlformats.org/officeDocument/2006/relationships" xmlns:a="http://schemas.openxmlformats.org/drawingml/2006/main" r:embed="Rfcb68853a3184d63"/>
           <a:stretch xmlns:a="http://schemas.openxmlformats.org/drawingml/2006/main">
             <a:fillRect l="0" t="0" r="0" b="0"/>
           </a:stretch>
@@ -4399,7 +4399,7 @@
           <p:nvPr/>
         </p:nvPicPr>
         <p:blipFill>
-          <a:blip xmlns:r="http://schemas.openxmlformats.org/officeDocument/2006/relationships" xmlns:a="http://schemas.openxmlformats.org/drawingml/2006/main" r:embed="Rb847a6894fdc471b"/>
+          <a:blip xmlns:r="http://schemas.openxmlformats.org/officeDocument/2006/relationships" xmlns:a="http://schemas.openxmlformats.org/drawingml/2006/main" r:embed="Rd939c131b9384406"/>
           <a:stretch xmlns:a="http://schemas.openxmlformats.org/drawingml/2006/main">
             <a:fillRect l="0" t="0" r="0" b="0"/>
           </a:stretch>
@@ -4476,7 +4476,7 @@
           <p:nvPr/>
         </p:nvPicPr>
         <p:blipFill>
-          <a:blip xmlns:r="http://schemas.openxmlformats.org/officeDocument/2006/relationships" xmlns:a="http://schemas.openxmlformats.org/drawingml/2006/main" r:embed="Rf1024a12950e4e0f"/>
+          <a:blip xmlns:r="http://schemas.openxmlformats.org/officeDocument/2006/relationships" xmlns:a="http://schemas.openxmlformats.org/drawingml/2006/main" r:embed="R1baeafcc75ca42fe"/>
           <a:stretch xmlns:a="http://schemas.openxmlformats.org/drawingml/2006/main">
             <a:fillRect l="0" t="0" r="0" b="0"/>
           </a:stretch>
@@ -4553,7 +4553,7 @@
           <p:nvPr/>
         </p:nvPicPr>
         <p:blipFill>
-          <a:blip xmlns:r="http://schemas.openxmlformats.org/officeDocument/2006/relationships" xmlns:a="http://schemas.openxmlformats.org/drawingml/2006/main" r:embed="Rd47a29455790439f"/>
+          <a:blip xmlns:r="http://schemas.openxmlformats.org/officeDocument/2006/relationships" xmlns:a="http://schemas.openxmlformats.org/drawingml/2006/main" r:embed="R7a41e260437c4875"/>
           <a:stretch xmlns:a="http://schemas.openxmlformats.org/drawingml/2006/main">
             <a:fillRect l="0" t="0" r="0" b="0"/>
           </a:stretch>
@@ -4630,7 +4630,7 @@
           <p:nvPr/>
         </p:nvPicPr>
         <p:blipFill>
-          <a:blip xmlns:r="http://schemas.openxmlformats.org/officeDocument/2006/relationships" xmlns:a="http://schemas.openxmlformats.org/drawingml/2006/main" r:embed="R5c8f717f23244686"/>
+          <a:blip xmlns:r="http://schemas.openxmlformats.org/officeDocument/2006/relationships" xmlns:a="http://schemas.openxmlformats.org/drawingml/2006/main" r:embed="R92000b4dd8264ac2"/>
           <a:stretch xmlns:a="http://schemas.openxmlformats.org/drawingml/2006/main">
             <a:fillRect l="0" t="0" r="0" b="0"/>
           </a:stretch>
@@ -4707,7 +4707,7 @@
           <p:nvPr/>
         </p:nvPicPr>
         <p:blipFill>
-          <a:blip xmlns:r="http://schemas.openxmlformats.org/officeDocument/2006/relationships" xmlns:a="http://schemas.openxmlformats.org/drawingml/2006/main" r:embed="R303aedc0235848d1"/>
+          <a:blip xmlns:r="http://schemas.openxmlformats.org/officeDocument/2006/relationships" xmlns:a="http://schemas.openxmlformats.org/drawingml/2006/main" r:embed="Rd06d36b617ca484e"/>
           <a:stretch xmlns:a="http://schemas.openxmlformats.org/drawingml/2006/main">
             <a:fillRect l="0" t="0" r="0" b="0"/>
           </a:stretch>
@@ -4784,7 +4784,7 @@
           <p:nvPr/>
         </p:nvPicPr>
         <p:blipFill>
-          <a:blip xmlns:r="http://schemas.openxmlformats.org/officeDocument/2006/relationships" xmlns:a="http://schemas.openxmlformats.org/drawingml/2006/main" r:embed="R836da5f570304944"/>
+          <a:blip xmlns:r="http://schemas.openxmlformats.org/officeDocument/2006/relationships" xmlns:a="http://schemas.openxmlformats.org/drawingml/2006/main" r:embed="Ra3d8b5720a56435c"/>
           <a:stretch xmlns:a="http://schemas.openxmlformats.org/drawingml/2006/main">
             <a:fillRect l="0" t="0" r="0" b="0"/>
           </a:stretch>
@@ -4861,7 +4861,7 @@
           <p:nvPr/>
         </p:nvPicPr>
         <p:blipFill>
-          <a:blip xmlns:r="http://schemas.openxmlformats.org/officeDocument/2006/relationships" xmlns:a="http://schemas.openxmlformats.org/drawingml/2006/main" r:embed="R489f328d27d04274"/>
+          <a:blip xmlns:r="http://schemas.openxmlformats.org/officeDocument/2006/relationships" xmlns:a="http://schemas.openxmlformats.org/drawingml/2006/main" r:embed="R056063c4ac264eb4"/>
           <a:stretch xmlns:a="http://schemas.openxmlformats.org/drawingml/2006/main">
             <a:fillRect l="0" t="0" r="0" b="0"/>
           </a:stretch>
@@ -5151,7 +5151,7 @@
           <p:nvPr/>
         </p:nvPicPr>
         <p:blipFill>
-          <a:blip xmlns:r="http://schemas.openxmlformats.org/officeDocument/2006/relationships" xmlns:a="http://schemas.openxmlformats.org/drawingml/2006/main" r:embed="R8bacc3160658442b"/>
+          <a:blip xmlns:r="http://schemas.openxmlformats.org/officeDocument/2006/relationships" xmlns:a="http://schemas.openxmlformats.org/drawingml/2006/main" r:embed="R34d5f12f0ffd4738"/>
           <a:stretch xmlns:a="http://schemas.openxmlformats.org/drawingml/2006/main">
             <a:fillRect l="0" t="0" r="0" b="0"/>
           </a:stretch>
@@ -5334,7 +5334,7 @@
           <p:nvPr/>
         </p:nvPicPr>
         <p:blipFill>
-          <a:blip xmlns:r="http://schemas.openxmlformats.org/officeDocument/2006/relationships" xmlns:a="http://schemas.openxmlformats.org/drawingml/2006/main" r:embed="R2f5d4df64ad54640"/>
+          <a:blip xmlns:r="http://schemas.openxmlformats.org/officeDocument/2006/relationships" xmlns:a="http://schemas.openxmlformats.org/drawingml/2006/main" r:embed="R4f7a929398c54535"/>
           <a:stretch xmlns:a="http://schemas.openxmlformats.org/drawingml/2006/main">
             <a:fillRect l="0" t="0" r="0" b="0"/>
           </a:stretch>
@@ -5358,7 +5358,7 @@
           <p:nvPr/>
         </p:nvPicPr>
         <p:blipFill>
-          <a:blip xmlns:r="http://schemas.openxmlformats.org/officeDocument/2006/relationships" xmlns:a="http://schemas.openxmlformats.org/drawingml/2006/main" r:embed="R15555eaad5764e6b"/>
+          <a:blip xmlns:r="http://schemas.openxmlformats.org/officeDocument/2006/relationships" xmlns:a="http://schemas.openxmlformats.org/drawingml/2006/main" r:embed="R50286fdeca734280"/>
           <a:stretch xmlns:a="http://schemas.openxmlformats.org/drawingml/2006/main">
             <a:fillRect l="0" t="0" r="0" b="0"/>
           </a:stretch>
@@ -6285,7 +6285,7 @@
           <p:nvPr/>
         </p:nvPicPr>
         <p:blipFill>
-          <a:blip xmlns:r="http://schemas.openxmlformats.org/officeDocument/2006/relationships" xmlns:a="http://schemas.openxmlformats.org/drawingml/2006/main" r:embed="Rb8125d6b19b84597"/>
+          <a:blip xmlns:r="http://schemas.openxmlformats.org/officeDocument/2006/relationships" xmlns:a="http://schemas.openxmlformats.org/drawingml/2006/main" r:embed="R59c9622972bc4bab"/>
           <a:stretch xmlns:a="http://schemas.openxmlformats.org/drawingml/2006/main">
             <a:fillRect l="0" t="0" r="0" b="0"/>
           </a:stretch>
@@ -6309,7 +6309,7 @@
           <p:nvPr/>
         </p:nvPicPr>
         <p:blipFill>
-          <a:blip xmlns:r="http://schemas.openxmlformats.org/officeDocument/2006/relationships" xmlns:a="http://schemas.openxmlformats.org/drawingml/2006/main" r:embed="R45e4dae82e7a4b6f"/>
+          <a:blip xmlns:r="http://schemas.openxmlformats.org/officeDocument/2006/relationships" xmlns:a="http://schemas.openxmlformats.org/drawingml/2006/main" r:embed="R5f14d3cb34dc46df"/>
           <a:stretch xmlns:a="http://schemas.openxmlformats.org/drawingml/2006/main">
             <a:fillRect l="0" t="0" r="0" b="0"/>
           </a:stretch>
@@ -6545,7 +6545,7 @@
           <p:nvPr/>
         </p:nvPicPr>
         <p:blipFill>
-          <a:blip xmlns:r="http://schemas.openxmlformats.org/officeDocument/2006/relationships" xmlns:a="http://schemas.openxmlformats.org/drawingml/2006/main" r:embed="Rc6e2ea5306504d13"/>
+          <a:blip xmlns:r="http://schemas.openxmlformats.org/officeDocument/2006/relationships" xmlns:a="http://schemas.openxmlformats.org/drawingml/2006/main" r:embed="Rbd7d105dcaa541dc"/>
           <a:stretch xmlns:a="http://schemas.openxmlformats.org/drawingml/2006/main">
             <a:fillRect l="0" t="0" r="0" b="0"/>
           </a:stretch>
@@ -6622,7 +6622,7 @@
           <p:nvPr/>
         </p:nvPicPr>
         <p:blipFill>
-          <a:blip xmlns:r="http://schemas.openxmlformats.org/officeDocument/2006/relationships" xmlns:a="http://schemas.openxmlformats.org/drawingml/2006/main" r:embed="R3f1ca30cf38e4fb7"/>
+          <a:blip xmlns:r="http://schemas.openxmlformats.org/officeDocument/2006/relationships" xmlns:a="http://schemas.openxmlformats.org/drawingml/2006/main" r:embed="R1e07589da06146ec"/>
           <a:stretch xmlns:a="http://schemas.openxmlformats.org/drawingml/2006/main">
             <a:fillRect l="0" t="0" r="0" b="0"/>
           </a:stretch>
@@ -6699,7 +6699,7 @@
           <p:nvPr/>
         </p:nvPicPr>
         <p:blipFill>
-          <a:blip xmlns:r="http://schemas.openxmlformats.org/officeDocument/2006/relationships" xmlns:a="http://schemas.openxmlformats.org/drawingml/2006/main" r:embed="Rc8671f4ad04e42cb"/>
+          <a:blip xmlns:r="http://schemas.openxmlformats.org/officeDocument/2006/relationships" xmlns:a="http://schemas.openxmlformats.org/drawingml/2006/main" r:embed="R6bd37d065a50450c"/>
           <a:stretch xmlns:a="http://schemas.openxmlformats.org/drawingml/2006/main">
             <a:fillRect l="0" t="0" r="0" b="0"/>
           </a:stretch>
@@ -6776,7 +6776,7 @@
           <p:nvPr/>
         </p:nvPicPr>
         <p:blipFill>
-          <a:blip xmlns:r="http://schemas.openxmlformats.org/officeDocument/2006/relationships" xmlns:a="http://schemas.openxmlformats.org/drawingml/2006/main" r:embed="R225a9530247a449d"/>
+          <a:blip xmlns:r="http://schemas.openxmlformats.org/officeDocument/2006/relationships" xmlns:a="http://schemas.openxmlformats.org/drawingml/2006/main" r:embed="Rae22a790b7dc42e7"/>
           <a:stretch xmlns:a="http://schemas.openxmlformats.org/drawingml/2006/main">
             <a:fillRect l="0" t="0" r="0" b="0"/>
           </a:stretch>
@@ -6853,7 +6853,7 @@
           <p:nvPr/>
         </p:nvPicPr>
         <p:blipFill>
-          <a:blip xmlns:r="http://schemas.openxmlformats.org/officeDocument/2006/relationships" xmlns:a="http://schemas.openxmlformats.org/drawingml/2006/main" r:embed="R1c9e82fabe454a59"/>
+          <a:blip xmlns:r="http://schemas.openxmlformats.org/officeDocument/2006/relationships" xmlns:a="http://schemas.openxmlformats.org/drawingml/2006/main" r:embed="R1b3cfa09ed294751"/>
           <a:stretch xmlns:a="http://schemas.openxmlformats.org/drawingml/2006/main">
             <a:fillRect l="0" t="0" r="0" b="0"/>
           </a:stretch>
@@ -6930,7 +6930,7 @@
           <p:nvPr/>
         </p:nvPicPr>
         <p:blipFill>
-          <a:blip xmlns:r="http://schemas.openxmlformats.org/officeDocument/2006/relationships" xmlns:a="http://schemas.openxmlformats.org/drawingml/2006/main" r:embed="R02b619d7e1bb4ec5"/>
+          <a:blip xmlns:r="http://schemas.openxmlformats.org/officeDocument/2006/relationships" xmlns:a="http://schemas.openxmlformats.org/drawingml/2006/main" r:embed="Rbb196357833d4a51"/>
           <a:stretch xmlns:a="http://schemas.openxmlformats.org/drawingml/2006/main">
             <a:fillRect l="0" t="0" r="0" b="0"/>
           </a:stretch>
@@ -7007,7 +7007,7 @@
           <p:nvPr/>
         </p:nvPicPr>
         <p:blipFill>
-          <a:blip xmlns:r="http://schemas.openxmlformats.org/officeDocument/2006/relationships" xmlns:a="http://schemas.openxmlformats.org/drawingml/2006/main" r:embed="Rdb22e56db7654426"/>
+          <a:blip xmlns:r="http://schemas.openxmlformats.org/officeDocument/2006/relationships" xmlns:a="http://schemas.openxmlformats.org/drawingml/2006/main" r:embed="R34d0a1ae6d164745"/>
           <a:stretch xmlns:a="http://schemas.openxmlformats.org/drawingml/2006/main">
             <a:fillRect l="0" t="0" r="0" b="0"/>
           </a:stretch>
@@ -7297,7 +7297,7 @@
           <p:nvPr/>
         </p:nvPicPr>
         <p:blipFill>
-          <a:blip xmlns:r="http://schemas.openxmlformats.org/officeDocument/2006/relationships" xmlns:a="http://schemas.openxmlformats.org/drawingml/2006/main" r:embed="Rfc34e92e1e3b4f4d"/>
+          <a:blip xmlns:r="http://schemas.openxmlformats.org/officeDocument/2006/relationships" xmlns:a="http://schemas.openxmlformats.org/drawingml/2006/main" r:embed="Ref4f6b5732c74a2d"/>
           <a:stretch xmlns:a="http://schemas.openxmlformats.org/drawingml/2006/main">
             <a:fillRect l="0" t="0" r="0" b="0"/>
           </a:stretch>
@@ -7473,7 +7473,7 @@
           <p:nvPr/>
         </p:nvPicPr>
         <p:blipFill>
-          <a:blip xmlns:r="http://schemas.openxmlformats.org/officeDocument/2006/relationships" xmlns:a="http://schemas.openxmlformats.org/drawingml/2006/main" r:embed="R3fe989a4d7814569"/>
+          <a:blip xmlns:r="http://schemas.openxmlformats.org/officeDocument/2006/relationships" xmlns:a="http://schemas.openxmlformats.org/drawingml/2006/main" r:embed="Re8ebdf9a489f453c"/>
           <a:stretch xmlns:a="http://schemas.openxmlformats.org/drawingml/2006/main">
             <a:fillRect l="0" t="0" r="0" b="0"/>
           </a:stretch>
@@ -7497,7 +7497,7 @@
           <p:nvPr/>
         </p:nvPicPr>
         <p:blipFill>
-          <a:blip xmlns:r="http://schemas.openxmlformats.org/officeDocument/2006/relationships" xmlns:a="http://schemas.openxmlformats.org/drawingml/2006/main" r:embed="Rf6c42f0578da4eb8"/>
+          <a:blip xmlns:r="http://schemas.openxmlformats.org/officeDocument/2006/relationships" xmlns:a="http://schemas.openxmlformats.org/drawingml/2006/main" r:embed="R997d6c67cac74cb5"/>
           <a:stretch xmlns:a="http://schemas.openxmlformats.org/drawingml/2006/main">
             <a:fillRect l="0" t="0" r="0" b="0"/>
           </a:stretch>
@@ -7733,7 +7733,7 @@
           <p:nvPr/>
         </p:nvPicPr>
         <p:blipFill>
-          <a:blip xmlns:r="http://schemas.openxmlformats.org/officeDocument/2006/relationships" xmlns:a="http://schemas.openxmlformats.org/drawingml/2006/main" r:embed="Rc1bf0226dc484977"/>
+          <a:blip xmlns:r="http://schemas.openxmlformats.org/officeDocument/2006/relationships" xmlns:a="http://schemas.openxmlformats.org/drawingml/2006/main" r:embed="Ra7151d87f10d466b"/>
           <a:stretch xmlns:a="http://schemas.openxmlformats.org/drawingml/2006/main">
             <a:fillRect l="0" t="0" r="0" b="0"/>
           </a:stretch>
@@ -7810,7 +7810,7 @@
           <p:nvPr/>
         </p:nvPicPr>
         <p:blipFill>
-          <a:blip xmlns:r="http://schemas.openxmlformats.org/officeDocument/2006/relationships" xmlns:a="http://schemas.openxmlformats.org/drawingml/2006/main" r:embed="R0f7f406dccd54270"/>
+          <a:blip xmlns:r="http://schemas.openxmlformats.org/officeDocument/2006/relationships" xmlns:a="http://schemas.openxmlformats.org/drawingml/2006/main" r:embed="Rd7e995559fe24339"/>
           <a:stretch xmlns:a="http://schemas.openxmlformats.org/drawingml/2006/main">
             <a:fillRect l="0" t="0" r="0" b="0"/>
           </a:stretch>
@@ -7887,7 +7887,7 @@
           <p:nvPr/>
         </p:nvPicPr>
         <p:blipFill>
-          <a:blip xmlns:r="http://schemas.openxmlformats.org/officeDocument/2006/relationships" xmlns:a="http://schemas.openxmlformats.org/drawingml/2006/main" r:embed="Rcd583444f9344924"/>
+          <a:blip xmlns:r="http://schemas.openxmlformats.org/officeDocument/2006/relationships" xmlns:a="http://schemas.openxmlformats.org/drawingml/2006/main" r:embed="Radda1bff781d4186"/>
           <a:stretch xmlns:a="http://schemas.openxmlformats.org/drawingml/2006/main">
             <a:fillRect l="0" t="0" r="0" b="0"/>
           </a:stretch>
@@ -7964,7 +7964,7 @@
           <p:nvPr/>
         </p:nvPicPr>
         <p:blipFill>
-          <a:blip xmlns:r="http://schemas.openxmlformats.org/officeDocument/2006/relationships" xmlns:a="http://schemas.openxmlformats.org/drawingml/2006/main" r:embed="R1977beb45a8f422a"/>
+          <a:blip xmlns:r="http://schemas.openxmlformats.org/officeDocument/2006/relationships" xmlns:a="http://schemas.openxmlformats.org/drawingml/2006/main" r:embed="R6c9b4d0ac1784b87"/>
           <a:stretch xmlns:a="http://schemas.openxmlformats.org/drawingml/2006/main">
             <a:fillRect l="0" t="0" r="0" b="0"/>
           </a:stretch>
@@ -8041,7 +8041,7 @@
           <p:nvPr/>
         </p:nvPicPr>
         <p:blipFill>
-          <a:blip xmlns:r="http://schemas.openxmlformats.org/officeDocument/2006/relationships" xmlns:a="http://schemas.openxmlformats.org/drawingml/2006/main" r:embed="Rbc8ff49399ad4d03"/>
+          <a:blip xmlns:r="http://schemas.openxmlformats.org/officeDocument/2006/relationships" xmlns:a="http://schemas.openxmlformats.org/drawingml/2006/main" r:embed="Rf54316ba365b4ca0"/>
           <a:stretch xmlns:a="http://schemas.openxmlformats.org/drawingml/2006/main">
             <a:fillRect l="0" t="0" r="0" b="0"/>
           </a:stretch>
@@ -8118,7 +8118,7 @@
           <p:nvPr/>
         </p:nvPicPr>
         <p:blipFill>
-          <a:blip xmlns:r="http://schemas.openxmlformats.org/officeDocument/2006/relationships" xmlns:a="http://schemas.openxmlformats.org/drawingml/2006/main" r:embed="Rce5adaa216ea4b8b"/>
+          <a:blip xmlns:r="http://schemas.openxmlformats.org/officeDocument/2006/relationships" xmlns:a="http://schemas.openxmlformats.org/drawingml/2006/main" r:embed="R3188e6bc6ace42fa"/>
           <a:stretch xmlns:a="http://schemas.openxmlformats.org/drawingml/2006/main">
             <a:fillRect l="0" t="0" r="0" b="0"/>
           </a:stretch>
@@ -8195,7 +8195,7 @@
           <p:nvPr/>
         </p:nvPicPr>
         <p:blipFill>
-          <a:blip xmlns:r="http://schemas.openxmlformats.org/officeDocument/2006/relationships" xmlns:a="http://schemas.openxmlformats.org/drawingml/2006/main" r:embed="R7d74e704cb894400"/>
+          <a:blip xmlns:r="http://schemas.openxmlformats.org/officeDocument/2006/relationships" xmlns:a="http://schemas.openxmlformats.org/drawingml/2006/main" r:embed="R7f541625b00f4e23"/>
           <a:stretch xmlns:a="http://schemas.openxmlformats.org/drawingml/2006/main">
             <a:fillRect l="0" t="0" r="0" b="0"/>
           </a:stretch>
@@ -8485,7 +8485,7 @@
           <p:nvPr/>
         </p:nvPicPr>
         <p:blipFill>
-          <a:blip xmlns:r="http://schemas.openxmlformats.org/officeDocument/2006/relationships" xmlns:a="http://schemas.openxmlformats.org/drawingml/2006/main" r:embed="Rfbc5470499164f53"/>
+          <a:blip xmlns:r="http://schemas.openxmlformats.org/officeDocument/2006/relationships" xmlns:a="http://schemas.openxmlformats.org/drawingml/2006/main" r:embed="R91a7472fb901449c"/>
           <a:stretch xmlns:a="http://schemas.openxmlformats.org/drawingml/2006/main">
             <a:fillRect l="0" t="0" r="0" b="0"/>
           </a:stretch>
@@ -8661,7 +8661,7 @@
           <p:nvPr/>
         </p:nvPicPr>
         <p:blipFill>
-          <a:blip xmlns:r="http://schemas.openxmlformats.org/officeDocument/2006/relationships" xmlns:a="http://schemas.openxmlformats.org/drawingml/2006/main" r:embed="R9f252af690d34eda"/>
+          <a:blip xmlns:r="http://schemas.openxmlformats.org/officeDocument/2006/relationships" xmlns:a="http://schemas.openxmlformats.org/drawingml/2006/main" r:embed="R8d578938250b4f82"/>
           <a:stretch xmlns:a="http://schemas.openxmlformats.org/drawingml/2006/main">
             <a:fillRect l="0" t="0" r="0" b="0"/>
           </a:stretch>
@@ -8685,7 +8685,7 @@
           <p:nvPr/>
         </p:nvPicPr>
         <p:blipFill>
-          <a:blip xmlns:r="http://schemas.openxmlformats.org/officeDocument/2006/relationships" xmlns:a="http://schemas.openxmlformats.org/drawingml/2006/main" r:embed="Raf5589ac33db44e2"/>
+          <a:blip xmlns:r="http://schemas.openxmlformats.org/officeDocument/2006/relationships" xmlns:a="http://schemas.openxmlformats.org/drawingml/2006/main" r:embed="Raf5cbe3b254d4f2f"/>
           <a:stretch xmlns:a="http://schemas.openxmlformats.org/drawingml/2006/main">
             <a:fillRect l="0" t="0" r="0" b="0"/>
           </a:stretch>
@@ -8921,7 +8921,7 @@
           <p:nvPr/>
         </p:nvPicPr>
         <p:blipFill>
-          <a:blip xmlns:r="http://schemas.openxmlformats.org/officeDocument/2006/relationships" xmlns:a="http://schemas.openxmlformats.org/drawingml/2006/main" r:embed="Rf529d6b07a844a4c"/>
+          <a:blip xmlns:r="http://schemas.openxmlformats.org/officeDocument/2006/relationships" xmlns:a="http://schemas.openxmlformats.org/drawingml/2006/main" r:embed="Rcd04d762ddb84f7e"/>
           <a:stretch xmlns:a="http://schemas.openxmlformats.org/drawingml/2006/main">
             <a:fillRect l="0" t="0" r="0" b="0"/>
           </a:stretch>
@@ -8998,7 +8998,7 @@
           <p:nvPr/>
         </p:nvPicPr>
         <p:blipFill>
-          <a:blip xmlns:r="http://schemas.openxmlformats.org/officeDocument/2006/relationships" xmlns:a="http://schemas.openxmlformats.org/drawingml/2006/main" r:embed="Ra25d09802726456a"/>
+          <a:blip xmlns:r="http://schemas.openxmlformats.org/officeDocument/2006/relationships" xmlns:a="http://schemas.openxmlformats.org/drawingml/2006/main" r:embed="R95cb7051ee66485d"/>
           <a:stretch xmlns:a="http://schemas.openxmlformats.org/drawingml/2006/main">
             <a:fillRect l="0" t="0" r="0" b="0"/>
           </a:stretch>
@@ -9075,7 +9075,7 @@
           <p:nvPr/>
         </p:nvPicPr>
         <p:blipFill>
-          <a:blip xmlns:r="http://schemas.openxmlformats.org/officeDocument/2006/relationships" xmlns:a="http://schemas.openxmlformats.org/drawingml/2006/main" r:embed="Rcaffae485cc74384"/>
+          <a:blip xmlns:r="http://schemas.openxmlformats.org/officeDocument/2006/relationships" xmlns:a="http://schemas.openxmlformats.org/drawingml/2006/main" r:embed="R248042cf3f7e46e0"/>
           <a:stretch xmlns:a="http://schemas.openxmlformats.org/drawingml/2006/main">
             <a:fillRect l="0" t="0" r="0" b="0"/>
           </a:stretch>
@@ -9152,7 +9152,7 @@
           <p:nvPr/>
         </p:nvPicPr>
         <p:blipFill>
-          <a:blip xmlns:r="http://schemas.openxmlformats.org/officeDocument/2006/relationships" xmlns:a="http://schemas.openxmlformats.org/drawingml/2006/main" r:embed="Rc230441d7e9b408b"/>
+          <a:blip xmlns:r="http://schemas.openxmlformats.org/officeDocument/2006/relationships" xmlns:a="http://schemas.openxmlformats.org/drawingml/2006/main" r:embed="Rd6c87412b29e4aad"/>
           <a:stretch xmlns:a="http://schemas.openxmlformats.org/drawingml/2006/main">
             <a:fillRect l="0" t="0" r="0" b="0"/>
           </a:stretch>
@@ -9229,7 +9229,7 @@
           <p:nvPr/>
         </p:nvPicPr>
         <p:blipFill>
-          <a:blip xmlns:r="http://schemas.openxmlformats.org/officeDocument/2006/relationships" xmlns:a="http://schemas.openxmlformats.org/drawingml/2006/main" r:embed="Rac5a19af79304c73"/>
+          <a:blip xmlns:r="http://schemas.openxmlformats.org/officeDocument/2006/relationships" xmlns:a="http://schemas.openxmlformats.org/drawingml/2006/main" r:embed="R43a9a1e1de594499"/>
           <a:stretch xmlns:a="http://schemas.openxmlformats.org/drawingml/2006/main">
             <a:fillRect l="0" t="0" r="0" b="0"/>
           </a:stretch>
@@ -9306,7 +9306,7 @@
           <p:nvPr/>
         </p:nvPicPr>
         <p:blipFill>
-          <a:blip xmlns:r="http://schemas.openxmlformats.org/officeDocument/2006/relationships" xmlns:a="http://schemas.openxmlformats.org/drawingml/2006/main" r:embed="Ra7c95d4b27644450"/>
+          <a:blip xmlns:r="http://schemas.openxmlformats.org/officeDocument/2006/relationships" xmlns:a="http://schemas.openxmlformats.org/drawingml/2006/main" r:embed="R06c28a7ba85c4088"/>
           <a:stretch xmlns:a="http://schemas.openxmlformats.org/drawingml/2006/main">
             <a:fillRect l="0" t="0" r="0" b="0"/>
           </a:stretch>
@@ -9383,7 +9383,7 @@
           <p:nvPr/>
         </p:nvPicPr>
         <p:blipFill>
-          <a:blip xmlns:r="http://schemas.openxmlformats.org/officeDocument/2006/relationships" xmlns:a="http://schemas.openxmlformats.org/drawingml/2006/main" r:embed="R591a7b3123bf4de5"/>
+          <a:blip xmlns:r="http://schemas.openxmlformats.org/officeDocument/2006/relationships" xmlns:a="http://schemas.openxmlformats.org/drawingml/2006/main" r:embed="R5ec95af80b8e4f8c"/>
           <a:stretch xmlns:a="http://schemas.openxmlformats.org/drawingml/2006/main">
             <a:fillRect l="0" t="0" r="0" b="0"/>
           </a:stretch>
@@ -9673,7 +9673,7 @@
           <p:nvPr/>
         </p:nvPicPr>
         <p:blipFill>
-          <a:blip xmlns:r="http://schemas.openxmlformats.org/officeDocument/2006/relationships" xmlns:a="http://schemas.openxmlformats.org/drawingml/2006/main" r:embed="Red6c7c4db36d4f09"/>
+          <a:blip xmlns:r="http://schemas.openxmlformats.org/officeDocument/2006/relationships" xmlns:a="http://schemas.openxmlformats.org/drawingml/2006/main" r:embed="Rf1b02baebe5a44e2"/>
           <a:stretch xmlns:a="http://schemas.openxmlformats.org/drawingml/2006/main">
             <a:fillRect l="0" t="0" r="0" b="0"/>
           </a:stretch>
@@ -9856,7 +9856,7 @@
           <p:nvPr/>
         </p:nvPicPr>
         <p:blipFill>
-          <a:blip xmlns:r="http://schemas.openxmlformats.org/officeDocument/2006/relationships" xmlns:a="http://schemas.openxmlformats.org/drawingml/2006/main" r:embed="Rd8d5e5eb6649465c"/>
+          <a:blip xmlns:r="http://schemas.openxmlformats.org/officeDocument/2006/relationships" xmlns:a="http://schemas.openxmlformats.org/drawingml/2006/main" r:embed="R08ec4d3369744dea"/>
           <a:stretch xmlns:a="http://schemas.openxmlformats.org/drawingml/2006/main">
             <a:fillRect l="0" t="0" r="0" b="0"/>
           </a:stretch>
@@ -9880,7 +9880,7 @@
           <p:nvPr/>
         </p:nvPicPr>
         <p:blipFill>
-          <a:blip xmlns:r="http://schemas.openxmlformats.org/officeDocument/2006/relationships" xmlns:a="http://schemas.openxmlformats.org/drawingml/2006/main" r:embed="R671772d4b1504932"/>
+          <a:blip xmlns:r="http://schemas.openxmlformats.org/officeDocument/2006/relationships" xmlns:a="http://schemas.openxmlformats.org/drawingml/2006/main" r:embed="R80860b9bbcc446c5"/>
           <a:stretch xmlns:a="http://schemas.openxmlformats.org/drawingml/2006/main">
             <a:fillRect l="0" t="0" r="0" b="0"/>
           </a:stretch>
@@ -10804,7 +10804,7 @@
           <p:nvPr/>
         </p:nvPicPr>
         <p:blipFill>
-          <a:blip xmlns:r="http://schemas.openxmlformats.org/officeDocument/2006/relationships" xmlns:a="http://schemas.openxmlformats.org/drawingml/2006/main" r:embed="R87cae14db5394b0b"/>
+          <a:blip xmlns:r="http://schemas.openxmlformats.org/officeDocument/2006/relationships" xmlns:a="http://schemas.openxmlformats.org/drawingml/2006/main" r:embed="Raecd0a9bdb414799"/>
           <a:stretch xmlns:a="http://schemas.openxmlformats.org/drawingml/2006/main">
             <a:fillRect l="0" t="0" r="0" b="0"/>
           </a:stretch>
@@ -10828,7 +10828,7 @@
           <p:nvPr/>
         </p:nvPicPr>
         <p:blipFill>
-          <a:blip xmlns:r="http://schemas.openxmlformats.org/officeDocument/2006/relationships" xmlns:a="http://schemas.openxmlformats.org/drawingml/2006/main" r:embed="R80aba89fbb984f86"/>
+          <a:blip xmlns:r="http://schemas.openxmlformats.org/officeDocument/2006/relationships" xmlns:a="http://schemas.openxmlformats.org/drawingml/2006/main" r:embed="Rf47729dc93ac4202"/>
           <a:stretch xmlns:a="http://schemas.openxmlformats.org/drawingml/2006/main">
             <a:fillRect l="0" t="0" r="0" b="0"/>
           </a:stretch>
@@ -11064,7 +11064,7 @@
           <p:nvPr/>
         </p:nvPicPr>
         <p:blipFill>
-          <a:blip xmlns:r="http://schemas.openxmlformats.org/officeDocument/2006/relationships" xmlns:a="http://schemas.openxmlformats.org/drawingml/2006/main" r:embed="R7113856780a0458d"/>
+          <a:blip xmlns:r="http://schemas.openxmlformats.org/officeDocument/2006/relationships" xmlns:a="http://schemas.openxmlformats.org/drawingml/2006/main" r:embed="R71a51a6171c34e13"/>
           <a:stretch xmlns:a="http://schemas.openxmlformats.org/drawingml/2006/main">
             <a:fillRect l="0" t="0" r="0" b="0"/>
           </a:stretch>
@@ -11141,7 +11141,7 @@
           <p:nvPr/>
         </p:nvPicPr>
         <p:blipFill>
-          <a:blip xmlns:r="http://schemas.openxmlformats.org/officeDocument/2006/relationships" xmlns:a="http://schemas.openxmlformats.org/drawingml/2006/main" r:embed="R6cf336d19a4b472c"/>
+          <a:blip xmlns:r="http://schemas.openxmlformats.org/officeDocument/2006/relationships" xmlns:a="http://schemas.openxmlformats.org/drawingml/2006/main" r:embed="R2ed6ff1b499e4653"/>
           <a:stretch xmlns:a="http://schemas.openxmlformats.org/drawingml/2006/main">
             <a:fillRect l="0" t="0" r="0" b="0"/>
           </a:stretch>
@@ -11218,7 +11218,7 @@
           <p:nvPr/>
         </p:nvPicPr>
         <p:blipFill>
-          <a:blip xmlns:r="http://schemas.openxmlformats.org/officeDocument/2006/relationships" xmlns:a="http://schemas.openxmlformats.org/drawingml/2006/main" r:embed="Rf0659f2910a2441a"/>
+          <a:blip xmlns:r="http://schemas.openxmlformats.org/officeDocument/2006/relationships" xmlns:a="http://schemas.openxmlformats.org/drawingml/2006/main" r:embed="R6d0fe09e0fb04aa1"/>
           <a:stretch xmlns:a="http://schemas.openxmlformats.org/drawingml/2006/main">
             <a:fillRect l="0" t="0" r="0" b="0"/>
           </a:stretch>
@@ -11295,7 +11295,7 @@
           <p:nvPr/>
         </p:nvPicPr>
         <p:blipFill>
-          <a:blip xmlns:r="http://schemas.openxmlformats.org/officeDocument/2006/relationships" xmlns:a="http://schemas.openxmlformats.org/drawingml/2006/main" r:embed="R5b86fa9d23004311"/>
+          <a:blip xmlns:r="http://schemas.openxmlformats.org/officeDocument/2006/relationships" xmlns:a="http://schemas.openxmlformats.org/drawingml/2006/main" r:embed="R22823b9021e14b22"/>
           <a:stretch xmlns:a="http://schemas.openxmlformats.org/drawingml/2006/main">
             <a:fillRect l="0" t="0" r="0" b="0"/>
           </a:stretch>
@@ -11372,7 +11372,7 @@
           <p:nvPr/>
         </p:nvPicPr>
         <p:blipFill>
-          <a:blip xmlns:r="http://schemas.openxmlformats.org/officeDocument/2006/relationships" xmlns:a="http://schemas.openxmlformats.org/drawingml/2006/main" r:embed="Rc82ce00031fb485b"/>
+          <a:blip xmlns:r="http://schemas.openxmlformats.org/officeDocument/2006/relationships" xmlns:a="http://schemas.openxmlformats.org/drawingml/2006/main" r:embed="R692d0b3214a842e6"/>
           <a:stretch xmlns:a="http://schemas.openxmlformats.org/drawingml/2006/main">
             <a:fillRect l="0" t="0" r="0" b="0"/>
           </a:stretch>
@@ -11449,7 +11449,7 @@
           <p:nvPr/>
         </p:nvPicPr>
         <p:blipFill>
-          <a:blip xmlns:r="http://schemas.openxmlformats.org/officeDocument/2006/relationships" xmlns:a="http://schemas.openxmlformats.org/drawingml/2006/main" r:embed="R756d4f5f74b54d9c"/>
+          <a:blip xmlns:r="http://schemas.openxmlformats.org/officeDocument/2006/relationships" xmlns:a="http://schemas.openxmlformats.org/drawingml/2006/main" r:embed="R37cb361c0e1e4ede"/>
           <a:stretch xmlns:a="http://schemas.openxmlformats.org/drawingml/2006/main">
             <a:fillRect l="0" t="0" r="0" b="0"/>
           </a:stretch>
@@ -11526,7 +11526,7 @@
           <p:nvPr/>
         </p:nvPicPr>
         <p:blipFill>
-          <a:blip xmlns:r="http://schemas.openxmlformats.org/officeDocument/2006/relationships" xmlns:a="http://schemas.openxmlformats.org/drawingml/2006/main" r:embed="R2b631b764cd74ccb"/>
+          <a:blip xmlns:r="http://schemas.openxmlformats.org/officeDocument/2006/relationships" xmlns:a="http://schemas.openxmlformats.org/drawingml/2006/main" r:embed="R01fb99261ad347d8"/>
           <a:stretch xmlns:a="http://schemas.openxmlformats.org/drawingml/2006/main">
             <a:fillRect l="0" t="0" r="0" b="0"/>
           </a:stretch>
@@ -11816,7 +11816,7 @@
           <p:nvPr/>
         </p:nvPicPr>
         <p:blipFill>
-          <a:blip xmlns:r="http://schemas.openxmlformats.org/officeDocument/2006/relationships" xmlns:a="http://schemas.openxmlformats.org/drawingml/2006/main" r:embed="R5c3cdb9c326047e1"/>
+          <a:blip xmlns:r="http://schemas.openxmlformats.org/officeDocument/2006/relationships" xmlns:a="http://schemas.openxmlformats.org/drawingml/2006/main" r:embed="R4e6205ee872b4d01"/>
           <a:stretch xmlns:a="http://schemas.openxmlformats.org/drawingml/2006/main">
             <a:fillRect l="0" t="0" r="0" b="0"/>
           </a:stretch>
@@ -11999,7 +11999,7 @@
           <p:nvPr/>
         </p:nvPicPr>
         <p:blipFill>
-          <a:blip xmlns:r="http://schemas.openxmlformats.org/officeDocument/2006/relationships" xmlns:a="http://schemas.openxmlformats.org/drawingml/2006/main" r:embed="Rd5aea3573dfb4b51"/>
+          <a:blip xmlns:r="http://schemas.openxmlformats.org/officeDocument/2006/relationships" xmlns:a="http://schemas.openxmlformats.org/drawingml/2006/main" r:embed="R7ef63eda34774b49"/>
           <a:stretch xmlns:a="http://schemas.openxmlformats.org/drawingml/2006/main">
             <a:fillRect l="0" t="0" r="0" b="0"/>
           </a:stretch>
@@ -12023,7 +12023,7 @@
           <p:nvPr/>
         </p:nvPicPr>
         <p:blipFill>
-          <a:blip xmlns:r="http://schemas.openxmlformats.org/officeDocument/2006/relationships" xmlns:a="http://schemas.openxmlformats.org/drawingml/2006/main" r:embed="R3ec3c1f608c440db"/>
+          <a:blip xmlns:r="http://schemas.openxmlformats.org/officeDocument/2006/relationships" xmlns:a="http://schemas.openxmlformats.org/drawingml/2006/main" r:embed="R03559a305fd24410"/>
           <a:stretch xmlns:a="http://schemas.openxmlformats.org/drawingml/2006/main">
             <a:fillRect l="0" t="0" r="0" b="0"/>
           </a:stretch>
@@ -12949,7 +12949,7 @@
           <p:nvPr/>
         </p:nvPicPr>
         <p:blipFill>
-          <a:blip xmlns:r="http://schemas.openxmlformats.org/officeDocument/2006/relationships" xmlns:a="http://schemas.openxmlformats.org/drawingml/2006/main" r:embed="Racb8ae6bd8a34a2b"/>
+          <a:blip xmlns:r="http://schemas.openxmlformats.org/officeDocument/2006/relationships" xmlns:a="http://schemas.openxmlformats.org/drawingml/2006/main" r:embed="R458e19f0e3164aff"/>
           <a:stretch xmlns:a="http://schemas.openxmlformats.org/drawingml/2006/main">
             <a:fillRect l="0" t="0" r="0" b="0"/>
           </a:stretch>
@@ -12973,7 +12973,7 @@
           <p:nvPr/>
         </p:nvPicPr>
         <p:blipFill>
-          <a:blip xmlns:r="http://schemas.openxmlformats.org/officeDocument/2006/relationships" xmlns:a="http://schemas.openxmlformats.org/drawingml/2006/main" r:embed="R4c6f27b67c9e469d"/>
+          <a:blip xmlns:r="http://schemas.openxmlformats.org/officeDocument/2006/relationships" xmlns:a="http://schemas.openxmlformats.org/drawingml/2006/main" r:embed="Rc3c01a055b534f3c"/>
           <a:stretch xmlns:a="http://schemas.openxmlformats.org/drawingml/2006/main">
             <a:fillRect l="0" t="0" r="0" b="0"/>
           </a:stretch>
@@ -13209,7 +13209,7 @@
           <p:nvPr/>
         </p:nvPicPr>
         <p:blipFill>
-          <a:blip xmlns:r="http://schemas.openxmlformats.org/officeDocument/2006/relationships" xmlns:a="http://schemas.openxmlformats.org/drawingml/2006/main" r:embed="R5efdc22eda724aa1"/>
+          <a:blip xmlns:r="http://schemas.openxmlformats.org/officeDocument/2006/relationships" xmlns:a="http://schemas.openxmlformats.org/drawingml/2006/main" r:embed="R42f6493cb05e4ebc"/>
           <a:stretch xmlns:a="http://schemas.openxmlformats.org/drawingml/2006/main">
             <a:fillRect l="0" t="0" r="0" b="0"/>
           </a:stretch>
@@ -13286,7 +13286,7 @@
           <p:nvPr/>
         </p:nvPicPr>
         <p:blipFill>
-          <a:blip xmlns:r="http://schemas.openxmlformats.org/officeDocument/2006/relationships" xmlns:a="http://schemas.openxmlformats.org/drawingml/2006/main" r:embed="R215a21bfbbfe41bd"/>
+          <a:blip xmlns:r="http://schemas.openxmlformats.org/officeDocument/2006/relationships" xmlns:a="http://schemas.openxmlformats.org/drawingml/2006/main" r:embed="R94aba85c9c4e4a3a"/>
           <a:stretch xmlns:a="http://schemas.openxmlformats.org/drawingml/2006/main">
             <a:fillRect l="0" t="0" r="0" b="0"/>
           </a:stretch>
@@ -13363,7 +13363,7 @@
           <p:nvPr/>
         </p:nvPicPr>
         <p:blipFill>
-          <a:blip xmlns:r="http://schemas.openxmlformats.org/officeDocument/2006/relationships" xmlns:a="http://schemas.openxmlformats.org/drawingml/2006/main" r:embed="R6a812ffa5d9549e1"/>
+          <a:blip xmlns:r="http://schemas.openxmlformats.org/officeDocument/2006/relationships" xmlns:a="http://schemas.openxmlformats.org/drawingml/2006/main" r:embed="R6ff8f5d92e7446ab"/>
           <a:stretch xmlns:a="http://schemas.openxmlformats.org/drawingml/2006/main">
             <a:fillRect l="0" t="0" r="0" b="0"/>
           </a:stretch>
@@ -13440,7 +13440,7 @@
           <p:nvPr/>
         </p:nvPicPr>
         <p:blipFill>
-          <a:blip xmlns:r="http://schemas.openxmlformats.org/officeDocument/2006/relationships" xmlns:a="http://schemas.openxmlformats.org/drawingml/2006/main" r:embed="Ra8f1569a3b834fc6"/>
+          <a:blip xmlns:r="http://schemas.openxmlformats.org/officeDocument/2006/relationships" xmlns:a="http://schemas.openxmlformats.org/drawingml/2006/main" r:embed="R34614f9158374c7a"/>
           <a:stretch xmlns:a="http://schemas.openxmlformats.org/drawingml/2006/main">
             <a:fillRect l="0" t="0" r="0" b="0"/>
           </a:stretch>
@@ -13517,7 +13517,7 @@
           <p:nvPr/>
         </p:nvPicPr>
         <p:blipFill>
-          <a:blip xmlns:r="http://schemas.openxmlformats.org/officeDocument/2006/relationships" xmlns:a="http://schemas.openxmlformats.org/drawingml/2006/main" r:embed="Rd312361a35df4a2b"/>
+          <a:blip xmlns:r="http://schemas.openxmlformats.org/officeDocument/2006/relationships" xmlns:a="http://schemas.openxmlformats.org/drawingml/2006/main" r:embed="R1d320990476146cd"/>
           <a:stretch xmlns:a="http://schemas.openxmlformats.org/drawingml/2006/main">
             <a:fillRect l="0" t="0" r="0" b="0"/>
           </a:stretch>
@@ -13594,7 +13594,7 @@
           <p:nvPr/>
         </p:nvPicPr>
         <p:blipFill>
-          <a:blip xmlns:r="http://schemas.openxmlformats.org/officeDocument/2006/relationships" xmlns:a="http://schemas.openxmlformats.org/drawingml/2006/main" r:embed="R90d9d8893d824ca3"/>
+          <a:blip xmlns:r="http://schemas.openxmlformats.org/officeDocument/2006/relationships" xmlns:a="http://schemas.openxmlformats.org/drawingml/2006/main" r:embed="R9dc75f3305c94cf3"/>
           <a:stretch xmlns:a="http://schemas.openxmlformats.org/drawingml/2006/main">
             <a:fillRect l="0" t="0" r="0" b="0"/>
           </a:stretch>
@@ -13671,7 +13671,7 @@
           <p:nvPr/>
         </p:nvPicPr>
         <p:blipFill>
-          <a:blip xmlns:r="http://schemas.openxmlformats.org/officeDocument/2006/relationships" xmlns:a="http://schemas.openxmlformats.org/drawingml/2006/main" r:embed="Rb0ad695df36342e1"/>
+          <a:blip xmlns:r="http://schemas.openxmlformats.org/officeDocument/2006/relationships" xmlns:a="http://schemas.openxmlformats.org/drawingml/2006/main" r:embed="Rae9ca93c77a740dc"/>
           <a:stretch xmlns:a="http://schemas.openxmlformats.org/drawingml/2006/main">
             <a:fillRect l="0" t="0" r="0" b="0"/>
           </a:stretch>
@@ -13961,7 +13961,7 @@
           <p:nvPr/>
         </p:nvPicPr>
         <p:blipFill>
-          <a:blip xmlns:r="http://schemas.openxmlformats.org/officeDocument/2006/relationships" xmlns:a="http://schemas.openxmlformats.org/drawingml/2006/main" r:embed="R8cac066a237b4741"/>
+          <a:blip xmlns:r="http://schemas.openxmlformats.org/officeDocument/2006/relationships" xmlns:a="http://schemas.openxmlformats.org/drawingml/2006/main" r:embed="Reacb6f1486344fb0"/>
           <a:stretch xmlns:a="http://schemas.openxmlformats.org/drawingml/2006/main">
             <a:fillRect l="0" t="0" r="0" b="0"/>
           </a:stretch>
@@ -14144,7 +14144,7 @@
           <p:nvPr/>
         </p:nvPicPr>
         <p:blipFill>
-          <a:blip xmlns:r="http://schemas.openxmlformats.org/officeDocument/2006/relationships" xmlns:a="http://schemas.openxmlformats.org/drawingml/2006/main" r:embed="R44498321e0234b58"/>
+          <a:blip xmlns:r="http://schemas.openxmlformats.org/officeDocument/2006/relationships" xmlns:a="http://schemas.openxmlformats.org/drawingml/2006/main" r:embed="R8f5b55ba79e6416b"/>
           <a:stretch xmlns:a="http://schemas.openxmlformats.org/drawingml/2006/main">
             <a:fillRect l="0" t="0" r="0" b="0"/>
           </a:stretch>
@@ -14168,7 +14168,7 @@
           <p:nvPr/>
         </p:nvPicPr>
         <p:blipFill>
-          <a:blip xmlns:r="http://schemas.openxmlformats.org/officeDocument/2006/relationships" xmlns:a="http://schemas.openxmlformats.org/drawingml/2006/main" r:embed="Re220e11fc631473a"/>
+          <a:blip xmlns:r="http://schemas.openxmlformats.org/officeDocument/2006/relationships" xmlns:a="http://schemas.openxmlformats.org/drawingml/2006/main" r:embed="R20f3c6623dab43ff"/>
           <a:stretch xmlns:a="http://schemas.openxmlformats.org/drawingml/2006/main">
             <a:fillRect l="0" t="0" r="0" b="0"/>
           </a:stretch>
@@ -14433,7 +14433,7 @@
           <p:nvPr/>
         </p:nvPicPr>
         <p:blipFill>
-          <a:blip xmlns:r="http://schemas.openxmlformats.org/officeDocument/2006/relationships" xmlns:a="http://schemas.openxmlformats.org/drawingml/2006/main" r:embed="R660cd9f9c7824519"/>
+          <a:blip xmlns:r="http://schemas.openxmlformats.org/officeDocument/2006/relationships" xmlns:a="http://schemas.openxmlformats.org/drawingml/2006/main" r:embed="R984f1a6377c94a6d"/>
           <a:stretch xmlns:a="http://schemas.openxmlformats.org/drawingml/2006/main">
             <a:fillRect l="0" t="0" r="0" b="0"/>
           </a:stretch>
@@ -14503,7 +14503,7 @@
           <p:nvPr/>
         </p:nvPicPr>
         <p:blipFill>
-          <a:blip xmlns:r="http://schemas.openxmlformats.org/officeDocument/2006/relationships" xmlns:a="http://schemas.openxmlformats.org/drawingml/2006/main" r:embed="R81e3738d9bdf49c7"/>
+          <a:blip xmlns:r="http://schemas.openxmlformats.org/officeDocument/2006/relationships" xmlns:a="http://schemas.openxmlformats.org/drawingml/2006/main" r:embed="R6feb6125939b4297"/>
           <a:stretch xmlns:a="http://schemas.openxmlformats.org/drawingml/2006/main">
             <a:fillRect l="0" t="0" r="0" b="0"/>
           </a:stretch>
@@ -14573,7 +14573,7 @@
           <p:nvPr/>
         </p:nvPicPr>
         <p:blipFill>
-          <a:blip xmlns:r="http://schemas.openxmlformats.org/officeDocument/2006/relationships" xmlns:a="http://schemas.openxmlformats.org/drawingml/2006/main" r:embed="R8220e0a2699641b3"/>
+          <a:blip xmlns:r="http://schemas.openxmlformats.org/officeDocument/2006/relationships" xmlns:a="http://schemas.openxmlformats.org/drawingml/2006/main" r:embed="R6a74434eb0d24a03"/>
           <a:stretch xmlns:a="http://schemas.openxmlformats.org/drawingml/2006/main">
             <a:fillRect l="0" t="0" r="0" b="0"/>
           </a:stretch>
@@ -14643,7 +14643,7 @@
           <p:nvPr/>
         </p:nvPicPr>
         <p:blipFill>
-          <a:blip xmlns:r="http://schemas.openxmlformats.org/officeDocument/2006/relationships" xmlns:a="http://schemas.openxmlformats.org/drawingml/2006/main" r:embed="R1364d9a4f1ec44bc"/>
+          <a:blip xmlns:r="http://schemas.openxmlformats.org/officeDocument/2006/relationships" xmlns:a="http://schemas.openxmlformats.org/drawingml/2006/main" r:embed="R68d67f8784864b0e"/>
           <a:stretch xmlns:a="http://schemas.openxmlformats.org/drawingml/2006/main">
             <a:fillRect l="0" t="0" r="0" b="0"/>
           </a:stretch>
@@ -14713,7 +14713,7 @@
           <p:nvPr/>
         </p:nvPicPr>
         <p:blipFill>
-          <a:blip xmlns:r="http://schemas.openxmlformats.org/officeDocument/2006/relationships" xmlns:a="http://schemas.openxmlformats.org/drawingml/2006/main" r:embed="Rec62dc6d94fe46e4"/>
+          <a:blip xmlns:r="http://schemas.openxmlformats.org/officeDocument/2006/relationships" xmlns:a="http://schemas.openxmlformats.org/drawingml/2006/main" r:embed="R30c69fad3e044e6b"/>
           <a:stretch xmlns:a="http://schemas.openxmlformats.org/drawingml/2006/main">
             <a:fillRect l="0" t="0" r="0" b="0"/>
           </a:stretch>
@@ -14783,7 +14783,7 @@
           <p:nvPr/>
         </p:nvPicPr>
         <p:blipFill>
-          <a:blip xmlns:r="http://schemas.openxmlformats.org/officeDocument/2006/relationships" xmlns:a="http://schemas.openxmlformats.org/drawingml/2006/main" r:embed="R177508ff3a9048fe"/>
+          <a:blip xmlns:r="http://schemas.openxmlformats.org/officeDocument/2006/relationships" xmlns:a="http://schemas.openxmlformats.org/drawingml/2006/main" r:embed="Ra29816d0da624c0f"/>
           <a:stretch xmlns:a="http://schemas.openxmlformats.org/drawingml/2006/main">
             <a:fillRect l="0" t="0" r="0" b="0"/>
           </a:stretch>
@@ -14853,7 +14853,7 @@
           <p:nvPr/>
         </p:nvPicPr>
         <p:blipFill>
-          <a:blip xmlns:r="http://schemas.openxmlformats.org/officeDocument/2006/relationships" xmlns:a="http://schemas.openxmlformats.org/drawingml/2006/main" r:embed="R11dedc0c8d3d402c"/>
+          <a:blip xmlns:r="http://schemas.openxmlformats.org/officeDocument/2006/relationships" xmlns:a="http://schemas.openxmlformats.org/drawingml/2006/main" r:embed="Rd3e546fd2f624c69"/>
           <a:stretch xmlns:a="http://schemas.openxmlformats.org/drawingml/2006/main">
             <a:fillRect l="0" t="0" r="0" b="0"/>
           </a:stretch>
@@ -14992,7 +14992,7 @@
                 <a:ea typeface="Calibri"/>
                 <a:cs typeface="Calibri"/>
               </a:rPr>
-              <a:t>BUKTI YANG DIKUMPULKAN</a:t>
+              <a:t>PROYEK KELOMPOK</a:t>
             </a:r>
           </a:p>
           <a:p xmlns:a="http://schemas.openxmlformats.org/drawingml/2006/main">
@@ -15021,7 +15021,7 @@
                 <a:ea typeface="Calibri"/>
                 <a:cs typeface="Calibri"/>
               </a:rPr>
-              <a:t>Hasil mesin sendiri</a:t>
+              <a:t>Tim 3 orang</a:t>
             </a:r>
             <a:endParaRPr sz="1100"/>
           </a:p>
@@ -15070,7 +15070,7 @@
                 <a:ea typeface="Calibri"/>
                 <a:cs typeface="Calibri"/>
               </a:rPr>
-              <a:t>1. DB dan hasil ingest</a:t>
+              <a:t>RAG memberi jawaban bersumber bila relevan</a:t>
             </a:r>
           </a:p>
           <a:p xmlns:a="http://schemas.openxmlformats.org/drawingml/2006/main">
@@ -15089,7 +15089,7 @@
                 <a:ea typeface="Calibri"/>
                 <a:cs typeface="Calibri"/>
               </a:rPr>
-              <a:t>2. Top-K, jarak, dan sitasi [S1]</a:t>
+              <a:t>Uji top-K, sitasi, dan latensi</a:t>
             </a:r>
           </a:p>
           <a:p xmlns:a="http://schemas.openxmlformats.org/drawingml/2006/main">
@@ -15108,7 +15108,7 @@
                 <a:ea typeface="Calibri"/>
                 <a:cs typeface="Calibri"/>
               </a:rPr>
-              <a:t>3. Chat web/API dan dokumen baru</a:t>
+              <a:t>Simpan bukti bila berguna</a:t>
             </a:r>
           </a:p>
           <a:p xmlns:a="http://schemas.openxmlformats.org/drawingml/2006/main">
@@ -15127,7 +15127,7 @@
                 <a:ea typeface="Calibri"/>
                 <a:cs typeface="Calibri"/>
               </a:rPr>
-              <a:t>4. p50/p95 dan commit aman</a:t>
+              <a:t>Minggu 7 dan 14; tanpa nilai Lab 11</a:t>
             </a:r>
             <a:endParaRPr sz="1700"/>
           </a:p>
@@ -15385,7 +15385,7 @@
           <p:nvPr/>
         </p:nvPicPr>
         <p:blipFill>
-          <a:blip xmlns:r="http://schemas.openxmlformats.org/officeDocument/2006/relationships" xmlns:a="http://schemas.openxmlformats.org/drawingml/2006/main" r:embed="Rb128ac25bc624fcb"/>
+          <a:blip xmlns:r="http://schemas.openxmlformats.org/officeDocument/2006/relationships" xmlns:a="http://schemas.openxmlformats.org/drawingml/2006/main" r:embed="Reea39472465d4ea5"/>
           <a:stretch xmlns:a="http://schemas.openxmlformats.org/drawingml/2006/main">
             <a:fillRect l="0" t="0" r="0" b="0"/>
           </a:stretch>
@@ -15409,7 +15409,7 @@
           <p:nvPr/>
         </p:nvPicPr>
         <p:blipFill>
-          <a:blip xmlns:r="http://schemas.openxmlformats.org/officeDocument/2006/relationships" xmlns:a="http://schemas.openxmlformats.org/drawingml/2006/main" r:embed="Rf2f194f42e7a4141"/>
+          <a:blip xmlns:r="http://schemas.openxmlformats.org/officeDocument/2006/relationships" xmlns:a="http://schemas.openxmlformats.org/drawingml/2006/main" r:embed="Reba73944c63945f8"/>
           <a:stretch xmlns:a="http://schemas.openxmlformats.org/drawingml/2006/main">
             <a:fillRect l="0" t="0" r="0" b="0"/>
           </a:stretch>
@@ -16331,7 +16331,7 @@
           <p:nvPr/>
         </p:nvPicPr>
         <p:blipFill>
-          <a:blip xmlns:r="http://schemas.openxmlformats.org/officeDocument/2006/relationships" xmlns:a="http://schemas.openxmlformats.org/drawingml/2006/main" r:embed="R720b58fc08114f8d"/>
+          <a:blip xmlns:r="http://schemas.openxmlformats.org/officeDocument/2006/relationships" xmlns:a="http://schemas.openxmlformats.org/drawingml/2006/main" r:embed="Rc1368ad6c1334f26"/>
           <a:stretch xmlns:a="http://schemas.openxmlformats.org/drawingml/2006/main">
             <a:fillRect l="0" t="0" r="0" b="0"/>
           </a:stretch>
@@ -16355,7 +16355,7 @@
           <p:nvPr/>
         </p:nvPicPr>
         <p:blipFill>
-          <a:blip xmlns:r="http://schemas.openxmlformats.org/officeDocument/2006/relationships" xmlns:a="http://schemas.openxmlformats.org/drawingml/2006/main" r:embed="R1f54dd849c844493"/>
+          <a:blip xmlns:r="http://schemas.openxmlformats.org/officeDocument/2006/relationships" xmlns:a="http://schemas.openxmlformats.org/drawingml/2006/main" r:embed="R5e98dd3afdd84be2"/>
           <a:stretch xmlns:a="http://schemas.openxmlformats.org/drawingml/2006/main">
             <a:fillRect l="0" t="0" r="0" b="0"/>
           </a:stretch>
@@ -16591,7 +16591,7 @@
           <p:nvPr/>
         </p:nvPicPr>
         <p:blipFill>
-          <a:blip xmlns:r="http://schemas.openxmlformats.org/officeDocument/2006/relationships" xmlns:a="http://schemas.openxmlformats.org/drawingml/2006/main" r:embed="Rcf437929f4d2465c"/>
+          <a:blip xmlns:r="http://schemas.openxmlformats.org/officeDocument/2006/relationships" xmlns:a="http://schemas.openxmlformats.org/drawingml/2006/main" r:embed="Rd72b27ddb5894572"/>
           <a:stretch xmlns:a="http://schemas.openxmlformats.org/drawingml/2006/main">
             <a:fillRect l="0" t="0" r="0" b="0"/>
           </a:stretch>
@@ -16668,7 +16668,7 @@
           <p:nvPr/>
         </p:nvPicPr>
         <p:blipFill>
-          <a:blip xmlns:r="http://schemas.openxmlformats.org/officeDocument/2006/relationships" xmlns:a="http://schemas.openxmlformats.org/drawingml/2006/main" r:embed="Rc8aacba4baea4a14"/>
+          <a:blip xmlns:r="http://schemas.openxmlformats.org/officeDocument/2006/relationships" xmlns:a="http://schemas.openxmlformats.org/drawingml/2006/main" r:embed="Re70d3f4daccf4813"/>
           <a:stretch xmlns:a="http://schemas.openxmlformats.org/drawingml/2006/main">
             <a:fillRect l="0" t="0" r="0" b="0"/>
           </a:stretch>
@@ -16745,7 +16745,7 @@
           <p:nvPr/>
         </p:nvPicPr>
         <p:blipFill>
-          <a:blip xmlns:r="http://schemas.openxmlformats.org/officeDocument/2006/relationships" xmlns:a="http://schemas.openxmlformats.org/drawingml/2006/main" r:embed="R975d762d3cf34617"/>
+          <a:blip xmlns:r="http://schemas.openxmlformats.org/officeDocument/2006/relationships" xmlns:a="http://schemas.openxmlformats.org/drawingml/2006/main" r:embed="Rb2dfc5f4e5684752"/>
           <a:stretch xmlns:a="http://schemas.openxmlformats.org/drawingml/2006/main">
             <a:fillRect l="0" t="0" r="0" b="0"/>
           </a:stretch>
@@ -16822,7 +16822,7 @@
           <p:nvPr/>
         </p:nvPicPr>
         <p:blipFill>
-          <a:blip xmlns:r="http://schemas.openxmlformats.org/officeDocument/2006/relationships" xmlns:a="http://schemas.openxmlformats.org/drawingml/2006/main" r:embed="Ra16ab4464f594fe9"/>
+          <a:blip xmlns:r="http://schemas.openxmlformats.org/officeDocument/2006/relationships" xmlns:a="http://schemas.openxmlformats.org/drawingml/2006/main" r:embed="Rcf89ac638cf345f3"/>
           <a:stretch xmlns:a="http://schemas.openxmlformats.org/drawingml/2006/main">
             <a:fillRect l="0" t="0" r="0" b="0"/>
           </a:stretch>
@@ -16899,7 +16899,7 @@
           <p:nvPr/>
         </p:nvPicPr>
         <p:blipFill>
-          <a:blip xmlns:r="http://schemas.openxmlformats.org/officeDocument/2006/relationships" xmlns:a="http://schemas.openxmlformats.org/drawingml/2006/main" r:embed="R81e450eb0bad4284"/>
+          <a:blip xmlns:r="http://schemas.openxmlformats.org/officeDocument/2006/relationships" xmlns:a="http://schemas.openxmlformats.org/drawingml/2006/main" r:embed="Reebe0f73dc3a49ff"/>
           <a:stretch xmlns:a="http://schemas.openxmlformats.org/drawingml/2006/main">
             <a:fillRect l="0" t="0" r="0" b="0"/>
           </a:stretch>
@@ -16976,7 +16976,7 @@
           <p:nvPr/>
         </p:nvPicPr>
         <p:blipFill>
-          <a:blip xmlns:r="http://schemas.openxmlformats.org/officeDocument/2006/relationships" xmlns:a="http://schemas.openxmlformats.org/drawingml/2006/main" r:embed="R53535563056e4621"/>
+          <a:blip xmlns:r="http://schemas.openxmlformats.org/officeDocument/2006/relationships" xmlns:a="http://schemas.openxmlformats.org/drawingml/2006/main" r:embed="R8b539e0142944f77"/>
           <a:stretch xmlns:a="http://schemas.openxmlformats.org/drawingml/2006/main">
             <a:fillRect l="0" t="0" r="0" b="0"/>
           </a:stretch>
@@ -17053,7 +17053,7 @@
           <p:nvPr/>
         </p:nvPicPr>
         <p:blipFill>
-          <a:blip xmlns:r="http://schemas.openxmlformats.org/officeDocument/2006/relationships" xmlns:a="http://schemas.openxmlformats.org/drawingml/2006/main" r:embed="R9da5f66db3254474"/>
+          <a:blip xmlns:r="http://schemas.openxmlformats.org/officeDocument/2006/relationships" xmlns:a="http://schemas.openxmlformats.org/drawingml/2006/main" r:embed="Rdb20efce4ec04d9a"/>
           <a:stretch xmlns:a="http://schemas.openxmlformats.org/drawingml/2006/main">
             <a:fillRect l="0" t="0" r="0" b="0"/>
           </a:stretch>
@@ -17343,7 +17343,7 @@
           <p:nvPr/>
         </p:nvPicPr>
         <p:blipFill>
-          <a:blip xmlns:r="http://schemas.openxmlformats.org/officeDocument/2006/relationships" xmlns:a="http://schemas.openxmlformats.org/drawingml/2006/main" r:embed="Rc60c9a2d43174e7c"/>
+          <a:blip xmlns:r="http://schemas.openxmlformats.org/officeDocument/2006/relationships" xmlns:a="http://schemas.openxmlformats.org/drawingml/2006/main" r:embed="R44139d5560144512"/>
           <a:stretch xmlns:a="http://schemas.openxmlformats.org/drawingml/2006/main">
             <a:fillRect l="0" t="0" r="0" b="0"/>
           </a:stretch>
@@ -17526,7 +17526,7 @@
           <p:nvPr/>
         </p:nvPicPr>
         <p:blipFill>
-          <a:blip xmlns:r="http://schemas.openxmlformats.org/officeDocument/2006/relationships" xmlns:a="http://schemas.openxmlformats.org/drawingml/2006/main" r:embed="Rec143b1826394122"/>
+          <a:blip xmlns:r="http://schemas.openxmlformats.org/officeDocument/2006/relationships" xmlns:a="http://schemas.openxmlformats.org/drawingml/2006/main" r:embed="R3c2f4c201f3740ad"/>
           <a:stretch xmlns:a="http://schemas.openxmlformats.org/drawingml/2006/main">
             <a:fillRect l="0" t="0" r="0" b="0"/>
           </a:stretch>
@@ -17550,7 +17550,7 @@
           <p:nvPr/>
         </p:nvPicPr>
         <p:blipFill>
-          <a:blip xmlns:r="http://schemas.openxmlformats.org/officeDocument/2006/relationships" xmlns:a="http://schemas.openxmlformats.org/drawingml/2006/main" r:embed="R60b2e15514d24e1f"/>
+          <a:blip xmlns:r="http://schemas.openxmlformats.org/officeDocument/2006/relationships" xmlns:a="http://schemas.openxmlformats.org/drawingml/2006/main" r:embed="Re03d7eb26b8344bd"/>
           <a:stretch xmlns:a="http://schemas.openxmlformats.org/drawingml/2006/main">
             <a:fillRect l="0" t="0" r="0" b="0"/>
           </a:stretch>
@@ -18478,7 +18478,7 @@
           <p:nvPr/>
         </p:nvPicPr>
         <p:blipFill>
-          <a:blip xmlns:r="http://schemas.openxmlformats.org/officeDocument/2006/relationships" xmlns:a="http://schemas.openxmlformats.org/drawingml/2006/main" r:embed="Rc396e1ad12634d63"/>
+          <a:blip xmlns:r="http://schemas.openxmlformats.org/officeDocument/2006/relationships" xmlns:a="http://schemas.openxmlformats.org/drawingml/2006/main" r:embed="Red7be3415a6349ca"/>
           <a:stretch xmlns:a="http://schemas.openxmlformats.org/drawingml/2006/main">
             <a:fillRect l="0" t="0" r="0" b="0"/>
           </a:stretch>
@@ -18502,7 +18502,7 @@
           <p:nvPr/>
         </p:nvPicPr>
         <p:blipFill>
-          <a:blip xmlns:r="http://schemas.openxmlformats.org/officeDocument/2006/relationships" xmlns:a="http://schemas.openxmlformats.org/drawingml/2006/main" r:embed="R66183b66f9eb41a6"/>
+          <a:blip xmlns:r="http://schemas.openxmlformats.org/officeDocument/2006/relationships" xmlns:a="http://schemas.openxmlformats.org/drawingml/2006/main" r:embed="Rec37b8143558497c"/>
           <a:stretch xmlns:a="http://schemas.openxmlformats.org/drawingml/2006/main">
             <a:fillRect l="0" t="0" r="0" b="0"/>
           </a:stretch>
@@ -19429,7 +19429,7 @@
           <p:nvPr/>
         </p:nvPicPr>
         <p:blipFill>
-          <a:blip xmlns:r="http://schemas.openxmlformats.org/officeDocument/2006/relationships" xmlns:a="http://schemas.openxmlformats.org/drawingml/2006/main" r:embed="R639a1fd4fae6470d"/>
+          <a:blip xmlns:r="http://schemas.openxmlformats.org/officeDocument/2006/relationships" xmlns:a="http://schemas.openxmlformats.org/drawingml/2006/main" r:embed="Rd12342453b444cee"/>
           <a:stretch xmlns:a="http://schemas.openxmlformats.org/drawingml/2006/main">
             <a:fillRect l="0" t="0" r="0" b="0"/>
           </a:stretch>
@@ -19453,7 +19453,7 @@
           <p:nvPr/>
         </p:nvPicPr>
         <p:blipFill>
-          <a:blip xmlns:r="http://schemas.openxmlformats.org/officeDocument/2006/relationships" xmlns:a="http://schemas.openxmlformats.org/drawingml/2006/main" r:embed="R1b74d4da06ba4770"/>
+          <a:blip xmlns:r="http://schemas.openxmlformats.org/officeDocument/2006/relationships" xmlns:a="http://schemas.openxmlformats.org/drawingml/2006/main" r:embed="R504ca6b368ff45cd"/>
           <a:stretch xmlns:a="http://schemas.openxmlformats.org/drawingml/2006/main">
             <a:fillRect l="0" t="0" r="0" b="0"/>
           </a:stretch>
@@ -19689,7 +19689,7 @@
           <p:nvPr/>
         </p:nvPicPr>
         <p:blipFill>
-          <a:blip xmlns:r="http://schemas.openxmlformats.org/officeDocument/2006/relationships" xmlns:a="http://schemas.openxmlformats.org/drawingml/2006/main" r:embed="R761f156a69f04273"/>
+          <a:blip xmlns:r="http://schemas.openxmlformats.org/officeDocument/2006/relationships" xmlns:a="http://schemas.openxmlformats.org/drawingml/2006/main" r:embed="R8acd6b2c73cd43dd"/>
           <a:stretch xmlns:a="http://schemas.openxmlformats.org/drawingml/2006/main">
             <a:fillRect l="0" t="0" r="0" b="0"/>
           </a:stretch>
@@ -19766,7 +19766,7 @@
           <p:nvPr/>
         </p:nvPicPr>
         <p:blipFill>
-          <a:blip xmlns:r="http://schemas.openxmlformats.org/officeDocument/2006/relationships" xmlns:a="http://schemas.openxmlformats.org/drawingml/2006/main" r:embed="Rfe7504f7e5cc4fa5"/>
+          <a:blip xmlns:r="http://schemas.openxmlformats.org/officeDocument/2006/relationships" xmlns:a="http://schemas.openxmlformats.org/drawingml/2006/main" r:embed="R658f42cdb5f84d60"/>
           <a:stretch xmlns:a="http://schemas.openxmlformats.org/drawingml/2006/main">
             <a:fillRect l="0" t="0" r="0" b="0"/>
           </a:stretch>
@@ -19843,7 +19843,7 @@
           <p:nvPr/>
         </p:nvPicPr>
         <p:blipFill>
-          <a:blip xmlns:r="http://schemas.openxmlformats.org/officeDocument/2006/relationships" xmlns:a="http://schemas.openxmlformats.org/drawingml/2006/main" r:embed="R75381f65c9d044ff"/>
+          <a:blip xmlns:r="http://schemas.openxmlformats.org/officeDocument/2006/relationships" xmlns:a="http://schemas.openxmlformats.org/drawingml/2006/main" r:embed="R2c99ad1cd44e409d"/>
           <a:stretch xmlns:a="http://schemas.openxmlformats.org/drawingml/2006/main">
             <a:fillRect l="0" t="0" r="0" b="0"/>
           </a:stretch>
@@ -19920,7 +19920,7 @@
           <p:nvPr/>
         </p:nvPicPr>
         <p:blipFill>
-          <a:blip xmlns:r="http://schemas.openxmlformats.org/officeDocument/2006/relationships" xmlns:a="http://schemas.openxmlformats.org/drawingml/2006/main" r:embed="R968d4918130d4c27"/>
+          <a:blip xmlns:r="http://schemas.openxmlformats.org/officeDocument/2006/relationships" xmlns:a="http://schemas.openxmlformats.org/drawingml/2006/main" r:embed="R11ac630a41b74049"/>
           <a:stretch xmlns:a="http://schemas.openxmlformats.org/drawingml/2006/main">
             <a:fillRect l="0" t="0" r="0" b="0"/>
           </a:stretch>
@@ -19997,7 +19997,7 @@
           <p:nvPr/>
         </p:nvPicPr>
         <p:blipFill>
-          <a:blip xmlns:r="http://schemas.openxmlformats.org/officeDocument/2006/relationships" xmlns:a="http://schemas.openxmlformats.org/drawingml/2006/main" r:embed="Rb93cd3e7b50946b5"/>
+          <a:blip xmlns:r="http://schemas.openxmlformats.org/officeDocument/2006/relationships" xmlns:a="http://schemas.openxmlformats.org/drawingml/2006/main" r:embed="R712d5bfc44a7403c"/>
           <a:stretch xmlns:a="http://schemas.openxmlformats.org/drawingml/2006/main">
             <a:fillRect l="0" t="0" r="0" b="0"/>
           </a:stretch>
@@ -20074,7 +20074,7 @@
           <p:nvPr/>
         </p:nvPicPr>
         <p:blipFill>
-          <a:blip xmlns:r="http://schemas.openxmlformats.org/officeDocument/2006/relationships" xmlns:a="http://schemas.openxmlformats.org/drawingml/2006/main" r:embed="R7d34582ce190479b"/>
+          <a:blip xmlns:r="http://schemas.openxmlformats.org/officeDocument/2006/relationships" xmlns:a="http://schemas.openxmlformats.org/drawingml/2006/main" r:embed="Re460573256174b8a"/>
           <a:stretch xmlns:a="http://schemas.openxmlformats.org/drawingml/2006/main">
             <a:fillRect l="0" t="0" r="0" b="0"/>
           </a:stretch>
@@ -20151,7 +20151,7 @@
           <p:nvPr/>
         </p:nvPicPr>
         <p:blipFill>
-          <a:blip xmlns:r="http://schemas.openxmlformats.org/officeDocument/2006/relationships" xmlns:a="http://schemas.openxmlformats.org/drawingml/2006/main" r:embed="R393d0c1f614b4e29"/>
+          <a:blip xmlns:r="http://schemas.openxmlformats.org/officeDocument/2006/relationships" xmlns:a="http://schemas.openxmlformats.org/drawingml/2006/main" r:embed="R2c986c7b829049a6"/>
           <a:stretch xmlns:a="http://schemas.openxmlformats.org/drawingml/2006/main">
             <a:fillRect l="0" t="0" r="0" b="0"/>
           </a:stretch>
@@ -20441,7 +20441,7 @@
           <p:nvPr/>
         </p:nvPicPr>
         <p:blipFill>
-          <a:blip xmlns:r="http://schemas.openxmlformats.org/officeDocument/2006/relationships" xmlns:a="http://schemas.openxmlformats.org/drawingml/2006/main" r:embed="Rf4cb896573f24c75"/>
+          <a:blip xmlns:r="http://schemas.openxmlformats.org/officeDocument/2006/relationships" xmlns:a="http://schemas.openxmlformats.org/drawingml/2006/main" r:embed="R24c15452b060437d"/>
           <a:stretch xmlns:a="http://schemas.openxmlformats.org/drawingml/2006/main">
             <a:fillRect l="0" t="0" r="0" b="0"/>
           </a:stretch>
@@ -20624,7 +20624,7 @@
           <p:nvPr/>
         </p:nvPicPr>
         <p:blipFill>
-          <a:blip xmlns:r="http://schemas.openxmlformats.org/officeDocument/2006/relationships" xmlns:a="http://schemas.openxmlformats.org/drawingml/2006/main" r:embed="R4729045ee01c4771"/>
+          <a:blip xmlns:r="http://schemas.openxmlformats.org/officeDocument/2006/relationships" xmlns:a="http://schemas.openxmlformats.org/drawingml/2006/main" r:embed="Rbc8871a0f118459d"/>
           <a:stretch xmlns:a="http://schemas.openxmlformats.org/drawingml/2006/main">
             <a:fillRect l="0" t="0" r="0" b="0"/>
           </a:stretch>
@@ -20648,7 +20648,7 @@
           <p:nvPr/>
         </p:nvPicPr>
         <p:blipFill>
-          <a:blip xmlns:r="http://schemas.openxmlformats.org/officeDocument/2006/relationships" xmlns:a="http://schemas.openxmlformats.org/drawingml/2006/main" r:embed="Rf18228aead874b3a"/>
+          <a:blip xmlns:r="http://schemas.openxmlformats.org/officeDocument/2006/relationships" xmlns:a="http://schemas.openxmlformats.org/drawingml/2006/main" r:embed="R1c00d6d3dafb43df"/>
           <a:stretch xmlns:a="http://schemas.openxmlformats.org/drawingml/2006/main">
             <a:fillRect l="0" t="0" r="0" b="0"/>
           </a:stretch>
@@ -20884,7 +20884,7 @@
           <p:nvPr/>
         </p:nvPicPr>
         <p:blipFill>
-          <a:blip xmlns:r="http://schemas.openxmlformats.org/officeDocument/2006/relationships" xmlns:a="http://schemas.openxmlformats.org/drawingml/2006/main" r:embed="R6562fd1b4f8541b3"/>
+          <a:blip xmlns:r="http://schemas.openxmlformats.org/officeDocument/2006/relationships" xmlns:a="http://schemas.openxmlformats.org/drawingml/2006/main" r:embed="R829a1b0dc14640fa"/>
           <a:stretch xmlns:a="http://schemas.openxmlformats.org/drawingml/2006/main">
             <a:fillRect l="0" t="0" r="0" b="0"/>
           </a:stretch>
@@ -20961,7 +20961,7 @@
           <p:nvPr/>
         </p:nvPicPr>
         <p:blipFill>
-          <a:blip xmlns:r="http://schemas.openxmlformats.org/officeDocument/2006/relationships" xmlns:a="http://schemas.openxmlformats.org/drawingml/2006/main" r:embed="R110ef338fad54847"/>
+          <a:blip xmlns:r="http://schemas.openxmlformats.org/officeDocument/2006/relationships" xmlns:a="http://schemas.openxmlformats.org/drawingml/2006/main" r:embed="R7d1ac4bf03b3430b"/>
           <a:stretch xmlns:a="http://schemas.openxmlformats.org/drawingml/2006/main">
             <a:fillRect l="0" t="0" r="0" b="0"/>
           </a:stretch>
@@ -21038,7 +21038,7 @@
           <p:nvPr/>
         </p:nvPicPr>
         <p:blipFill>
-          <a:blip xmlns:r="http://schemas.openxmlformats.org/officeDocument/2006/relationships" xmlns:a="http://schemas.openxmlformats.org/drawingml/2006/main" r:embed="R321af181fd284e2b"/>
+          <a:blip xmlns:r="http://schemas.openxmlformats.org/officeDocument/2006/relationships" xmlns:a="http://schemas.openxmlformats.org/drawingml/2006/main" r:embed="R0d2fb1697a624eef"/>
           <a:stretch xmlns:a="http://schemas.openxmlformats.org/drawingml/2006/main">
             <a:fillRect l="0" t="0" r="0" b="0"/>
           </a:stretch>
@@ -21115,7 +21115,7 @@
           <p:nvPr/>
         </p:nvPicPr>
         <p:blipFill>
-          <a:blip xmlns:r="http://schemas.openxmlformats.org/officeDocument/2006/relationships" xmlns:a="http://schemas.openxmlformats.org/drawingml/2006/main" r:embed="R3499b17868504fcc"/>
+          <a:blip xmlns:r="http://schemas.openxmlformats.org/officeDocument/2006/relationships" xmlns:a="http://schemas.openxmlformats.org/drawingml/2006/main" r:embed="R6eda92d8f73f47f4"/>
           <a:stretch xmlns:a="http://schemas.openxmlformats.org/drawingml/2006/main">
             <a:fillRect l="0" t="0" r="0" b="0"/>
           </a:stretch>
@@ -21192,7 +21192,7 @@
           <p:nvPr/>
         </p:nvPicPr>
         <p:blipFill>
-          <a:blip xmlns:r="http://schemas.openxmlformats.org/officeDocument/2006/relationships" xmlns:a="http://schemas.openxmlformats.org/drawingml/2006/main" r:embed="R220c9584edcd49a9"/>
+          <a:blip xmlns:r="http://schemas.openxmlformats.org/officeDocument/2006/relationships" xmlns:a="http://schemas.openxmlformats.org/drawingml/2006/main" r:embed="R021f9f890be548c4"/>
           <a:stretch xmlns:a="http://schemas.openxmlformats.org/drawingml/2006/main">
             <a:fillRect l="0" t="0" r="0" b="0"/>
           </a:stretch>
@@ -21269,7 +21269,7 @@
           <p:nvPr/>
         </p:nvPicPr>
         <p:blipFill>
-          <a:blip xmlns:r="http://schemas.openxmlformats.org/officeDocument/2006/relationships" xmlns:a="http://schemas.openxmlformats.org/drawingml/2006/main" r:embed="Rbadffc35311341e7"/>
+          <a:blip xmlns:r="http://schemas.openxmlformats.org/officeDocument/2006/relationships" xmlns:a="http://schemas.openxmlformats.org/drawingml/2006/main" r:embed="Rcb5b05efe2ea40f4"/>
           <a:stretch xmlns:a="http://schemas.openxmlformats.org/drawingml/2006/main">
             <a:fillRect l="0" t="0" r="0" b="0"/>
           </a:stretch>
@@ -21346,7 +21346,7 @@
           <p:nvPr/>
         </p:nvPicPr>
         <p:blipFill>
-          <a:blip xmlns:r="http://schemas.openxmlformats.org/officeDocument/2006/relationships" xmlns:a="http://schemas.openxmlformats.org/drawingml/2006/main" r:embed="Rc64c353c01cd4946"/>
+          <a:blip xmlns:r="http://schemas.openxmlformats.org/officeDocument/2006/relationships" xmlns:a="http://schemas.openxmlformats.org/drawingml/2006/main" r:embed="R4d7cc3aa90024238"/>
           <a:stretch xmlns:a="http://schemas.openxmlformats.org/drawingml/2006/main">
             <a:fillRect l="0" t="0" r="0" b="0"/>
           </a:stretch>
@@ -21636,7 +21636,7 @@
           <p:nvPr/>
         </p:nvPicPr>
         <p:blipFill>
-          <a:blip xmlns:r="http://schemas.openxmlformats.org/officeDocument/2006/relationships" xmlns:a="http://schemas.openxmlformats.org/drawingml/2006/main" r:embed="R54849a64bad2406d"/>
+          <a:blip xmlns:r="http://schemas.openxmlformats.org/officeDocument/2006/relationships" xmlns:a="http://schemas.openxmlformats.org/drawingml/2006/main" r:embed="R5a40ababaa9b40fa"/>
           <a:stretch xmlns:a="http://schemas.openxmlformats.org/drawingml/2006/main">
             <a:fillRect l="0" t="0" r="0" b="0"/>
           </a:stretch>
@@ -21819,7 +21819,7 @@
           <p:nvPr/>
         </p:nvPicPr>
         <p:blipFill>
-          <a:blip xmlns:r="http://schemas.openxmlformats.org/officeDocument/2006/relationships" xmlns:a="http://schemas.openxmlformats.org/drawingml/2006/main" r:embed="Refa5e47de47540f1"/>
+          <a:blip xmlns:r="http://schemas.openxmlformats.org/officeDocument/2006/relationships" xmlns:a="http://schemas.openxmlformats.org/drawingml/2006/main" r:embed="R95f80da9168e4ba1"/>
           <a:stretch xmlns:a="http://schemas.openxmlformats.org/drawingml/2006/main">
             <a:fillRect l="0" t="0" r="0" b="0"/>
           </a:stretch>
@@ -21843,7 +21843,7 @@
           <p:nvPr/>
         </p:nvPicPr>
         <p:blipFill>
-          <a:blip xmlns:r="http://schemas.openxmlformats.org/officeDocument/2006/relationships" xmlns:a="http://schemas.openxmlformats.org/drawingml/2006/main" r:embed="R394f1f5c81bd421d"/>
+          <a:blip xmlns:r="http://schemas.openxmlformats.org/officeDocument/2006/relationships" xmlns:a="http://schemas.openxmlformats.org/drawingml/2006/main" r:embed="R810ed055e1a2468e"/>
           <a:stretch xmlns:a="http://schemas.openxmlformats.org/drawingml/2006/main">
             <a:fillRect l="0" t="0" r="0" b="0"/>
           </a:stretch>
@@ -22768,7 +22768,7 @@
           <p:nvPr/>
         </p:nvPicPr>
         <p:blipFill>
-          <a:blip xmlns:r="http://schemas.openxmlformats.org/officeDocument/2006/relationships" xmlns:a="http://schemas.openxmlformats.org/drawingml/2006/main" r:embed="Rdb1f8ee77a9742f1"/>
+          <a:blip xmlns:r="http://schemas.openxmlformats.org/officeDocument/2006/relationships" xmlns:a="http://schemas.openxmlformats.org/drawingml/2006/main" r:embed="Rc27f60b27caf4cb3"/>
           <a:stretch xmlns:a="http://schemas.openxmlformats.org/drawingml/2006/main">
             <a:fillRect l="0" t="0" r="0" b="0"/>
           </a:stretch>
@@ -22792,7 +22792,7 @@
           <p:nvPr/>
         </p:nvPicPr>
         <p:blipFill>
-          <a:blip xmlns:r="http://schemas.openxmlformats.org/officeDocument/2006/relationships" xmlns:a="http://schemas.openxmlformats.org/drawingml/2006/main" r:embed="Re5e3b62205e64d70"/>
+          <a:blip xmlns:r="http://schemas.openxmlformats.org/officeDocument/2006/relationships" xmlns:a="http://schemas.openxmlformats.org/drawingml/2006/main" r:embed="R5dcf54ccbf094cdc"/>
           <a:stretch xmlns:a="http://schemas.openxmlformats.org/drawingml/2006/main">
             <a:fillRect l="0" t="0" r="0" b="0"/>
           </a:stretch>
@@ -23028,7 +23028,7 @@
           <p:nvPr/>
         </p:nvPicPr>
         <p:blipFill>
-          <a:blip xmlns:r="http://schemas.openxmlformats.org/officeDocument/2006/relationships" xmlns:a="http://schemas.openxmlformats.org/drawingml/2006/main" r:embed="Rb505ca63495e4fd4"/>
+          <a:blip xmlns:r="http://schemas.openxmlformats.org/officeDocument/2006/relationships" xmlns:a="http://schemas.openxmlformats.org/drawingml/2006/main" r:embed="R3a84a4bfa56643a4"/>
           <a:stretch xmlns:a="http://schemas.openxmlformats.org/drawingml/2006/main">
             <a:fillRect l="0" t="0" r="0" b="0"/>
           </a:stretch>
@@ -23105,7 +23105,7 @@
           <p:nvPr/>
         </p:nvPicPr>
         <p:blipFill>
-          <a:blip xmlns:r="http://schemas.openxmlformats.org/officeDocument/2006/relationships" xmlns:a="http://schemas.openxmlformats.org/drawingml/2006/main" r:embed="Rd87f4f909c714f6a"/>
+          <a:blip xmlns:r="http://schemas.openxmlformats.org/officeDocument/2006/relationships" xmlns:a="http://schemas.openxmlformats.org/drawingml/2006/main" r:embed="Rcfe6a799e48846d0"/>
           <a:stretch xmlns:a="http://schemas.openxmlformats.org/drawingml/2006/main">
             <a:fillRect l="0" t="0" r="0" b="0"/>
           </a:stretch>
@@ -23182,7 +23182,7 @@
           <p:nvPr/>
         </p:nvPicPr>
         <p:blipFill>
-          <a:blip xmlns:r="http://schemas.openxmlformats.org/officeDocument/2006/relationships" xmlns:a="http://schemas.openxmlformats.org/drawingml/2006/main" r:embed="R62159e2fd47d4098"/>
+          <a:blip xmlns:r="http://schemas.openxmlformats.org/officeDocument/2006/relationships" xmlns:a="http://schemas.openxmlformats.org/drawingml/2006/main" r:embed="R8d2982ccc0bb46dd"/>
           <a:stretch xmlns:a="http://schemas.openxmlformats.org/drawingml/2006/main">
             <a:fillRect l="0" t="0" r="0" b="0"/>
           </a:stretch>
@@ -23259,7 +23259,7 @@
           <p:nvPr/>
         </p:nvPicPr>
         <p:blipFill>
-          <a:blip xmlns:r="http://schemas.openxmlformats.org/officeDocument/2006/relationships" xmlns:a="http://schemas.openxmlformats.org/drawingml/2006/main" r:embed="Rdc17f9586ec34806"/>
+          <a:blip xmlns:r="http://schemas.openxmlformats.org/officeDocument/2006/relationships" xmlns:a="http://schemas.openxmlformats.org/drawingml/2006/main" r:embed="R7971d087251a404d"/>
           <a:stretch xmlns:a="http://schemas.openxmlformats.org/drawingml/2006/main">
             <a:fillRect l="0" t="0" r="0" b="0"/>
           </a:stretch>
@@ -23336,7 +23336,7 @@
           <p:nvPr/>
         </p:nvPicPr>
         <p:blipFill>
-          <a:blip xmlns:r="http://schemas.openxmlformats.org/officeDocument/2006/relationships" xmlns:a="http://schemas.openxmlformats.org/drawingml/2006/main" r:embed="R225d153ceb994231"/>
+          <a:blip xmlns:r="http://schemas.openxmlformats.org/officeDocument/2006/relationships" xmlns:a="http://schemas.openxmlformats.org/drawingml/2006/main" r:embed="R4fbae96a2bb14af9"/>
           <a:stretch xmlns:a="http://schemas.openxmlformats.org/drawingml/2006/main">
             <a:fillRect l="0" t="0" r="0" b="0"/>
           </a:stretch>
@@ -23413,7 +23413,7 @@
           <p:nvPr/>
         </p:nvPicPr>
         <p:blipFill>
-          <a:blip xmlns:r="http://schemas.openxmlformats.org/officeDocument/2006/relationships" xmlns:a="http://schemas.openxmlformats.org/drawingml/2006/main" r:embed="R1df9f519f3d84a1e"/>
+          <a:blip xmlns:r="http://schemas.openxmlformats.org/officeDocument/2006/relationships" xmlns:a="http://schemas.openxmlformats.org/drawingml/2006/main" r:embed="R4f28681ff5b94cad"/>
           <a:stretch xmlns:a="http://schemas.openxmlformats.org/drawingml/2006/main">
             <a:fillRect l="0" t="0" r="0" b="0"/>
           </a:stretch>
@@ -23490,7 +23490,7 @@
           <p:nvPr/>
         </p:nvPicPr>
         <p:blipFill>
-          <a:blip xmlns:r="http://schemas.openxmlformats.org/officeDocument/2006/relationships" xmlns:a="http://schemas.openxmlformats.org/drawingml/2006/main" r:embed="R7a9f75a0b7da4eb5"/>
+          <a:blip xmlns:r="http://schemas.openxmlformats.org/officeDocument/2006/relationships" xmlns:a="http://schemas.openxmlformats.org/drawingml/2006/main" r:embed="Re1f608f3c99b4c6f"/>
           <a:stretch xmlns:a="http://schemas.openxmlformats.org/drawingml/2006/main">
             <a:fillRect l="0" t="0" r="0" b="0"/>
           </a:stretch>
@@ -23780,7 +23780,7 @@
           <p:nvPr/>
         </p:nvPicPr>
         <p:blipFill>
-          <a:blip xmlns:r="http://schemas.openxmlformats.org/officeDocument/2006/relationships" xmlns:a="http://schemas.openxmlformats.org/drawingml/2006/main" r:embed="R5880cd7c33e6466f"/>
+          <a:blip xmlns:r="http://schemas.openxmlformats.org/officeDocument/2006/relationships" xmlns:a="http://schemas.openxmlformats.org/drawingml/2006/main" r:embed="R0360bf52e8694db5"/>
           <a:stretch xmlns:a="http://schemas.openxmlformats.org/drawingml/2006/main">
             <a:fillRect l="0" t="0" r="0" b="0"/>
           </a:stretch>
@@ -23963,7 +23963,7 @@
           <p:nvPr/>
         </p:nvPicPr>
         <p:blipFill>
-          <a:blip xmlns:r="http://schemas.openxmlformats.org/officeDocument/2006/relationships" xmlns:a="http://schemas.openxmlformats.org/drawingml/2006/main" r:embed="R53e2ba2ccce241b4"/>
+          <a:blip xmlns:r="http://schemas.openxmlformats.org/officeDocument/2006/relationships" xmlns:a="http://schemas.openxmlformats.org/drawingml/2006/main" r:embed="Rd8604b5fdb9c43d4"/>
           <a:stretch xmlns:a="http://schemas.openxmlformats.org/drawingml/2006/main">
             <a:fillRect l="0" t="0" r="0" b="0"/>
           </a:stretch>
@@ -23987,7 +23987,7 @@
           <p:nvPr/>
         </p:nvPicPr>
         <p:blipFill>
-          <a:blip xmlns:r="http://schemas.openxmlformats.org/officeDocument/2006/relationships" xmlns:a="http://schemas.openxmlformats.org/drawingml/2006/main" r:embed="Re81943d77f894d0b"/>
+          <a:blip xmlns:r="http://schemas.openxmlformats.org/officeDocument/2006/relationships" xmlns:a="http://schemas.openxmlformats.org/drawingml/2006/main" r:embed="R8402e8cde6be4341"/>
           <a:stretch xmlns:a="http://schemas.openxmlformats.org/drawingml/2006/main">
             <a:fillRect l="0" t="0" r="0" b="0"/>
           </a:stretch>
@@ -24911,7 +24911,7 @@
           <p:nvPr/>
         </p:nvPicPr>
         <p:blipFill>
-          <a:blip xmlns:r="http://schemas.openxmlformats.org/officeDocument/2006/relationships" xmlns:a="http://schemas.openxmlformats.org/drawingml/2006/main" r:embed="Rd956c152ac024b1a"/>
+          <a:blip xmlns:r="http://schemas.openxmlformats.org/officeDocument/2006/relationships" xmlns:a="http://schemas.openxmlformats.org/drawingml/2006/main" r:embed="Ra50fc4e5625c41b9"/>
           <a:stretch xmlns:a="http://schemas.openxmlformats.org/drawingml/2006/main">
             <a:fillRect l="0" t="0" r="0" b="0"/>
           </a:stretch>
@@ -24935,7 +24935,7 @@
           <p:nvPr/>
         </p:nvPicPr>
         <p:blipFill>
-          <a:blip xmlns:r="http://schemas.openxmlformats.org/officeDocument/2006/relationships" xmlns:a="http://schemas.openxmlformats.org/drawingml/2006/main" r:embed="R18f57ccc589341fb"/>
+          <a:blip xmlns:r="http://schemas.openxmlformats.org/officeDocument/2006/relationships" xmlns:a="http://schemas.openxmlformats.org/drawingml/2006/main" r:embed="R7aee2ff3b8094a60"/>
           <a:stretch xmlns:a="http://schemas.openxmlformats.org/drawingml/2006/main">
             <a:fillRect l="0" t="0" r="0" b="0"/>
           </a:stretch>
@@ -25171,7 +25171,7 @@
           <p:nvPr/>
         </p:nvPicPr>
         <p:blipFill>
-          <a:blip xmlns:r="http://schemas.openxmlformats.org/officeDocument/2006/relationships" xmlns:a="http://schemas.openxmlformats.org/drawingml/2006/main" r:embed="Rb93c8210615448bc"/>
+          <a:blip xmlns:r="http://schemas.openxmlformats.org/officeDocument/2006/relationships" xmlns:a="http://schemas.openxmlformats.org/drawingml/2006/main" r:embed="R0d00627ea329479e"/>
           <a:stretch xmlns:a="http://schemas.openxmlformats.org/drawingml/2006/main">
             <a:fillRect l="0" t="0" r="0" b="0"/>
           </a:stretch>
@@ -25248,7 +25248,7 @@
           <p:nvPr/>
         </p:nvPicPr>
         <p:blipFill>
-          <a:blip xmlns:r="http://schemas.openxmlformats.org/officeDocument/2006/relationships" xmlns:a="http://schemas.openxmlformats.org/drawingml/2006/main" r:embed="Rb3d78f4624c24fe0"/>
+          <a:blip xmlns:r="http://schemas.openxmlformats.org/officeDocument/2006/relationships" xmlns:a="http://schemas.openxmlformats.org/drawingml/2006/main" r:embed="Rf356a8754b0547db"/>
           <a:stretch xmlns:a="http://schemas.openxmlformats.org/drawingml/2006/main">
             <a:fillRect l="0" t="0" r="0" b="0"/>
           </a:stretch>
@@ -25325,7 +25325,7 @@
           <p:nvPr/>
         </p:nvPicPr>
         <p:blipFill>
-          <a:blip xmlns:r="http://schemas.openxmlformats.org/officeDocument/2006/relationships" xmlns:a="http://schemas.openxmlformats.org/drawingml/2006/main" r:embed="R0eb25ae020c54bdb"/>
+          <a:blip xmlns:r="http://schemas.openxmlformats.org/officeDocument/2006/relationships" xmlns:a="http://schemas.openxmlformats.org/drawingml/2006/main" r:embed="Ra75cd4b75c22474d"/>
           <a:stretch xmlns:a="http://schemas.openxmlformats.org/drawingml/2006/main">
             <a:fillRect l="0" t="0" r="0" b="0"/>
           </a:stretch>
@@ -25402,7 +25402,7 @@
           <p:nvPr/>
         </p:nvPicPr>
         <p:blipFill>
-          <a:blip xmlns:r="http://schemas.openxmlformats.org/officeDocument/2006/relationships" xmlns:a="http://schemas.openxmlformats.org/drawingml/2006/main" r:embed="Rfc844ccd586748a1"/>
+          <a:blip xmlns:r="http://schemas.openxmlformats.org/officeDocument/2006/relationships" xmlns:a="http://schemas.openxmlformats.org/drawingml/2006/main" r:embed="R287d9566560d4d8f"/>
           <a:stretch xmlns:a="http://schemas.openxmlformats.org/drawingml/2006/main">
             <a:fillRect l="0" t="0" r="0" b="0"/>
           </a:stretch>
@@ -25479,7 +25479,7 @@
           <p:nvPr/>
         </p:nvPicPr>
         <p:blipFill>
-          <a:blip xmlns:r="http://schemas.openxmlformats.org/officeDocument/2006/relationships" xmlns:a="http://schemas.openxmlformats.org/drawingml/2006/main" r:embed="R183d2f8567a44a58"/>
+          <a:blip xmlns:r="http://schemas.openxmlformats.org/officeDocument/2006/relationships" xmlns:a="http://schemas.openxmlformats.org/drawingml/2006/main" r:embed="Rfe506a32dd7f45b9"/>
           <a:stretch xmlns:a="http://schemas.openxmlformats.org/drawingml/2006/main">
             <a:fillRect l="0" t="0" r="0" b="0"/>
           </a:stretch>
@@ -25556,7 +25556,7 @@
           <p:nvPr/>
         </p:nvPicPr>
         <p:blipFill>
-          <a:blip xmlns:r="http://schemas.openxmlformats.org/officeDocument/2006/relationships" xmlns:a="http://schemas.openxmlformats.org/drawingml/2006/main" r:embed="R491a9ee138154ce9"/>
+          <a:blip xmlns:r="http://schemas.openxmlformats.org/officeDocument/2006/relationships" xmlns:a="http://schemas.openxmlformats.org/drawingml/2006/main" r:embed="R747a084772c6427d"/>
           <a:stretch xmlns:a="http://schemas.openxmlformats.org/drawingml/2006/main">
             <a:fillRect l="0" t="0" r="0" b="0"/>
           </a:stretch>
@@ -25633,7 +25633,7 @@
           <p:nvPr/>
         </p:nvPicPr>
         <p:blipFill>
-          <a:blip xmlns:r="http://schemas.openxmlformats.org/officeDocument/2006/relationships" xmlns:a="http://schemas.openxmlformats.org/drawingml/2006/main" r:embed="R1f3b8b1b68574180"/>
+          <a:blip xmlns:r="http://schemas.openxmlformats.org/officeDocument/2006/relationships" xmlns:a="http://schemas.openxmlformats.org/drawingml/2006/main" r:embed="R84ade31d6d15406a"/>
           <a:stretch xmlns:a="http://schemas.openxmlformats.org/drawingml/2006/main">
             <a:fillRect l="0" t="0" r="0" b="0"/>
           </a:stretch>
@@ -25923,7 +25923,7 @@
           <p:nvPr/>
         </p:nvPicPr>
         <p:blipFill>
-          <a:blip xmlns:r="http://schemas.openxmlformats.org/officeDocument/2006/relationships" xmlns:a="http://schemas.openxmlformats.org/drawingml/2006/main" r:embed="Rad4fc4141c654447"/>
+          <a:blip xmlns:r="http://schemas.openxmlformats.org/officeDocument/2006/relationships" xmlns:a="http://schemas.openxmlformats.org/drawingml/2006/main" r:embed="R9f78948e1a954f33"/>
           <a:stretch xmlns:a="http://schemas.openxmlformats.org/drawingml/2006/main">
             <a:fillRect l="0" t="0" r="0" b="0"/>
           </a:stretch>
